--- a/课件/C2/C2-A-06/C2-A-06.pptx
+++ b/课件/C2/C2-A-06/C2-A-06.pptx
@@ -1,32 +1,32 @@
 
 <file path=ppt/presentation.xml><?xml version="1.0" encoding="utf-8"?>
-<p:presentation xmlns:a="http://schemas.openxmlformats.org/drawingml/2006/main" xmlns:r="http://schemas.openxmlformats.org/officeDocument/2006/relationships" xmlns:p="http://schemas.openxmlformats.org/presentationml/2006/main" saveSubsetFonts="1" autoCompressPictures="0">
+<p:presentation xmlns:a="http://schemas.openxmlformats.org/drawingml/2006/main" xmlns:r="http://schemas.openxmlformats.org/officeDocument/2006/relationships" xmlns:p="http://schemas.openxmlformats.org/presentationml/2006/main" autoCompressPictures="0">
   <p:sldMasterIdLst>
     <p:sldMasterId id="2147483648" r:id="rId1"/>
   </p:sldMasterIdLst>
+  <p:notesMasterIdLst>
+    <p:notesMasterId r:id="rId4"/>
+  </p:notesMasterIdLst>
   <p:sldIdLst>
-    <p:sldId id="256" r:id="rId2"/>
-    <p:sldId id="257" r:id="rId3"/>
-    <p:sldId id="258" r:id="rId4"/>
-    <p:sldId id="259" r:id="rId5"/>
-    <p:sldId id="260" r:id="rId6"/>
-    <p:sldId id="261" r:id="rId7"/>
-    <p:sldId id="262" r:id="rId8"/>
-    <p:sldId id="263" r:id="rId9"/>
-    <p:sldId id="264" r:id="rId10"/>
-    <p:sldId id="265" r:id="rId11"/>
-    <p:sldId id="266" r:id="rId12"/>
-    <p:sldId id="267" r:id="rId13"/>
-    <p:sldId id="268" r:id="rId14"/>
-    <p:sldId id="269" r:id="rId15"/>
-    <p:sldId id="270" r:id="rId16"/>
-    <p:sldId id="271" r:id="rId17"/>
+    <p:sldId id="256" r:id="rId3"/>
+    <p:sldId id="257" r:id="rId5"/>
+    <p:sldId id="258" r:id="rId6"/>
+    <p:sldId id="259" r:id="rId7"/>
+    <p:sldId id="260" r:id="rId8"/>
+    <p:sldId id="261" r:id="rId9"/>
+    <p:sldId id="262" r:id="rId10"/>
+    <p:sldId id="263" r:id="rId11"/>
+    <p:sldId id="264" r:id="rId12"/>
+    <p:sldId id="265" r:id="rId13"/>
+    <p:sldId id="266" r:id="rId14"/>
+    <p:sldId id="267" r:id="rId15"/>
+    <p:sldId id="268" r:id="rId16"/>
+    <p:sldId id="269" r:id="rId17"/>
+    <p:sldId id="270" r:id="rId18"/>
+    <p:sldId id="271" r:id="rId19"/>
   </p:sldIdLst>
-  <p:notesMasterIdLst>
-    <p:notesMasterId r:id="rId18"/>
-  </p:notesMasterIdLst>
-  <p:sldSz cx="12191695" cy="6858000"/>
-  <p:notesSz cx="6858000" cy="12191695"/>
+  <p:sldSz cx="12191365" cy="6858000"/>
+  <p:notesSz cx="6858000" cy="12191365"/>
   <p:defaultTextStyle>
     <a:lvl1pPr marL="0" algn="l" defTabSz="914400" rtl="0" eaLnBrk="1" latinLnBrk="0" hangingPunct="1">
       <a:defRPr sz="1800" kern="1200">
@@ -204,7 +204,6 @@
           <a:p>
             <a:fld id="{5282F153-3F37-0F45-9E97-73ACFA13230C}" type="datetimeFigureOut">
               <a:rPr lang="en-US"/>
-              <a:t>7/23/19</a:t>
             </a:fld>
             <a:endParaRPr lang="en-US"/>
           </a:p>
@@ -271,6 +270,7 @@
               <a:rPr lang="en-US"/>
               <a:t>Click to edit Master text styles</a:t>
             </a:r>
+            <a:endParaRPr lang="en-US"/>
           </a:p>
           <a:p>
             <a:pPr lvl="1"/>
@@ -278,6 +278,7 @@
               <a:rPr lang="en-US"/>
               <a:t>Second level</a:t>
             </a:r>
+            <a:endParaRPr lang="en-US"/>
           </a:p>
           <a:p>
             <a:pPr lvl="2"/>
@@ -285,6 +286,7 @@
               <a:rPr lang="en-US"/>
               <a:t>Third level</a:t>
             </a:r>
+            <a:endParaRPr lang="en-US"/>
           </a:p>
           <a:p>
             <a:pPr lvl="3"/>
@@ -292,6 +294,7 @@
               <a:rPr lang="en-US"/>
               <a:t>Fourth level</a:t>
             </a:r>
+            <a:endParaRPr lang="en-US"/>
           </a:p>
           <a:p>
             <a:pPr lvl="4"/>
@@ -299,6 +302,7 @@
               <a:rPr lang="en-US"/>
               <a:t>Fifth level</a:t>
             </a:r>
+            <a:endParaRPr lang="en-US"/>
           </a:p>
         </p:txBody>
       </p:sp>
@@ -362,18 +366,12 @@
           <a:p>
             <a:fld id="{CE5E9CC1-C706-0F49-92D6-E571CC5EEA8F}" type="slidenum">
               <a:rPr lang="en-US"/>
-              <a:t>‹#›</a:t>
             </a:fld>
             <a:endParaRPr lang="en-US"/>
           </a:p>
         </p:txBody>
       </p:sp>
     </p:spTree>
-    <p:extLst>
-      <p:ext uri="{BB962C8B-B14F-4D97-AF65-F5344CB8AC3E}">
-        <p14:creationId xmlns:p14="http://schemas.microsoft.com/office/powerpoint/2010/main" val="1024086991"/>
-      </p:ext>
-    </p:extLst>
   </p:cSld>
   <p:clrMap bg1="lt1" tx1="dk1" bg2="lt2" tx2="dk2" accent1="accent1" accent2="accent2" accent3="accent3" accent4="accent4" accent5="accent5" accent6="accent6" hlink="hlink" folHlink="folHlink"/>
   <p:notesStyle>
@@ -515,10 +513,6 @@
           <a:bodyPr/>
           <a:lstStyle/>
           <a:p>
-            <a:r>
-              <a:rPr lang="en-US" dirty="0"/>
-              <a:t/>
-            </a:r>
             <a:endParaRPr lang="en-US" dirty="0"/>
           </a:p>
         </p:txBody>
@@ -540,18 +534,12 @@
           <a:p>
             <a:fld id="{F7021451-1387-4CA6-816F-3879F97B5CBC}" type="slidenum">
               <a:rPr lang="en-US"/>
-              <a:t>1</a:t>
             </a:fld>
             <a:endParaRPr lang="en-US"/>
           </a:p>
         </p:txBody>
       </p:sp>
     </p:spTree>
-    <p:extLst>
-      <p:ext uri="{BB962C8B-B14F-4D97-AF65-F5344CB8AC3E}">
-        <p14:creationId xmlns:p14="http://schemas.microsoft.com/office/powerpoint/2010/main" val="1024086991"/>
-      </p:ext>
-    </p:extLst>
   </p:cSld>
   <p:clrMapOvr>
     <a:masterClrMapping/>
@@ -603,10 +591,6 @@
           <a:bodyPr/>
           <a:lstStyle/>
           <a:p>
-            <a:r>
-              <a:rPr lang="en-US" dirty="0"/>
-              <a:t/>
-            </a:r>
             <a:endParaRPr lang="en-US" dirty="0"/>
           </a:p>
         </p:txBody>
@@ -628,18 +612,12 @@
           <a:p>
             <a:fld id="{F7021451-1387-4CA6-816F-3879F97B5CBC}" type="slidenum">
               <a:rPr lang="en-US"/>
-              <a:t>10</a:t>
             </a:fld>
             <a:endParaRPr lang="en-US"/>
           </a:p>
         </p:txBody>
       </p:sp>
     </p:spTree>
-    <p:extLst>
-      <p:ext uri="{BB962C8B-B14F-4D97-AF65-F5344CB8AC3E}">
-        <p14:creationId xmlns:p14="http://schemas.microsoft.com/office/powerpoint/2010/main" val="1024086991"/>
-      </p:ext>
-    </p:extLst>
   </p:cSld>
   <p:clrMapOvr>
     <a:masterClrMapping/>
@@ -691,10 +669,6 @@
           <a:bodyPr/>
           <a:lstStyle/>
           <a:p>
-            <a:r>
-              <a:rPr lang="en-US" dirty="0"/>
-              <a:t/>
-            </a:r>
             <a:endParaRPr lang="en-US" dirty="0"/>
           </a:p>
         </p:txBody>
@@ -716,18 +690,12 @@
           <a:p>
             <a:fld id="{F7021451-1387-4CA6-816F-3879F97B5CBC}" type="slidenum">
               <a:rPr lang="en-US"/>
-              <a:t>11</a:t>
             </a:fld>
             <a:endParaRPr lang="en-US"/>
           </a:p>
         </p:txBody>
       </p:sp>
     </p:spTree>
-    <p:extLst>
-      <p:ext uri="{BB962C8B-B14F-4D97-AF65-F5344CB8AC3E}">
-        <p14:creationId xmlns:p14="http://schemas.microsoft.com/office/powerpoint/2010/main" val="1024086991"/>
-      </p:ext>
-    </p:extLst>
   </p:cSld>
   <p:clrMapOvr>
     <a:masterClrMapping/>
@@ -779,10 +747,6 @@
           <a:bodyPr/>
           <a:lstStyle/>
           <a:p>
-            <a:r>
-              <a:rPr lang="en-US" dirty="0"/>
-              <a:t/>
-            </a:r>
             <a:endParaRPr lang="en-US" dirty="0"/>
           </a:p>
         </p:txBody>
@@ -804,18 +768,12 @@
           <a:p>
             <a:fld id="{F7021451-1387-4CA6-816F-3879F97B5CBC}" type="slidenum">
               <a:rPr lang="en-US"/>
-              <a:t>12</a:t>
             </a:fld>
             <a:endParaRPr lang="en-US"/>
           </a:p>
         </p:txBody>
       </p:sp>
     </p:spTree>
-    <p:extLst>
-      <p:ext uri="{BB962C8B-B14F-4D97-AF65-F5344CB8AC3E}">
-        <p14:creationId xmlns:p14="http://schemas.microsoft.com/office/powerpoint/2010/main" val="1024086991"/>
-      </p:ext>
-    </p:extLst>
   </p:cSld>
   <p:clrMapOvr>
     <a:masterClrMapping/>
@@ -867,10 +825,6 @@
           <a:bodyPr/>
           <a:lstStyle/>
           <a:p>
-            <a:r>
-              <a:rPr lang="en-US" dirty="0"/>
-              <a:t/>
-            </a:r>
             <a:endParaRPr lang="en-US" dirty="0"/>
           </a:p>
         </p:txBody>
@@ -892,18 +846,12 @@
           <a:p>
             <a:fld id="{F7021451-1387-4CA6-816F-3879F97B5CBC}" type="slidenum">
               <a:rPr lang="en-US"/>
-              <a:t>13</a:t>
             </a:fld>
             <a:endParaRPr lang="en-US"/>
           </a:p>
         </p:txBody>
       </p:sp>
     </p:spTree>
-    <p:extLst>
-      <p:ext uri="{BB962C8B-B14F-4D97-AF65-F5344CB8AC3E}">
-        <p14:creationId xmlns:p14="http://schemas.microsoft.com/office/powerpoint/2010/main" val="1024086991"/>
-      </p:ext>
-    </p:extLst>
   </p:cSld>
   <p:clrMapOvr>
     <a:masterClrMapping/>
@@ -955,10 +903,6 @@
           <a:bodyPr/>
           <a:lstStyle/>
           <a:p>
-            <a:r>
-              <a:rPr lang="en-US" dirty="0"/>
-              <a:t/>
-            </a:r>
             <a:endParaRPr lang="en-US" dirty="0"/>
           </a:p>
         </p:txBody>
@@ -980,18 +924,12 @@
           <a:p>
             <a:fld id="{F7021451-1387-4CA6-816F-3879F97B5CBC}" type="slidenum">
               <a:rPr lang="en-US"/>
-              <a:t>14</a:t>
             </a:fld>
             <a:endParaRPr lang="en-US"/>
           </a:p>
         </p:txBody>
       </p:sp>
     </p:spTree>
-    <p:extLst>
-      <p:ext uri="{BB962C8B-B14F-4D97-AF65-F5344CB8AC3E}">
-        <p14:creationId xmlns:p14="http://schemas.microsoft.com/office/powerpoint/2010/main" val="1024086991"/>
-      </p:ext>
-    </p:extLst>
   </p:cSld>
   <p:clrMapOvr>
     <a:masterClrMapping/>
@@ -1043,10 +981,6 @@
           <a:bodyPr/>
           <a:lstStyle/>
           <a:p>
-            <a:r>
-              <a:rPr lang="en-US" dirty="0"/>
-              <a:t/>
-            </a:r>
             <a:endParaRPr lang="en-US" dirty="0"/>
           </a:p>
         </p:txBody>
@@ -1068,18 +1002,12 @@
           <a:p>
             <a:fld id="{F7021451-1387-4CA6-816F-3879F97B5CBC}" type="slidenum">
               <a:rPr lang="en-US"/>
-              <a:t>15</a:t>
             </a:fld>
             <a:endParaRPr lang="en-US"/>
           </a:p>
         </p:txBody>
       </p:sp>
     </p:spTree>
-    <p:extLst>
-      <p:ext uri="{BB962C8B-B14F-4D97-AF65-F5344CB8AC3E}">
-        <p14:creationId xmlns:p14="http://schemas.microsoft.com/office/powerpoint/2010/main" val="1024086991"/>
-      </p:ext>
-    </p:extLst>
   </p:cSld>
   <p:clrMapOvr>
     <a:masterClrMapping/>
@@ -1131,10 +1059,6 @@
           <a:bodyPr/>
           <a:lstStyle/>
           <a:p>
-            <a:r>
-              <a:rPr lang="en-US" dirty="0"/>
-              <a:t/>
-            </a:r>
             <a:endParaRPr lang="en-US" dirty="0"/>
           </a:p>
         </p:txBody>
@@ -1156,18 +1080,12 @@
           <a:p>
             <a:fld id="{F7021451-1387-4CA6-816F-3879F97B5CBC}" type="slidenum">
               <a:rPr lang="en-US"/>
-              <a:t>16</a:t>
             </a:fld>
             <a:endParaRPr lang="en-US"/>
           </a:p>
         </p:txBody>
       </p:sp>
     </p:spTree>
-    <p:extLst>
-      <p:ext uri="{BB962C8B-B14F-4D97-AF65-F5344CB8AC3E}">
-        <p14:creationId xmlns:p14="http://schemas.microsoft.com/office/powerpoint/2010/main" val="1024086991"/>
-      </p:ext>
-    </p:extLst>
   </p:cSld>
   <p:clrMapOvr>
     <a:masterClrMapping/>
@@ -1219,10 +1137,6 @@
           <a:bodyPr/>
           <a:lstStyle/>
           <a:p>
-            <a:r>
-              <a:rPr lang="en-US" dirty="0"/>
-              <a:t/>
-            </a:r>
             <a:endParaRPr lang="en-US" dirty="0"/>
           </a:p>
         </p:txBody>
@@ -1244,18 +1158,12 @@
           <a:p>
             <a:fld id="{F7021451-1387-4CA6-816F-3879F97B5CBC}" type="slidenum">
               <a:rPr lang="en-US"/>
-              <a:t>2</a:t>
             </a:fld>
             <a:endParaRPr lang="en-US"/>
           </a:p>
         </p:txBody>
       </p:sp>
     </p:spTree>
-    <p:extLst>
-      <p:ext uri="{BB962C8B-B14F-4D97-AF65-F5344CB8AC3E}">
-        <p14:creationId xmlns:p14="http://schemas.microsoft.com/office/powerpoint/2010/main" val="1024086991"/>
-      </p:ext>
-    </p:extLst>
   </p:cSld>
   <p:clrMapOvr>
     <a:masterClrMapping/>
@@ -1307,10 +1215,6 @@
           <a:bodyPr/>
           <a:lstStyle/>
           <a:p>
-            <a:r>
-              <a:rPr lang="en-US" dirty="0"/>
-              <a:t/>
-            </a:r>
             <a:endParaRPr lang="en-US" dirty="0"/>
           </a:p>
         </p:txBody>
@@ -1332,18 +1236,12 @@
           <a:p>
             <a:fld id="{F7021451-1387-4CA6-816F-3879F97B5CBC}" type="slidenum">
               <a:rPr lang="en-US"/>
-              <a:t>3</a:t>
             </a:fld>
             <a:endParaRPr lang="en-US"/>
           </a:p>
         </p:txBody>
       </p:sp>
     </p:spTree>
-    <p:extLst>
-      <p:ext uri="{BB962C8B-B14F-4D97-AF65-F5344CB8AC3E}">
-        <p14:creationId xmlns:p14="http://schemas.microsoft.com/office/powerpoint/2010/main" val="1024086991"/>
-      </p:ext>
-    </p:extLst>
   </p:cSld>
   <p:clrMapOvr>
     <a:masterClrMapping/>
@@ -1395,10 +1293,6 @@
           <a:bodyPr/>
           <a:lstStyle/>
           <a:p>
-            <a:r>
-              <a:rPr lang="en-US" dirty="0"/>
-              <a:t/>
-            </a:r>
             <a:endParaRPr lang="en-US" dirty="0"/>
           </a:p>
         </p:txBody>
@@ -1420,18 +1314,12 @@
           <a:p>
             <a:fld id="{F7021451-1387-4CA6-816F-3879F97B5CBC}" type="slidenum">
               <a:rPr lang="en-US"/>
-              <a:t>4</a:t>
             </a:fld>
             <a:endParaRPr lang="en-US"/>
           </a:p>
         </p:txBody>
       </p:sp>
     </p:spTree>
-    <p:extLst>
-      <p:ext uri="{BB962C8B-B14F-4D97-AF65-F5344CB8AC3E}">
-        <p14:creationId xmlns:p14="http://schemas.microsoft.com/office/powerpoint/2010/main" val="1024086991"/>
-      </p:ext>
-    </p:extLst>
   </p:cSld>
   <p:clrMapOvr>
     <a:masterClrMapping/>
@@ -1483,10 +1371,6 @@
           <a:bodyPr/>
           <a:lstStyle/>
           <a:p>
-            <a:r>
-              <a:rPr lang="en-US" dirty="0"/>
-              <a:t/>
-            </a:r>
             <a:endParaRPr lang="en-US" dirty="0"/>
           </a:p>
         </p:txBody>
@@ -1508,18 +1392,12 @@
           <a:p>
             <a:fld id="{F7021451-1387-4CA6-816F-3879F97B5CBC}" type="slidenum">
               <a:rPr lang="en-US"/>
-              <a:t>5</a:t>
             </a:fld>
             <a:endParaRPr lang="en-US"/>
           </a:p>
         </p:txBody>
       </p:sp>
     </p:spTree>
-    <p:extLst>
-      <p:ext uri="{BB962C8B-B14F-4D97-AF65-F5344CB8AC3E}">
-        <p14:creationId xmlns:p14="http://schemas.microsoft.com/office/powerpoint/2010/main" val="1024086991"/>
-      </p:ext>
-    </p:extLst>
   </p:cSld>
   <p:clrMapOvr>
     <a:masterClrMapping/>
@@ -1571,10 +1449,6 @@
           <a:bodyPr/>
           <a:lstStyle/>
           <a:p>
-            <a:r>
-              <a:rPr lang="en-US" dirty="0"/>
-              <a:t/>
-            </a:r>
             <a:endParaRPr lang="en-US" dirty="0"/>
           </a:p>
         </p:txBody>
@@ -1596,18 +1470,12 @@
           <a:p>
             <a:fld id="{F7021451-1387-4CA6-816F-3879F97B5CBC}" type="slidenum">
               <a:rPr lang="en-US"/>
-              <a:t>6</a:t>
             </a:fld>
             <a:endParaRPr lang="en-US"/>
           </a:p>
         </p:txBody>
       </p:sp>
     </p:spTree>
-    <p:extLst>
-      <p:ext uri="{BB962C8B-B14F-4D97-AF65-F5344CB8AC3E}">
-        <p14:creationId xmlns:p14="http://schemas.microsoft.com/office/powerpoint/2010/main" val="1024086991"/>
-      </p:ext>
-    </p:extLst>
   </p:cSld>
   <p:clrMapOvr>
     <a:masterClrMapping/>
@@ -1659,10 +1527,6 @@
           <a:bodyPr/>
           <a:lstStyle/>
           <a:p>
-            <a:r>
-              <a:rPr lang="en-US" dirty="0"/>
-              <a:t/>
-            </a:r>
             <a:endParaRPr lang="en-US" dirty="0"/>
           </a:p>
         </p:txBody>
@@ -1684,18 +1548,12 @@
           <a:p>
             <a:fld id="{F7021451-1387-4CA6-816F-3879F97B5CBC}" type="slidenum">
               <a:rPr lang="en-US"/>
-              <a:t>7</a:t>
             </a:fld>
             <a:endParaRPr lang="en-US"/>
           </a:p>
         </p:txBody>
       </p:sp>
     </p:spTree>
-    <p:extLst>
-      <p:ext uri="{BB962C8B-B14F-4D97-AF65-F5344CB8AC3E}">
-        <p14:creationId xmlns:p14="http://schemas.microsoft.com/office/powerpoint/2010/main" val="1024086991"/>
-      </p:ext>
-    </p:extLst>
   </p:cSld>
   <p:clrMapOvr>
     <a:masterClrMapping/>
@@ -1747,10 +1605,6 @@
           <a:bodyPr/>
           <a:lstStyle/>
           <a:p>
-            <a:r>
-              <a:rPr lang="en-US" dirty="0"/>
-              <a:t/>
-            </a:r>
             <a:endParaRPr lang="en-US" dirty="0"/>
           </a:p>
         </p:txBody>
@@ -1772,18 +1626,12 @@
           <a:p>
             <a:fld id="{F7021451-1387-4CA6-816F-3879F97B5CBC}" type="slidenum">
               <a:rPr lang="en-US"/>
-              <a:t>8</a:t>
             </a:fld>
             <a:endParaRPr lang="en-US"/>
           </a:p>
         </p:txBody>
       </p:sp>
     </p:spTree>
-    <p:extLst>
-      <p:ext uri="{BB962C8B-B14F-4D97-AF65-F5344CB8AC3E}">
-        <p14:creationId xmlns:p14="http://schemas.microsoft.com/office/powerpoint/2010/main" val="1024086991"/>
-      </p:ext>
-    </p:extLst>
   </p:cSld>
   <p:clrMapOvr>
     <a:masterClrMapping/>
@@ -1835,10 +1683,6 @@
           <a:bodyPr/>
           <a:lstStyle/>
           <a:p>
-            <a:r>
-              <a:rPr lang="en-US" dirty="0"/>
-              <a:t/>
-            </a:r>
             <a:endParaRPr lang="en-US" dirty="0"/>
           </a:p>
         </p:txBody>
@@ -1860,18 +1704,12 @@
           <a:p>
             <a:fld id="{F7021451-1387-4CA6-816F-3879F97B5CBC}" type="slidenum">
               <a:rPr lang="en-US"/>
-              <a:t>9</a:t>
             </a:fld>
             <a:endParaRPr lang="en-US"/>
           </a:p>
         </p:txBody>
       </p:sp>
     </p:spTree>
-    <p:extLst>
-      <p:ext uri="{BB962C8B-B14F-4D97-AF65-F5344CB8AC3E}">
-        <p14:creationId xmlns:p14="http://schemas.microsoft.com/office/powerpoint/2010/main" val="1024086991"/>
-      </p:ext>
-    </p:extLst>
   </p:cSld>
   <p:clrMapOvr>
     <a:masterClrMapping/>
@@ -1912,6 +1750,11 @@
 <file path=ppt/slideMasters/slideMaster1.xml><?xml version="1.0" encoding="utf-8"?>
 <p:sldMaster xmlns:a="http://schemas.openxmlformats.org/drawingml/2006/main" xmlns:r="http://schemas.openxmlformats.org/officeDocument/2006/relationships" xmlns:p="http://schemas.openxmlformats.org/presentationml/2006/main">
   <p:cSld>
+    <p:bg>
+      <p:bgRef idx="1001">
+        <a:schemeClr val="bg1"/>
+      </p:bgRef>
+    </p:bg>
     <p:spTree>
       <p:nvGrpSpPr>
         <p:cNvPr id="1" name=""/>
@@ -1955,7 +1798,7 @@
         <a:spcBef>
           <a:spcPct val="20000"/>
         </a:spcBef>
-        <a:buFont typeface="Arial" pitchFamily="34" charset="0"/>
+        <a:buFont typeface="Arial" panose="020B0604020202020204" pitchFamily="34" charset="0"/>
         <a:buChar char="•"/>
         <a:defRPr sz="3200" kern="1200">
           <a:solidFill>
@@ -1970,7 +1813,7 @@
         <a:spcBef>
           <a:spcPct val="20000"/>
         </a:spcBef>
-        <a:buFont typeface="Arial" pitchFamily="34" charset="0"/>
+        <a:buFont typeface="Arial" panose="020B0604020202020204" pitchFamily="34" charset="0"/>
         <a:buChar char="–"/>
         <a:defRPr sz="2800" kern="1200">
           <a:solidFill>
@@ -1985,7 +1828,7 @@
         <a:spcBef>
           <a:spcPct val="20000"/>
         </a:spcBef>
-        <a:buFont typeface="Arial" pitchFamily="34" charset="0"/>
+        <a:buFont typeface="Arial" panose="020B0604020202020204" pitchFamily="34" charset="0"/>
         <a:buChar char="•"/>
         <a:defRPr sz="2400" kern="1200">
           <a:solidFill>
@@ -2000,7 +1843,7 @@
         <a:spcBef>
           <a:spcPct val="20000"/>
         </a:spcBef>
-        <a:buFont typeface="Arial" pitchFamily="34" charset="0"/>
+        <a:buFont typeface="Arial" panose="020B0604020202020204" pitchFamily="34" charset="0"/>
         <a:buChar char="–"/>
         <a:defRPr sz="2000" kern="1200">
           <a:solidFill>
@@ -2015,7 +1858,7 @@
         <a:spcBef>
           <a:spcPct val="20000"/>
         </a:spcBef>
-        <a:buFont typeface="Arial" pitchFamily="34" charset="0"/>
+        <a:buFont typeface="Arial" panose="020B0604020202020204" pitchFamily="34" charset="0"/>
         <a:buChar char="»"/>
         <a:defRPr sz="2000" kern="1200">
           <a:solidFill>
@@ -2030,7 +1873,7 @@
         <a:spcBef>
           <a:spcPct val="20000"/>
         </a:spcBef>
-        <a:buFont typeface="Arial" pitchFamily="34" charset="0"/>
+        <a:buFont typeface="Arial" panose="020B0604020202020204" pitchFamily="34" charset="0"/>
         <a:buChar char="•"/>
         <a:defRPr sz="2000" kern="1200">
           <a:solidFill>
@@ -2045,7 +1888,7 @@
         <a:spcBef>
           <a:spcPct val="20000"/>
         </a:spcBef>
-        <a:buFont typeface="Arial" pitchFamily="34" charset="0"/>
+        <a:buFont typeface="Arial" panose="020B0604020202020204" pitchFamily="34" charset="0"/>
         <a:buChar char="•"/>
         <a:defRPr sz="2000" kern="1200">
           <a:solidFill>
@@ -2060,7 +1903,7 @@
         <a:spcBef>
           <a:spcPct val="20000"/>
         </a:spcBef>
-        <a:buFont typeface="Arial" pitchFamily="34" charset="0"/>
+        <a:buFont typeface="Arial" panose="020B0604020202020204" pitchFamily="34" charset="0"/>
         <a:buChar char="•"/>
         <a:defRPr sz="2000" kern="1200">
           <a:solidFill>
@@ -2075,7 +1918,7 @@
         <a:spcBef>
           <a:spcPct val="20000"/>
         </a:spcBef>
-        <a:buFont typeface="Arial" pitchFamily="34" charset="0"/>
+        <a:buFont typeface="Arial" panose="020B0604020202020204" pitchFamily="34" charset="0"/>
         <a:buChar char="•"/>
         <a:defRPr sz="2000" kern="1200">
           <a:solidFill>
@@ -2188,7 +2031,7 @@
 
 <file path=ppt/slides/slide1.xml><?xml version="1.0" encoding="utf-8"?>
 <p:sld xmlns:a="http://schemas.openxmlformats.org/drawingml/2006/main" xmlns:r="http://schemas.openxmlformats.org/officeDocument/2006/relationships" xmlns:p="http://schemas.openxmlformats.org/presentationml/2006/main">
-  <p:cSld name="Slide 1">
+  <p:cSld>
     <p:bg>
       <p:bgPr>
         <a:blipFill dpi="0" rotWithShape="1">
@@ -2232,13 +2075,12 @@
             <a:avLst/>
           </a:prstGeom>
           <a:noFill/>
-          <a:ln/>
         </p:spPr>
         <p:txBody>
           <a:bodyPr wrap="square" rtlCol="0" anchor="ctr"/>
           <a:lstStyle/>
           <a:p>
-            <a:pPr algn="r" indent="0" marL="0">
+            <a:pPr marL="0" indent="0" algn="r">
               <a:buNone/>
             </a:pPr>
             <a:r>
@@ -2246,9 +2088,9 @@
                 <a:solidFill>
                   <a:srgbClr val="8A9099"/>
                 </a:solidFill>
-                <a:latin typeface="微软雅黑" pitchFamily="34" charset="0"/>
-                <a:ea typeface="微软雅黑" pitchFamily="34" charset="-122"/>
-                <a:cs typeface="微软雅黑" pitchFamily="34" charset="-120"/>
+                <a:latin typeface="微软雅黑" panose="020B0503020204020204" pitchFamily="34" charset="-122"/>
+                <a:ea typeface="微软雅黑" panose="020B0503020204020204" pitchFamily="34" charset="-122"/>
+                <a:cs typeface="微软雅黑" panose="020B0503020204020204" pitchFamily="34" charset="-120"/>
               </a:rPr>
               <a:t>1 / 16</a:t>
             </a:r>
@@ -2271,13 +2113,12 @@
             <a:avLst/>
           </a:prstGeom>
           <a:noFill/>
-          <a:ln/>
         </p:spPr>
         <p:txBody>
           <a:bodyPr wrap="square" rtlCol="0" anchor="ctr"/>
           <a:lstStyle/>
           <a:p>
-            <a:pPr algn="ctr" indent="0" marL="0">
+            <a:pPr marL="0" indent="0" algn="ctr">
               <a:buNone/>
             </a:pPr>
             <a:r>
@@ -2285,9 +2126,9 @@
                 <a:solidFill>
                   <a:srgbClr val="1F4E9C"/>
                 </a:solidFill>
-                <a:latin typeface="微软雅黑" pitchFamily="34" charset="0"/>
-                <a:ea typeface="微软雅黑" pitchFamily="34" charset="-122"/>
-                <a:cs typeface="微软雅黑" pitchFamily="34" charset="-120"/>
+                <a:latin typeface="微软雅黑" panose="020B0503020204020204" pitchFamily="34" charset="-122"/>
+                <a:ea typeface="微软雅黑" panose="020B0503020204020204" pitchFamily="34" charset="-122"/>
+                <a:cs typeface="微软雅黑" panose="020B0503020204020204" pitchFamily="34" charset="-120"/>
               </a:rPr>
               <a:t>重邮802 数据结构代码课程</a:t>
             </a:r>
@@ -2310,13 +2151,12 @@
             <a:avLst/>
           </a:prstGeom>
           <a:noFill/>
-          <a:ln/>
         </p:spPr>
         <p:txBody>
           <a:bodyPr wrap="square" rtlCol="0" anchor="ctr"/>
           <a:lstStyle/>
           <a:p>
-            <a:pPr algn="ctr" indent="0" marL="0">
+            <a:pPr marL="0" indent="0" algn="ctr">
               <a:buNone/>
             </a:pPr>
             <a:r>
@@ -2324,9 +2164,9 @@
                 <a:solidFill>
                   <a:srgbClr val="1F2329"/>
                 </a:solidFill>
-                <a:latin typeface="微软雅黑" pitchFamily="34" charset="0"/>
-                <a:ea typeface="微软雅黑" pitchFamily="34" charset="-122"/>
-                <a:cs typeface="微软雅黑" pitchFamily="34" charset="-120"/>
+                <a:latin typeface="微软雅黑" panose="020B0503020204020204" pitchFamily="34" charset="-122"/>
+                <a:ea typeface="微软雅黑" panose="020B0503020204020204" pitchFamily="34" charset="-122"/>
+                <a:cs typeface="微软雅黑" panose="020B0503020204020204" pitchFamily="34" charset="-120"/>
               </a:rPr>
               <a:t>数据结构基础阶段</a:t>
             </a:r>
@@ -2349,13 +2189,12 @@
             <a:avLst/>
           </a:prstGeom>
           <a:noFill/>
-          <a:ln/>
         </p:spPr>
         <p:txBody>
           <a:bodyPr wrap="square" rtlCol="0" anchor="ctr"/>
           <a:lstStyle/>
           <a:p>
-            <a:pPr algn="ctr" indent="0" marL="0">
+            <a:pPr marL="0" indent="0" algn="ctr">
               <a:buNone/>
             </a:pPr>
             <a:r>
@@ -2363,9 +2202,9 @@
                 <a:solidFill>
                   <a:srgbClr val="1F2329"/>
                 </a:solidFill>
-                <a:latin typeface="微软雅黑" pitchFamily="34" charset="0"/>
-                <a:ea typeface="微软雅黑" pitchFamily="34" charset="-122"/>
-                <a:cs typeface="微软雅黑" pitchFamily="34" charset="-120"/>
+                <a:latin typeface="微软雅黑" panose="020B0503020204020204" pitchFamily="34" charset="-122"/>
+                <a:ea typeface="微软雅黑" panose="020B0503020204020204" pitchFamily="34" charset="-122"/>
+                <a:cs typeface="微软雅黑" panose="020B0503020204020204" pitchFamily="34" charset="-120"/>
               </a:rPr>
               <a:t>第6节 串、数组与广义表</a:t>
             </a:r>
@@ -2388,13 +2227,12 @@
             <a:avLst/>
           </a:prstGeom>
           <a:noFill/>
-          <a:ln/>
         </p:spPr>
         <p:txBody>
           <a:bodyPr wrap="square" rtlCol="0" anchor="ctr"/>
           <a:lstStyle/>
           <a:p>
-            <a:pPr algn="ctr" indent="0" marL="0">
+            <a:pPr marL="0" indent="0" algn="ctr">
               <a:buNone/>
             </a:pPr>
             <a:r>
@@ -2402,9 +2240,9 @@
                 <a:solidFill>
                   <a:srgbClr val="8A9099"/>
                 </a:solidFill>
-                <a:latin typeface="微软雅黑" pitchFamily="34" charset="0"/>
-                <a:ea typeface="微软雅黑" pitchFamily="34" charset="-122"/>
-                <a:cs typeface="微软雅黑" pitchFamily="34" charset="-120"/>
+                <a:latin typeface="微软雅黑" panose="020B0503020204020204" pitchFamily="34" charset="-122"/>
+                <a:ea typeface="微软雅黑" panose="020B0503020204020204" pitchFamily="34" charset="-122"/>
+                <a:cs typeface="微软雅黑" panose="020B0503020204020204" pitchFamily="34" charset="-120"/>
               </a:rPr>
               <a:t>阶段：基础 ｜ 主讲：牙膏学长 ｜ 预计35分钟 ｜ 资料答疑：伴梦研途QQ群</a:t>
             </a:r>
@@ -2422,7 +2260,7 @@
 
 <file path=ppt/slides/slide10.xml><?xml version="1.0" encoding="utf-8"?>
 <p:sld xmlns:a="http://schemas.openxmlformats.org/drawingml/2006/main" xmlns:r="http://schemas.openxmlformats.org/officeDocument/2006/relationships" xmlns:p="http://schemas.openxmlformats.org/presentationml/2006/main">
-  <p:cSld name="Slide 10">
+  <p:cSld>
     <p:bg>
       <p:bgPr>
         <a:blipFill dpi="0" rotWithShape="1">
@@ -2466,13 +2304,12 @@
             <a:avLst/>
           </a:prstGeom>
           <a:noFill/>
-          <a:ln/>
         </p:spPr>
         <p:txBody>
           <a:bodyPr wrap="square" rtlCol="0" anchor="ctr"/>
           <a:lstStyle/>
           <a:p>
-            <a:pPr algn="r" indent="0" marL="0">
+            <a:pPr marL="0" indent="0" algn="r">
               <a:buNone/>
             </a:pPr>
             <a:r>
@@ -2480,9 +2317,9 @@
                 <a:solidFill>
                   <a:srgbClr val="8A9099"/>
                 </a:solidFill>
-                <a:latin typeface="微软雅黑" pitchFamily="34" charset="0"/>
-                <a:ea typeface="微软雅黑" pitchFamily="34" charset="-122"/>
-                <a:cs typeface="微软雅黑" pitchFamily="34" charset="-120"/>
+                <a:latin typeface="微软雅黑" panose="020B0503020204020204" pitchFamily="34" charset="-122"/>
+                <a:ea typeface="微软雅黑" panose="020B0503020204020204" pitchFamily="34" charset="-122"/>
+                <a:cs typeface="微软雅黑" panose="020B0503020204020204" pitchFamily="34" charset="-120"/>
               </a:rPr>
               <a:t>10 / 16</a:t>
             </a:r>
@@ -2505,13 +2342,12 @@
             <a:avLst/>
           </a:prstGeom>
           <a:noFill/>
-          <a:ln/>
         </p:spPr>
         <p:txBody>
           <a:bodyPr wrap="square" rtlCol="0" anchor="ctr"/>
           <a:lstStyle/>
           <a:p>
-            <a:pPr algn="l" indent="0" marL="0">
+            <a:pPr marL="0" indent="0" algn="l">
               <a:buNone/>
             </a:pPr>
             <a:r>
@@ -2519,9 +2355,9 @@
                 <a:solidFill>
                   <a:srgbClr val="1F4E9C"/>
                 </a:solidFill>
-                <a:latin typeface="微软雅黑" pitchFamily="34" charset="0"/>
-                <a:ea typeface="微软雅黑" pitchFamily="34" charset="-122"/>
-                <a:cs typeface="微软雅黑" pitchFamily="34" charset="-120"/>
+                <a:latin typeface="微软雅黑" panose="020B0503020204020204" pitchFamily="34" charset="-122"/>
+                <a:ea typeface="微软雅黑" panose="020B0503020204020204" pitchFamily="34" charset="-122"/>
+                <a:cs typeface="微软雅黑" panose="020B0503020204020204" pitchFamily="34" charset="-120"/>
               </a:rPr>
               <a:t>数组 · 地址计算</a:t>
             </a:r>
@@ -2544,13 +2380,12 @@
             <a:avLst/>
           </a:prstGeom>
           <a:noFill/>
-          <a:ln/>
         </p:spPr>
         <p:txBody>
           <a:bodyPr wrap="square" rtlCol="0" anchor="ctr"/>
           <a:lstStyle/>
           <a:p>
-            <a:pPr algn="l" indent="0" marL="0">
+            <a:pPr marL="0" indent="0" algn="l">
               <a:buNone/>
             </a:pPr>
             <a:r>
@@ -2558,9 +2393,9 @@
                 <a:solidFill>
                   <a:srgbClr val="1F2329"/>
                 </a:solidFill>
-                <a:latin typeface="微软雅黑" pitchFamily="34" charset="0"/>
-                <a:ea typeface="微软雅黑" pitchFamily="34" charset="-122"/>
-                <a:cs typeface="微软雅黑" pitchFamily="34" charset="-120"/>
+                <a:latin typeface="微软雅黑" panose="020B0503020204020204" pitchFamily="34" charset="-122"/>
+                <a:ea typeface="微软雅黑" panose="020B0503020204020204" pitchFamily="34" charset="-122"/>
+                <a:cs typeface="微软雅黑" panose="020B0503020204020204" pitchFamily="34" charset="-120"/>
               </a:rPr>
               <a:t>二维数组的地址：行优先与列优先</a:t>
             </a:r>
@@ -2583,13 +2418,12 @@
             <a:avLst/>
           </a:prstGeom>
           <a:noFill/>
-          <a:ln/>
         </p:spPr>
         <p:txBody>
           <a:bodyPr wrap="square" rtlCol="0" anchor="t"/>
           <a:lstStyle/>
           <a:p>
-            <a:pPr algn="l" indent="0" marL="0">
+            <a:pPr marL="0" indent="0" algn="l">
               <a:lnSpc>
                 <a:spcPct val="115000"/>
               </a:lnSpc>
@@ -2600,25 +2434,68 @@
                 <a:solidFill>
                   <a:srgbClr val="1F4E9C"/>
                 </a:solidFill>
-                <a:latin typeface="微软雅黑" pitchFamily="34" charset="0"/>
-                <a:ea typeface="微软雅黑" pitchFamily="34" charset="-122"/>
-                <a:cs typeface="微软雅黑" pitchFamily="34" charset="-120"/>
+                <a:latin typeface="微软雅黑" panose="020B0503020204020204" pitchFamily="34" charset="-122"/>
+                <a:ea typeface="微软雅黑" panose="020B0503020204020204" pitchFamily="34" charset="-122"/>
+                <a:cs typeface="微软雅黑" panose="020B0503020204020204" pitchFamily="34" charset="-120"/>
               </a:rPr>
               <a:t>•  </a:t>
             </a:r>
-            <a:pPr algn="l" indent="0" marL="0">
+            <a:r>
+              <a:rPr lang="en-US" sz="1800" dirty="0">
+                <a:solidFill>
+                  <a:srgbClr val="000000"/>
+                </a:solidFill>
+              </a:rPr>
+              <a:t>行优先（C 语言用这个）：一行一行存。a[i][j] 地址 = 基址 + (i×列数n + j) × 每元素字节数（下标从0起）</a:t>
+            </a:r>
+            <a:endParaRPr lang="en-US" sz="1800" dirty="0"/>
+          </a:p>
+        </p:txBody>
+      </p:sp>
+      <p:sp>
+        <p:nvSpPr>
+          <p:cNvPr id="6" name="Text 4"/>
+          <p:cNvSpPr/>
+          <p:nvPr/>
+        </p:nvSpPr>
+        <p:spPr>
+          <a:xfrm>
+            <a:off x="896112" y="3209544"/>
+            <a:ext cx="10454335" cy="740664"/>
+          </a:xfrm>
+          <a:prstGeom prst="rect">
+            <a:avLst/>
+          </a:prstGeom>
+          <a:noFill/>
+        </p:spPr>
+        <p:txBody>
+          <a:bodyPr wrap="square" rtlCol="0" anchor="t"/>
+          <a:lstStyle/>
+          <a:p>
+            <a:pPr marL="0" indent="0" algn="l">
               <a:lnSpc>
                 <a:spcPct val="115000"/>
               </a:lnSpc>
               <a:buNone/>
             </a:pPr>
             <a:r>
+              <a:rPr lang="en-US" sz="1800" b="1" dirty="0">
+                <a:solidFill>
+                  <a:srgbClr val="1F4E9C"/>
+                </a:solidFill>
+                <a:latin typeface="微软雅黑" panose="020B0503020204020204" pitchFamily="34" charset="-122"/>
+                <a:ea typeface="微软雅黑" panose="020B0503020204020204" pitchFamily="34" charset="-122"/>
+                <a:cs typeface="微软雅黑" panose="020B0503020204020204" pitchFamily="34" charset="-120"/>
+              </a:rPr>
+              <a:t>•  </a:t>
+            </a:r>
+            <a:r>
               <a:rPr lang="en-US" sz="1800" dirty="0">
                 <a:solidFill>
                   <a:srgbClr val="000000"/>
                 </a:solidFill>
               </a:rPr>
-              <a:t>行优先（C 语言用这个）：一行一行存。a[i][j] 地址 = 基址 + (i×列数n + j) × 每元素字节数（下标从0起）</a:t>
+              <a:t>列优先：一列一列存，把 i、j 的角色换过来，a[i][j] 地址 = 基址 + (j×行数m + i) × 字节数</a:t>
             </a:r>
             <a:endParaRPr lang="en-US" sz="1800" dirty="0"/>
           </a:p>
@@ -2626,26 +2503,25 @@
       </p:sp>
       <p:sp>
         <p:nvSpPr>
-          <p:cNvPr id="6" name="Text 4"/>
+          <p:cNvPr id="7" name="Text 5"/>
           <p:cNvSpPr/>
           <p:nvPr/>
         </p:nvSpPr>
         <p:spPr>
           <a:xfrm>
-            <a:off x="896112" y="3209544"/>
-            <a:ext cx="10454335" cy="740664"/>
+            <a:off x="896112" y="4023360"/>
+            <a:ext cx="10454335" cy="397764"/>
           </a:xfrm>
           <a:prstGeom prst="rect">
             <a:avLst/>
           </a:prstGeom>
           <a:noFill/>
-          <a:ln/>
         </p:spPr>
         <p:txBody>
           <a:bodyPr wrap="square" rtlCol="0" anchor="t"/>
           <a:lstStyle/>
           <a:p>
-            <a:pPr algn="l" indent="0" marL="0">
+            <a:pPr marL="0" indent="0" algn="l">
               <a:lnSpc>
                 <a:spcPct val="115000"/>
               </a:lnSpc>
@@ -2656,74 +2532,12 @@
                 <a:solidFill>
                   <a:srgbClr val="1F4E9C"/>
                 </a:solidFill>
-                <a:latin typeface="微软雅黑" pitchFamily="34" charset="0"/>
-                <a:ea typeface="微软雅黑" pitchFamily="34" charset="-122"/>
-                <a:cs typeface="微软雅黑" pitchFamily="34" charset="-120"/>
+                <a:latin typeface="微软雅黑" panose="020B0503020204020204" pitchFamily="34" charset="-122"/>
+                <a:ea typeface="微软雅黑" panose="020B0503020204020204" pitchFamily="34" charset="-122"/>
+                <a:cs typeface="微软雅黑" panose="020B0503020204020204" pitchFamily="34" charset="-120"/>
               </a:rPr>
               <a:t>•  </a:t>
             </a:r>
-            <a:pPr algn="l" indent="0" marL="0">
-              <a:lnSpc>
-                <a:spcPct val="115000"/>
-              </a:lnSpc>
-              <a:buNone/>
-            </a:pPr>
-            <a:r>
-              <a:rPr lang="en-US" sz="1800" dirty="0">
-                <a:solidFill>
-                  <a:srgbClr val="000000"/>
-                </a:solidFill>
-              </a:rPr>
-              <a:t>列优先：一列一列存，把 i、j 的角色换过来，a[i][j] 地址 = 基址 + (j×行数m + i) × 字节数</a:t>
-            </a:r>
-            <a:endParaRPr lang="en-US" sz="1800" dirty="0"/>
-          </a:p>
-        </p:txBody>
-      </p:sp>
-      <p:sp>
-        <p:nvSpPr>
-          <p:cNvPr id="7" name="Text 5"/>
-          <p:cNvSpPr/>
-          <p:nvPr/>
-        </p:nvSpPr>
-        <p:spPr>
-          <a:xfrm>
-            <a:off x="896112" y="4023360"/>
-            <a:ext cx="10454335" cy="397764"/>
-          </a:xfrm>
-          <a:prstGeom prst="rect">
-            <a:avLst/>
-          </a:prstGeom>
-          <a:noFill/>
-          <a:ln/>
-        </p:spPr>
-        <p:txBody>
-          <a:bodyPr wrap="square" rtlCol="0" anchor="t"/>
-          <a:lstStyle/>
-          <a:p>
-            <a:pPr algn="l" indent="0" marL="0">
-              <a:lnSpc>
-                <a:spcPct val="115000"/>
-              </a:lnSpc>
-              <a:buNone/>
-            </a:pPr>
-            <a:r>
-              <a:rPr lang="en-US" sz="1800" b="1" dirty="0">
-                <a:solidFill>
-                  <a:srgbClr val="1F4E9C"/>
-                </a:solidFill>
-                <a:latin typeface="微软雅黑" pitchFamily="34" charset="0"/>
-                <a:ea typeface="微软雅黑" pitchFamily="34" charset="-122"/>
-                <a:cs typeface="微软雅黑" pitchFamily="34" charset="-120"/>
-              </a:rPr>
-              <a:t>•  </a:t>
-            </a:r>
-            <a:pPr algn="l" indent="0" marL="0">
-              <a:lnSpc>
-                <a:spcPct val="115000"/>
-              </a:lnSpc>
-              <a:buNone/>
-            </a:pPr>
             <a:r>
               <a:rPr lang="en-US" sz="1800" dirty="0">
                 <a:solidFill>
@@ -2751,13 +2565,12 @@
             <a:avLst/>
           </a:prstGeom>
           <a:noFill/>
-          <a:ln/>
         </p:spPr>
         <p:txBody>
           <a:bodyPr wrap="square" rtlCol="0" anchor="t"/>
           <a:lstStyle/>
           <a:p>
-            <a:pPr algn="l" indent="0" marL="0">
+            <a:pPr marL="0" indent="0" algn="l">
               <a:buNone/>
             </a:pPr>
             <a:r>
@@ -2765,9 +2578,9 @@
                 <a:solidFill>
                   <a:srgbClr val="8A9099"/>
                 </a:solidFill>
-                <a:latin typeface="微软雅黑" pitchFamily="34" charset="0"/>
-                <a:ea typeface="微软雅黑" pitchFamily="34" charset="-122"/>
-                <a:cs typeface="微软雅黑" pitchFamily="34" charset="-120"/>
+                <a:latin typeface="微软雅黑" panose="020B0503020204020204" pitchFamily="34" charset="-122"/>
+                <a:ea typeface="微软雅黑" panose="020B0503020204020204" pitchFamily="34" charset="-122"/>
+                <a:cs typeface="微软雅黑" panose="020B0503020204020204" pitchFamily="34" charset="-120"/>
               </a:rPr>
               <a:t>这是填空题常考点；在代码里它就是多维数组的存储次序，你记住'行优先=先行后列'就不会代错公式</a:t>
             </a:r>
@@ -2785,7 +2598,7 @@
 
 <file path=ppt/slides/slide11.xml><?xml version="1.0" encoding="utf-8"?>
 <p:sld xmlns:a="http://schemas.openxmlformats.org/drawingml/2006/main" xmlns:r="http://schemas.openxmlformats.org/officeDocument/2006/relationships" xmlns:p="http://schemas.openxmlformats.org/presentationml/2006/main">
-  <p:cSld name="Slide 11">
+  <p:cSld>
     <p:bg>
       <p:bgPr>
         <a:blipFill dpi="0" rotWithShape="1">
@@ -2829,13 +2642,12 @@
             <a:avLst/>
           </a:prstGeom>
           <a:noFill/>
-          <a:ln/>
         </p:spPr>
         <p:txBody>
           <a:bodyPr wrap="square" rtlCol="0" anchor="ctr"/>
           <a:lstStyle/>
           <a:p>
-            <a:pPr algn="r" indent="0" marL="0">
+            <a:pPr marL="0" indent="0" algn="r">
               <a:buNone/>
             </a:pPr>
             <a:r>
@@ -2843,9 +2655,9 @@
                 <a:solidFill>
                   <a:srgbClr val="8A9099"/>
                 </a:solidFill>
-                <a:latin typeface="微软雅黑" pitchFamily="34" charset="0"/>
-                <a:ea typeface="微软雅黑" pitchFamily="34" charset="-122"/>
-                <a:cs typeface="微软雅黑" pitchFamily="34" charset="-120"/>
+                <a:latin typeface="微软雅黑" panose="020B0503020204020204" pitchFamily="34" charset="-122"/>
+                <a:ea typeface="微软雅黑" panose="020B0503020204020204" pitchFamily="34" charset="-122"/>
+                <a:cs typeface="微软雅黑" panose="020B0503020204020204" pitchFamily="34" charset="-120"/>
               </a:rPr>
               <a:t>11 / 16</a:t>
             </a:r>
@@ -2868,13 +2680,12 @@
             <a:avLst/>
           </a:prstGeom>
           <a:noFill/>
-          <a:ln/>
         </p:spPr>
         <p:txBody>
           <a:bodyPr wrap="square" rtlCol="0" anchor="ctr"/>
           <a:lstStyle/>
           <a:p>
-            <a:pPr algn="l" indent="0" marL="0">
+            <a:pPr marL="0" indent="0" algn="l">
               <a:buNone/>
             </a:pPr>
             <a:r>
@@ -2882,9 +2693,9 @@
                 <a:solidFill>
                   <a:srgbClr val="1F4E9C"/>
                 </a:solidFill>
-                <a:latin typeface="微软雅黑" pitchFamily="34" charset="0"/>
-                <a:ea typeface="微软雅黑" pitchFamily="34" charset="-122"/>
-                <a:cs typeface="微软雅黑" pitchFamily="34" charset="-120"/>
+                <a:latin typeface="微软雅黑" panose="020B0503020204020204" pitchFamily="34" charset="-122"/>
+                <a:ea typeface="微软雅黑" panose="020B0503020204020204" pitchFamily="34" charset="-122"/>
+                <a:cs typeface="微软雅黑" panose="020B0503020204020204" pitchFamily="34" charset="-120"/>
               </a:rPr>
               <a:t>特殊矩阵 · 三对角</a:t>
             </a:r>
@@ -2907,13 +2718,12 @@
             <a:avLst/>
           </a:prstGeom>
           <a:noFill/>
-          <a:ln/>
         </p:spPr>
         <p:txBody>
           <a:bodyPr wrap="square" rtlCol="0" anchor="ctr"/>
           <a:lstStyle/>
           <a:p>
-            <a:pPr algn="l" indent="0" marL="0">
+            <a:pPr marL="0" indent="0" algn="l">
               <a:buNone/>
             </a:pPr>
             <a:r>
@@ -2921,9 +2731,9 @@
                 <a:solidFill>
                   <a:srgbClr val="1F2329"/>
                 </a:solidFill>
-                <a:latin typeface="微软雅黑" pitchFamily="34" charset="0"/>
-                <a:ea typeface="微软雅黑" pitchFamily="34" charset="-122"/>
-                <a:cs typeface="微软雅黑" pitchFamily="34" charset="-120"/>
+                <a:latin typeface="微软雅黑" panose="020B0503020204020204" pitchFamily="34" charset="-122"/>
+                <a:ea typeface="微软雅黑" panose="020B0503020204020204" pitchFamily="34" charset="-122"/>
+                <a:cs typeface="微软雅黑" panose="020B0503020204020204" pitchFamily="34" charset="-120"/>
               </a:rPr>
               <a:t>三对角矩阵压缩：下标公式怎么推</a:t>
             </a:r>
@@ -2946,13 +2756,12 @@
             <a:avLst/>
           </a:prstGeom>
           <a:noFill/>
-          <a:ln/>
         </p:spPr>
         <p:txBody>
           <a:bodyPr wrap="square" rtlCol="0" anchor="t"/>
           <a:lstStyle/>
           <a:p>
-            <a:pPr algn="l" indent="0" marL="0">
+            <a:pPr marL="0" indent="0" algn="l">
               <a:lnSpc>
                 <a:spcPct val="115000"/>
               </a:lnSpc>
@@ -2963,25 +2772,68 @@
                 <a:solidFill>
                   <a:srgbClr val="1F4E9C"/>
                 </a:solidFill>
-                <a:latin typeface="微软雅黑" pitchFamily="34" charset="0"/>
-                <a:ea typeface="微软雅黑" pitchFamily="34" charset="-122"/>
-                <a:cs typeface="微软雅黑" pitchFamily="34" charset="-120"/>
+                <a:latin typeface="微软雅黑" panose="020B0503020204020204" pitchFamily="34" charset="-122"/>
+                <a:ea typeface="微软雅黑" panose="020B0503020204020204" pitchFamily="34" charset="-122"/>
+                <a:cs typeface="微软雅黑" panose="020B0503020204020204" pitchFamily="34" charset="-120"/>
               </a:rPr>
               <a:t>•  </a:t>
             </a:r>
-            <a:pPr algn="l" indent="0" marL="0">
+            <a:r>
+              <a:rPr lang="en-US" sz="1800" dirty="0">
+                <a:solidFill>
+                  <a:srgbClr val="000000"/>
+                </a:solidFill>
+              </a:rPr>
+              <a:t>n 阶三对角矩阵，非零元素集中在 |i-j|&lt;=1 的三条对角线上，一共 3n-2 个，压缩存进一维数组</a:t>
+            </a:r>
+            <a:endParaRPr lang="en-US" sz="1800" dirty="0"/>
+          </a:p>
+        </p:txBody>
+      </p:sp>
+      <p:sp>
+        <p:nvSpPr>
+          <p:cNvPr id="6" name="Text 4"/>
+          <p:cNvSpPr/>
+          <p:nvPr/>
+        </p:nvSpPr>
+        <p:spPr>
+          <a:xfrm>
+            <a:off x="896112" y="3209544"/>
+            <a:ext cx="10454335" cy="740664"/>
+          </a:xfrm>
+          <a:prstGeom prst="rect">
+            <a:avLst/>
+          </a:prstGeom>
+          <a:noFill/>
+        </p:spPr>
+        <p:txBody>
+          <a:bodyPr wrap="square" rtlCol="0" anchor="t"/>
+          <a:lstStyle/>
+          <a:p>
+            <a:pPr marL="0" indent="0" algn="l">
               <a:lnSpc>
                 <a:spcPct val="115000"/>
               </a:lnSpc>
               <a:buNone/>
             </a:pPr>
             <a:r>
+              <a:rPr lang="en-US" sz="1800" b="1" dirty="0">
+                <a:solidFill>
+                  <a:srgbClr val="1F4E9C"/>
+                </a:solidFill>
+                <a:latin typeface="微软雅黑" panose="020B0503020204020204" pitchFamily="34" charset="-122"/>
+                <a:ea typeface="微软雅黑" panose="020B0503020204020204" pitchFamily="34" charset="-122"/>
+                <a:cs typeface="微软雅黑" panose="020B0503020204020204" pitchFamily="34" charset="-120"/>
+              </a:rPr>
+              <a:t>•  </a:t>
+            </a:r>
+            <a:r>
               <a:rPr lang="en-US" sz="1800" dirty="0">
                 <a:solidFill>
                   <a:srgbClr val="000000"/>
                 </a:solidFill>
               </a:rPr>
-              <a:t>n 阶三对角矩阵，非零元素集中在 |i-j|&lt;=1 的三条对角线上，一共 3n-2 个，压缩存进一维数组</a:t>
+              <a:t>推 a[i][j]（下标从1）的下标 k：数它前面有几个非零元素。第1行2个，第2到 i-1 行每行3个共 3(i-2) 个</a:t>
             </a:r>
             <a:endParaRPr lang="en-US" sz="1800" dirty="0"/>
           </a:p>
@@ -2989,26 +2841,25 @@
       </p:sp>
       <p:sp>
         <p:nvSpPr>
-          <p:cNvPr id="6" name="Text 4"/>
+          <p:cNvPr id="7" name="Text 5"/>
           <p:cNvSpPr/>
           <p:nvPr/>
         </p:nvSpPr>
         <p:spPr>
           <a:xfrm>
-            <a:off x="896112" y="3209544"/>
-            <a:ext cx="10454335" cy="740664"/>
+            <a:off x="896112" y="4023360"/>
+            <a:ext cx="10454335" cy="1083564"/>
           </a:xfrm>
           <a:prstGeom prst="rect">
             <a:avLst/>
           </a:prstGeom>
           <a:noFill/>
-          <a:ln/>
         </p:spPr>
         <p:txBody>
           <a:bodyPr wrap="square" rtlCol="0" anchor="t"/>
           <a:lstStyle/>
           <a:p>
-            <a:pPr algn="l" indent="0" marL="0">
+            <a:pPr marL="0" indent="0" algn="l">
               <a:lnSpc>
                 <a:spcPct val="115000"/>
               </a:lnSpc>
@@ -3019,74 +2870,12 @@
                 <a:solidFill>
                   <a:srgbClr val="1F4E9C"/>
                 </a:solidFill>
-                <a:latin typeface="微软雅黑" pitchFamily="34" charset="0"/>
-                <a:ea typeface="微软雅黑" pitchFamily="34" charset="-122"/>
-                <a:cs typeface="微软雅黑" pitchFamily="34" charset="-120"/>
+                <a:latin typeface="微软雅黑" panose="020B0503020204020204" pitchFamily="34" charset="-122"/>
+                <a:ea typeface="微软雅黑" panose="020B0503020204020204" pitchFamily="34" charset="-122"/>
+                <a:cs typeface="微软雅黑" panose="020B0503020204020204" pitchFamily="34" charset="-120"/>
               </a:rPr>
               <a:t>•  </a:t>
             </a:r>
-            <a:pPr algn="l" indent="0" marL="0">
-              <a:lnSpc>
-                <a:spcPct val="115000"/>
-              </a:lnSpc>
-              <a:buNone/>
-            </a:pPr>
-            <a:r>
-              <a:rPr lang="en-US" sz="1800" dirty="0">
-                <a:solidFill>
-                  <a:srgbClr val="000000"/>
-                </a:solidFill>
-              </a:rPr>
-              <a:t>推 a[i][j]（下标从1）的下标 k：数它前面有几个非零元素。第1行2个，第2到 i-1 行每行3个共 3(i-2) 个</a:t>
-            </a:r>
-            <a:endParaRPr lang="en-US" sz="1800" dirty="0"/>
-          </a:p>
-        </p:txBody>
-      </p:sp>
-      <p:sp>
-        <p:nvSpPr>
-          <p:cNvPr id="7" name="Text 5"/>
-          <p:cNvSpPr/>
-          <p:nvPr/>
-        </p:nvSpPr>
-        <p:spPr>
-          <a:xfrm>
-            <a:off x="896112" y="4023360"/>
-            <a:ext cx="10454335" cy="1083564"/>
-          </a:xfrm>
-          <a:prstGeom prst="rect">
-            <a:avLst/>
-          </a:prstGeom>
-          <a:noFill/>
-          <a:ln/>
-        </p:spPr>
-        <p:txBody>
-          <a:bodyPr wrap="square" rtlCol="0" anchor="t"/>
-          <a:lstStyle/>
-          <a:p>
-            <a:pPr algn="l" indent="0" marL="0">
-              <a:lnSpc>
-                <a:spcPct val="115000"/>
-              </a:lnSpc>
-              <a:buNone/>
-            </a:pPr>
-            <a:r>
-              <a:rPr lang="en-US" sz="1800" b="1" dirty="0">
-                <a:solidFill>
-                  <a:srgbClr val="1F4E9C"/>
-                </a:solidFill>
-                <a:latin typeface="微软雅黑" pitchFamily="34" charset="0"/>
-                <a:ea typeface="微软雅黑" pitchFamily="34" charset="-122"/>
-                <a:cs typeface="微软雅黑" pitchFamily="34" charset="-120"/>
-              </a:rPr>
-              <a:t>•  </a:t>
-            </a:r>
-            <a:pPr algn="l" indent="0" marL="0">
-              <a:lnSpc>
-                <a:spcPct val="115000"/>
-              </a:lnSpc>
-              <a:buNone/>
-            </a:pPr>
             <a:r>
               <a:rPr lang="en-US" sz="1800" dirty="0">
                 <a:solidFill>
@@ -3114,13 +2903,12 @@
             <a:avLst/>
           </a:prstGeom>
           <a:noFill/>
-          <a:ln/>
         </p:spPr>
         <p:txBody>
           <a:bodyPr wrap="square" rtlCol="0" anchor="t"/>
           <a:lstStyle/>
           <a:p>
-            <a:pPr algn="l" indent="0" marL="0">
+            <a:pPr marL="0" indent="0" algn="l">
               <a:buNone/>
             </a:pPr>
             <a:r>
@@ -3128,9 +2916,9 @@
                 <a:solidFill>
                   <a:srgbClr val="8A9099"/>
                 </a:solidFill>
-                <a:latin typeface="微软雅黑" pitchFamily="34" charset="0"/>
-                <a:ea typeface="微软雅黑" pitchFamily="34" charset="-122"/>
-                <a:cs typeface="微软雅黑" pitchFamily="34" charset="-120"/>
+                <a:latin typeface="微软雅黑" panose="020B0503020204020204" pitchFamily="34" charset="-122"/>
+                <a:ea typeface="微软雅黑" panose="020B0503020204020204" pitchFamily="34" charset="-122"/>
+                <a:cs typeface="微软雅黑" panose="020B0503020204020204" pitchFamily="34" charset="-120"/>
               </a:rPr>
               <a:t>对称矩阵、三角矩阵同理，都是'数前面有几个非零元素'；考的是这个推导，不是背公式</a:t>
             </a:r>
@@ -3148,7 +2936,7 @@
 
 <file path=ppt/slides/slide12.xml><?xml version="1.0" encoding="utf-8"?>
 <p:sld xmlns:a="http://schemas.openxmlformats.org/drawingml/2006/main" xmlns:r="http://schemas.openxmlformats.org/officeDocument/2006/relationships" xmlns:p="http://schemas.openxmlformats.org/presentationml/2006/main">
-  <p:cSld name="Slide 12">
+  <p:cSld>
     <p:bg>
       <p:bgPr>
         <a:blipFill dpi="0" rotWithShape="1">
@@ -3192,13 +2980,12 @@
             <a:avLst/>
           </a:prstGeom>
           <a:noFill/>
-          <a:ln/>
         </p:spPr>
         <p:txBody>
           <a:bodyPr wrap="square" rtlCol="0" anchor="ctr"/>
           <a:lstStyle/>
           <a:p>
-            <a:pPr algn="r" indent="0" marL="0">
+            <a:pPr marL="0" indent="0" algn="r">
               <a:buNone/>
             </a:pPr>
             <a:r>
@@ -3206,9 +2993,9 @@
                 <a:solidFill>
                   <a:srgbClr val="8A9099"/>
                 </a:solidFill>
-                <a:latin typeface="微软雅黑" pitchFamily="34" charset="0"/>
-                <a:ea typeface="微软雅黑" pitchFamily="34" charset="-122"/>
-                <a:cs typeface="微软雅黑" pitchFamily="34" charset="-120"/>
+                <a:latin typeface="微软雅黑" panose="020B0503020204020204" pitchFamily="34" charset="-122"/>
+                <a:ea typeface="微软雅黑" panose="020B0503020204020204" pitchFamily="34" charset="-122"/>
+                <a:cs typeface="微软雅黑" panose="020B0503020204020204" pitchFamily="34" charset="-120"/>
               </a:rPr>
               <a:t>12 / 16</a:t>
             </a:r>
@@ -3231,13 +3018,12 @@
             <a:avLst/>
           </a:prstGeom>
           <a:noFill/>
-          <a:ln/>
         </p:spPr>
         <p:txBody>
           <a:bodyPr wrap="square" rtlCol="0" anchor="ctr"/>
           <a:lstStyle/>
           <a:p>
-            <a:pPr algn="l" indent="0" marL="0">
+            <a:pPr marL="0" indent="0" algn="l">
               <a:buNone/>
             </a:pPr>
             <a:r>
@@ -3245,9 +3031,9 @@
                 <a:solidFill>
                   <a:srgbClr val="1F4E9C"/>
                 </a:solidFill>
-                <a:latin typeface="微软雅黑" pitchFamily="34" charset="0"/>
-                <a:ea typeface="微软雅黑" pitchFamily="34" charset="-122"/>
-                <a:cs typeface="微软雅黑" pitchFamily="34" charset="-120"/>
+                <a:latin typeface="微软雅黑" panose="020B0503020204020204" pitchFamily="34" charset="-122"/>
+                <a:ea typeface="微软雅黑" panose="020B0503020204020204" pitchFamily="34" charset="-122"/>
+                <a:cs typeface="微软雅黑" panose="020B0503020204020204" pitchFamily="34" charset="-120"/>
               </a:rPr>
               <a:t>广义表</a:t>
             </a:r>
@@ -3270,13 +3056,12 @@
             <a:avLst/>
           </a:prstGeom>
           <a:noFill/>
-          <a:ln/>
         </p:spPr>
         <p:txBody>
           <a:bodyPr wrap="square" rtlCol="0" anchor="ctr"/>
           <a:lstStyle/>
           <a:p>
-            <a:pPr algn="l" indent="0" marL="0">
+            <a:pPr marL="0" indent="0" algn="l">
               <a:buNone/>
             </a:pPr>
             <a:r>
@@ -3284,9 +3069,9 @@
                 <a:solidFill>
                   <a:srgbClr val="1F2329"/>
                 </a:solidFill>
-                <a:latin typeface="微软雅黑" pitchFamily="34" charset="0"/>
-                <a:ea typeface="微软雅黑" pitchFamily="34" charset="-122"/>
-                <a:cs typeface="微软雅黑" pitchFamily="34" charset="-120"/>
+                <a:latin typeface="微软雅黑" panose="020B0503020204020204" pitchFamily="34" charset="-122"/>
+                <a:ea typeface="微软雅黑" panose="020B0503020204020204" pitchFamily="34" charset="-122"/>
+                <a:cs typeface="微软雅黑" panose="020B0503020204020204" pitchFamily="34" charset="-120"/>
               </a:rPr>
               <a:t>广义表：head 与 tail</a:t>
             </a:r>
@@ -3309,13 +3094,12 @@
             <a:avLst/>
           </a:prstGeom>
           <a:noFill/>
-          <a:ln/>
         </p:spPr>
         <p:txBody>
           <a:bodyPr wrap="square" rtlCol="0" anchor="t"/>
           <a:lstStyle/>
           <a:p>
-            <a:pPr algn="l" indent="0" marL="0">
+            <a:pPr marL="0" indent="0" algn="l">
               <a:lnSpc>
                 <a:spcPct val="115000"/>
               </a:lnSpc>
@@ -3326,25 +3110,68 @@
                 <a:solidFill>
                   <a:srgbClr val="1F4E9C"/>
                 </a:solidFill>
-                <a:latin typeface="微软雅黑" pitchFamily="34" charset="0"/>
-                <a:ea typeface="微软雅黑" pitchFamily="34" charset="-122"/>
-                <a:cs typeface="微软雅黑" pitchFamily="34" charset="-120"/>
+                <a:latin typeface="微软雅黑" panose="020B0503020204020204" pitchFamily="34" charset="-122"/>
+                <a:ea typeface="微软雅黑" panose="020B0503020204020204" pitchFamily="34" charset="-122"/>
+                <a:cs typeface="微软雅黑" panose="020B0503020204020204" pitchFamily="34" charset="-120"/>
               </a:rPr>
               <a:t>•  </a:t>
             </a:r>
-            <a:pPr algn="l" indent="0" marL="0">
+            <a:r>
+              <a:rPr lang="en-US" sz="1800" dirty="0">
+                <a:solidFill>
+                  <a:srgbClr val="000000"/>
+                </a:solidFill>
+              </a:rPr>
+              <a:t>广义表是 n 个元素的有限序列，元素可以是原子，也可以是一个子表，所以它是递归定义的</a:t>
+            </a:r>
+            <a:endParaRPr lang="en-US" sz="1800" dirty="0"/>
+          </a:p>
+        </p:txBody>
+      </p:sp>
+      <p:sp>
+        <p:nvSpPr>
+          <p:cNvPr id="6" name="Text 4"/>
+          <p:cNvSpPr/>
+          <p:nvPr/>
+        </p:nvSpPr>
+        <p:spPr>
+          <a:xfrm>
+            <a:off x="896112" y="3209544"/>
+            <a:ext cx="10454335" cy="740664"/>
+          </a:xfrm>
+          <a:prstGeom prst="rect">
+            <a:avLst/>
+          </a:prstGeom>
+          <a:noFill/>
+        </p:spPr>
+        <p:txBody>
+          <a:bodyPr wrap="square" rtlCol="0" anchor="t"/>
+          <a:lstStyle/>
+          <a:p>
+            <a:pPr marL="0" indent="0" algn="l">
               <a:lnSpc>
                 <a:spcPct val="115000"/>
               </a:lnSpc>
               <a:buNone/>
             </a:pPr>
             <a:r>
+              <a:rPr lang="en-US" sz="1800" b="1" dirty="0">
+                <a:solidFill>
+                  <a:srgbClr val="1F4E9C"/>
+                </a:solidFill>
+                <a:latin typeface="微软雅黑" panose="020B0503020204020204" pitchFamily="34" charset="-122"/>
+                <a:ea typeface="微软雅黑" panose="020B0503020204020204" pitchFamily="34" charset="-122"/>
+                <a:cs typeface="微软雅黑" panose="020B0503020204020204" pitchFamily="34" charset="-120"/>
+              </a:rPr>
+              <a:t>•  </a:t>
+            </a:r>
+            <a:r>
               <a:rPr lang="en-US" sz="1800" dirty="0">
                 <a:solidFill>
                   <a:srgbClr val="000000"/>
                 </a:solidFill>
               </a:rPr>
-              <a:t>广义表是 n 个元素的有限序列，元素可以是原子，也可以是一个子表，所以它是递归定义的</a:t>
+              <a:t>head 取第一个元素，可以是原子也可以是子表；tail 取除第一个之外剩下的，一定是一个表（带括号）</a:t>
             </a:r>
             <a:endParaRPr lang="en-US" sz="1800" dirty="0"/>
           </a:p>
@@ -3352,26 +3179,25 @@
       </p:sp>
       <p:sp>
         <p:nvSpPr>
-          <p:cNvPr id="6" name="Text 4"/>
+          <p:cNvPr id="7" name="Text 5"/>
           <p:cNvSpPr/>
           <p:nvPr/>
         </p:nvSpPr>
         <p:spPr>
           <a:xfrm>
-            <a:off x="896112" y="3209544"/>
+            <a:off x="896112" y="4023360"/>
             <a:ext cx="10454335" cy="740664"/>
           </a:xfrm>
           <a:prstGeom prst="rect">
             <a:avLst/>
           </a:prstGeom>
           <a:noFill/>
-          <a:ln/>
         </p:spPr>
         <p:txBody>
           <a:bodyPr wrap="square" rtlCol="0" anchor="t"/>
           <a:lstStyle/>
           <a:p>
-            <a:pPr algn="l" indent="0" marL="0">
+            <a:pPr marL="0" indent="0" algn="l">
               <a:lnSpc>
                 <a:spcPct val="115000"/>
               </a:lnSpc>
@@ -3382,74 +3208,12 @@
                 <a:solidFill>
                   <a:srgbClr val="1F4E9C"/>
                 </a:solidFill>
-                <a:latin typeface="微软雅黑" pitchFamily="34" charset="0"/>
-                <a:ea typeface="微软雅黑" pitchFamily="34" charset="-122"/>
-                <a:cs typeface="微软雅黑" pitchFamily="34" charset="-120"/>
+                <a:latin typeface="微软雅黑" panose="020B0503020204020204" pitchFamily="34" charset="-122"/>
+                <a:ea typeface="微软雅黑" panose="020B0503020204020204" pitchFamily="34" charset="-122"/>
+                <a:cs typeface="微软雅黑" panose="020B0503020204020204" pitchFamily="34" charset="-120"/>
               </a:rPr>
               <a:t>•  </a:t>
             </a:r>
-            <a:pPr algn="l" indent="0" marL="0">
-              <a:lnSpc>
-                <a:spcPct val="115000"/>
-              </a:lnSpc>
-              <a:buNone/>
-            </a:pPr>
-            <a:r>
-              <a:rPr lang="en-US" sz="1800" dirty="0">
-                <a:solidFill>
-                  <a:srgbClr val="000000"/>
-                </a:solidFill>
-              </a:rPr>
-              <a:t>head 取第一个元素，可以是原子也可以是子表；tail 取除第一个之外剩下的，一定是一个表（带括号）</a:t>
-            </a:r>
-            <a:endParaRPr lang="en-US" sz="1800" dirty="0"/>
-          </a:p>
-        </p:txBody>
-      </p:sp>
-      <p:sp>
-        <p:nvSpPr>
-          <p:cNvPr id="7" name="Text 5"/>
-          <p:cNvSpPr/>
-          <p:nvPr/>
-        </p:nvSpPr>
-        <p:spPr>
-          <a:xfrm>
-            <a:off x="896112" y="4023360"/>
-            <a:ext cx="10454335" cy="740664"/>
-          </a:xfrm>
-          <a:prstGeom prst="rect">
-            <a:avLst/>
-          </a:prstGeom>
-          <a:noFill/>
-          <a:ln/>
-        </p:spPr>
-        <p:txBody>
-          <a:bodyPr wrap="square" rtlCol="0" anchor="t"/>
-          <a:lstStyle/>
-          <a:p>
-            <a:pPr algn="l" indent="0" marL="0">
-              <a:lnSpc>
-                <a:spcPct val="115000"/>
-              </a:lnSpc>
-              <a:buNone/>
-            </a:pPr>
-            <a:r>
-              <a:rPr lang="en-US" sz="1800" b="1" dirty="0">
-                <a:solidFill>
-                  <a:srgbClr val="1F4E9C"/>
-                </a:solidFill>
-                <a:latin typeface="微软雅黑" pitchFamily="34" charset="0"/>
-                <a:ea typeface="微软雅黑" pitchFamily="34" charset="-122"/>
-                <a:cs typeface="微软雅黑" pitchFamily="34" charset="-120"/>
-              </a:rPr>
-              <a:t>•  </a:t>
-            </a:r>
-            <a:pPr algn="l" indent="0" marL="0">
-              <a:lnSpc>
-                <a:spcPct val="115000"/>
-              </a:lnSpc>
-              <a:buNone/>
-            </a:pPr>
             <a:r>
               <a:rPr lang="en-US" sz="1800" dirty="0">
                 <a:solidFill>
@@ -3477,13 +3241,12 @@
             <a:avLst/>
           </a:prstGeom>
           <a:noFill/>
-          <a:ln/>
         </p:spPr>
         <p:txBody>
           <a:bodyPr wrap="square" rtlCol="0" anchor="t"/>
           <a:lstStyle/>
           <a:p>
-            <a:pPr algn="l" indent="0" marL="0">
+            <a:pPr marL="0" indent="0" algn="l">
               <a:buNone/>
             </a:pPr>
             <a:r>
@@ -3491,9 +3254,9 @@
                 <a:solidFill>
                   <a:srgbClr val="8A9099"/>
                 </a:solidFill>
-                <a:latin typeface="微软雅黑" pitchFamily="34" charset="0"/>
-                <a:ea typeface="微软雅黑" pitchFamily="34" charset="-122"/>
-                <a:cs typeface="微软雅黑" pitchFamily="34" charset="-120"/>
+                <a:latin typeface="微软雅黑" panose="020B0503020204020204" pitchFamily="34" charset="-122"/>
+                <a:ea typeface="微软雅黑" panose="020B0503020204020204" pitchFamily="34" charset="-122"/>
+                <a:cs typeface="微软雅黑" panose="020B0503020204020204" pitchFamily="34" charset="-120"/>
               </a:rPr>
               <a:t>head、tail 是填空固定考点，最容易错的就是 tail 忘了加括号；在代码里广义表就是递归定义的结点结构</a:t>
             </a:r>
@@ -3511,7 +3274,7 @@
 
 <file path=ppt/slides/slide13.xml><?xml version="1.0" encoding="utf-8"?>
 <p:sld xmlns:a="http://schemas.openxmlformats.org/drawingml/2006/main" xmlns:r="http://schemas.openxmlformats.org/officeDocument/2006/relationships" xmlns:p="http://schemas.openxmlformats.org/presentationml/2006/main">
-  <p:cSld name="Slide 13">
+  <p:cSld>
     <p:bg>
       <p:bgPr>
         <a:blipFill dpi="0" rotWithShape="1">
@@ -3555,13 +3318,12 @@
             <a:avLst/>
           </a:prstGeom>
           <a:noFill/>
-          <a:ln/>
         </p:spPr>
         <p:txBody>
           <a:bodyPr wrap="square" rtlCol="0" anchor="ctr"/>
           <a:lstStyle/>
           <a:p>
-            <a:pPr algn="r" indent="0" marL="0">
+            <a:pPr marL="0" indent="0" algn="r">
               <a:buNone/>
             </a:pPr>
             <a:r>
@@ -3569,9 +3331,9 @@
                 <a:solidFill>
                   <a:srgbClr val="8A9099"/>
                 </a:solidFill>
-                <a:latin typeface="微软雅黑" pitchFamily="34" charset="0"/>
-                <a:ea typeface="微软雅黑" pitchFamily="34" charset="-122"/>
-                <a:cs typeface="微软雅黑" pitchFamily="34" charset="-120"/>
+                <a:latin typeface="微软雅黑" panose="020B0503020204020204" pitchFamily="34" charset="-122"/>
+                <a:ea typeface="微软雅黑" panose="020B0503020204020204" pitchFamily="34" charset="-122"/>
+                <a:cs typeface="微软雅黑" panose="020B0503020204020204" pitchFamily="34" charset="-120"/>
               </a:rPr>
               <a:t>13 / 16</a:t>
             </a:r>
@@ -3594,13 +3356,12 @@
             <a:avLst/>
           </a:prstGeom>
           <a:noFill/>
-          <a:ln/>
         </p:spPr>
         <p:txBody>
           <a:bodyPr wrap="square" rtlCol="0" anchor="ctr"/>
           <a:lstStyle/>
           <a:p>
-            <a:pPr algn="l" indent="0" marL="0">
+            <a:pPr marL="0" indent="0" algn="l">
               <a:buNone/>
             </a:pPr>
             <a:r>
@@ -3608,9 +3369,9 @@
                 <a:solidFill>
                   <a:srgbClr val="1F4E9C"/>
                 </a:solidFill>
-                <a:latin typeface="微软雅黑" pitchFamily="34" charset="0"/>
-                <a:ea typeface="微软雅黑" pitchFamily="34" charset="-122"/>
-                <a:cs typeface="微软雅黑" pitchFamily="34" charset="-120"/>
+                <a:latin typeface="微软雅黑" panose="020B0503020204020204" pitchFamily="34" charset="-122"/>
+                <a:ea typeface="微软雅黑" panose="020B0503020204020204" pitchFamily="34" charset="-122"/>
+                <a:cs typeface="微软雅黑" panose="020B0503020204020204" pitchFamily="34" charset="-120"/>
               </a:rPr>
               <a:t>本节小结</a:t>
             </a:r>
@@ -3633,13 +3394,12 @@
             <a:avLst/>
           </a:prstGeom>
           <a:noFill/>
-          <a:ln/>
         </p:spPr>
         <p:txBody>
           <a:bodyPr wrap="square" rtlCol="0" anchor="ctr"/>
           <a:lstStyle/>
           <a:p>
-            <a:pPr algn="l" indent="0" marL="0">
+            <a:pPr marL="0" indent="0" algn="l">
               <a:buNone/>
             </a:pPr>
             <a:r>
@@ -3647,9 +3407,9 @@
                 <a:solidFill>
                   <a:srgbClr val="1F2329"/>
                 </a:solidFill>
-                <a:latin typeface="微软雅黑" pitchFamily="34" charset="0"/>
-                <a:ea typeface="微软雅黑" pitchFamily="34" charset="-122"/>
-                <a:cs typeface="微软雅黑" pitchFamily="34" charset="-120"/>
+                <a:latin typeface="微软雅黑" panose="020B0503020204020204" pitchFamily="34" charset="-122"/>
+                <a:ea typeface="微软雅黑" panose="020B0503020204020204" pitchFamily="34" charset="-122"/>
+                <a:cs typeface="微软雅黑" panose="020B0503020204020204" pitchFamily="34" charset="-120"/>
               </a:rPr>
               <a:t>小结</a:t>
             </a:r>
@@ -3672,13 +3432,12 @@
             <a:avLst/>
           </a:prstGeom>
           <a:noFill/>
-          <a:ln/>
         </p:spPr>
         <p:txBody>
           <a:bodyPr wrap="square" rtlCol="0" anchor="t"/>
           <a:lstStyle/>
           <a:p>
-            <a:pPr algn="l" indent="0" marL="0">
+            <a:pPr marL="0" indent="0" algn="l">
               <a:lnSpc>
                 <a:spcPct val="115000"/>
               </a:lnSpc>
@@ -3689,25 +3448,68 @@
                 <a:solidFill>
                   <a:srgbClr val="1F4E9C"/>
                 </a:solidFill>
-                <a:latin typeface="微软雅黑" pitchFamily="34" charset="0"/>
-                <a:ea typeface="微软雅黑" pitchFamily="34" charset="-122"/>
-                <a:cs typeface="微软雅黑" pitchFamily="34" charset="-120"/>
+                <a:latin typeface="微软雅黑" panose="020B0503020204020204" pitchFamily="34" charset="-122"/>
+                <a:ea typeface="微软雅黑" panose="020B0503020204020204" pitchFamily="34" charset="-122"/>
+                <a:cs typeface="微软雅黑" panose="020B0503020204020204" pitchFamily="34" charset="-120"/>
               </a:rPr>
               <a:t>•  </a:t>
             </a:r>
-            <a:pPr algn="l" indent="0" marL="0">
+            <a:r>
+              <a:rPr lang="en-US" sz="1800" dirty="0">
+                <a:solidFill>
+                  <a:srgbClr val="000000"/>
+                </a:solidFill>
+              </a:rPr>
+              <a:t>串：堆分配 ch 是指针要 malloc、定长是数组不能 free；strassign 记 len+1 与 i&lt;=len；strcompare 是判等不是比大小</a:t>
+            </a:r>
+            <a:endParaRPr lang="en-US" sz="1800" dirty="0"/>
+          </a:p>
+        </p:txBody>
+      </p:sp>
+      <p:sp>
+        <p:nvSpPr>
+          <p:cNvPr id="6" name="Text 4"/>
+          <p:cNvSpPr/>
+          <p:nvPr/>
+        </p:nvSpPr>
+        <p:spPr>
+          <a:xfrm>
+            <a:off x="896112" y="3209544"/>
+            <a:ext cx="10454335" cy="740664"/>
+          </a:xfrm>
+          <a:prstGeom prst="rect">
+            <a:avLst/>
+          </a:prstGeom>
+          <a:noFill/>
+        </p:spPr>
+        <p:txBody>
+          <a:bodyPr wrap="square" rtlCol="0" anchor="t"/>
+          <a:lstStyle/>
+          <a:p>
+            <a:pPr marL="0" indent="0" algn="l">
               <a:lnSpc>
                 <a:spcPct val="115000"/>
               </a:lnSpc>
               <a:buNone/>
             </a:pPr>
             <a:r>
+              <a:rPr lang="en-US" sz="1800" b="1" dirty="0">
+                <a:solidFill>
+                  <a:srgbClr val="1F4E9C"/>
+                </a:solidFill>
+                <a:latin typeface="微软雅黑" panose="020B0503020204020204" pitchFamily="34" charset="-122"/>
+                <a:ea typeface="微软雅黑" panose="020B0503020204020204" pitchFamily="34" charset="-122"/>
+                <a:cs typeface="微软雅黑" panose="020B0503020204020204" pitchFamily="34" charset="-120"/>
+              </a:rPr>
+              <a:t>•  </a:t>
+            </a:r>
+            <a:r>
               <a:rPr lang="en-US" sz="1800" dirty="0">
                 <a:solidFill>
                   <a:srgbClr val="000000"/>
                 </a:solidFill>
               </a:rPr>
-              <a:t>串：堆分配 ch 是指针要 malloc、定长是数组不能 free；strassign 记 len+1 与 i&lt;=len；strcompare 是判等不是比大小</a:t>
+              <a:t>串匹配：BF 三指针 i、j、k，失配 i 回溯、返回位序 k+1；KMP 让 i 不回溯，考 next、nextval 手算</a:t>
             </a:r>
             <a:endParaRPr lang="en-US" sz="1800" dirty="0"/>
           </a:p>
@@ -3715,26 +3517,25 @@
       </p:sp>
       <p:sp>
         <p:nvSpPr>
-          <p:cNvPr id="6" name="Text 4"/>
+          <p:cNvPr id="7" name="Text 5"/>
           <p:cNvSpPr/>
           <p:nvPr/>
         </p:nvSpPr>
         <p:spPr>
           <a:xfrm>
-            <a:off x="896112" y="3209544"/>
+            <a:off x="896112" y="4023360"/>
             <a:ext cx="10454335" cy="740664"/>
           </a:xfrm>
           <a:prstGeom prst="rect">
             <a:avLst/>
           </a:prstGeom>
           <a:noFill/>
-          <a:ln/>
         </p:spPr>
         <p:txBody>
           <a:bodyPr wrap="square" rtlCol="0" anchor="t"/>
           <a:lstStyle/>
           <a:p>
-            <a:pPr algn="l" indent="0" marL="0">
+            <a:pPr marL="0" indent="0" algn="l">
               <a:lnSpc>
                 <a:spcPct val="115000"/>
               </a:lnSpc>
@@ -3745,130 +3546,61 @@
                 <a:solidFill>
                   <a:srgbClr val="1F4E9C"/>
                 </a:solidFill>
-                <a:latin typeface="微软雅黑" pitchFamily="34" charset="0"/>
-                <a:ea typeface="微软雅黑" pitchFamily="34" charset="-122"/>
-                <a:cs typeface="微软雅黑" pitchFamily="34" charset="-120"/>
+                <a:latin typeface="微软雅黑" panose="020B0503020204020204" pitchFamily="34" charset="-122"/>
+                <a:ea typeface="微软雅黑" panose="020B0503020204020204" pitchFamily="34" charset="-122"/>
+                <a:cs typeface="微软雅黑" panose="020B0503020204020204" pitchFamily="34" charset="-120"/>
               </a:rPr>
               <a:t>•  </a:t>
             </a:r>
-            <a:pPr algn="l" indent="0" marL="0">
+            <a:r>
+              <a:rPr lang="en-US" sz="1800" dirty="0">
+                <a:solidFill>
+                  <a:srgbClr val="000000"/>
+                </a:solidFill>
+              </a:rPr>
+              <a:t>数组：行优先地址 = 基址+(i×列数+j)×字节；三对角矩阵压缩下标 k=2i+j-2（数前面几个非零元素推出来）</a:t>
+            </a:r>
+            <a:endParaRPr lang="en-US" sz="1800" dirty="0"/>
+          </a:p>
+        </p:txBody>
+      </p:sp>
+      <p:sp>
+        <p:nvSpPr>
+          <p:cNvPr id="8" name="Text 6"/>
+          <p:cNvSpPr/>
+          <p:nvPr/>
+        </p:nvSpPr>
+        <p:spPr>
+          <a:xfrm>
+            <a:off x="896112" y="4837176"/>
+            <a:ext cx="10454335" cy="397764"/>
+          </a:xfrm>
+          <a:prstGeom prst="rect">
+            <a:avLst/>
+          </a:prstGeom>
+          <a:noFill/>
+        </p:spPr>
+        <p:txBody>
+          <a:bodyPr wrap="square" rtlCol="0" anchor="t"/>
+          <a:lstStyle/>
+          <a:p>
+            <a:pPr marL="0" indent="0" algn="l">
               <a:lnSpc>
                 <a:spcPct val="115000"/>
               </a:lnSpc>
               <a:buNone/>
             </a:pPr>
             <a:r>
-              <a:rPr lang="en-US" sz="1800" dirty="0">
-                <a:solidFill>
-                  <a:srgbClr val="000000"/>
-                </a:solidFill>
-              </a:rPr>
-              <a:t>串匹配：BF 三指针 i、j、k，失配 i 回溯、返回位序 k+1；KMP 让 i 不回溯，考 next、nextval 手算</a:t>
-            </a:r>
-            <a:endParaRPr lang="en-US" sz="1800" dirty="0"/>
-          </a:p>
-        </p:txBody>
-      </p:sp>
-      <p:sp>
-        <p:nvSpPr>
-          <p:cNvPr id="7" name="Text 5"/>
-          <p:cNvSpPr/>
-          <p:nvPr/>
-        </p:nvSpPr>
-        <p:spPr>
-          <a:xfrm>
-            <a:off x="896112" y="4023360"/>
-            <a:ext cx="10454335" cy="740664"/>
-          </a:xfrm>
-          <a:prstGeom prst="rect">
-            <a:avLst/>
-          </a:prstGeom>
-          <a:noFill/>
-          <a:ln/>
-        </p:spPr>
-        <p:txBody>
-          <a:bodyPr wrap="square" rtlCol="0" anchor="t"/>
-          <a:lstStyle/>
-          <a:p>
-            <a:pPr algn="l" indent="0" marL="0">
-              <a:lnSpc>
-                <a:spcPct val="115000"/>
-              </a:lnSpc>
-              <a:buNone/>
-            </a:pPr>
-            <a:r>
               <a:rPr lang="en-US" sz="1800" b="1" dirty="0">
                 <a:solidFill>
                   <a:srgbClr val="1F4E9C"/>
                 </a:solidFill>
-                <a:latin typeface="微软雅黑" pitchFamily="34" charset="0"/>
-                <a:ea typeface="微软雅黑" pitchFamily="34" charset="-122"/>
-                <a:cs typeface="微软雅黑" pitchFamily="34" charset="-120"/>
+                <a:latin typeface="微软雅黑" panose="020B0503020204020204" pitchFamily="34" charset="-122"/>
+                <a:ea typeface="微软雅黑" panose="020B0503020204020204" pitchFamily="34" charset="-122"/>
+                <a:cs typeface="微软雅黑" panose="020B0503020204020204" pitchFamily="34" charset="-120"/>
               </a:rPr>
               <a:t>•  </a:t>
             </a:r>
-            <a:pPr algn="l" indent="0" marL="0">
-              <a:lnSpc>
-                <a:spcPct val="115000"/>
-              </a:lnSpc>
-              <a:buNone/>
-            </a:pPr>
-            <a:r>
-              <a:rPr lang="en-US" sz="1800" dirty="0">
-                <a:solidFill>
-                  <a:srgbClr val="000000"/>
-                </a:solidFill>
-              </a:rPr>
-              <a:t>数组：行优先地址 = 基址+(i×列数+j)×字节；三对角矩阵压缩下标 k=2i+j-2（数前面几个非零元素推出来）</a:t>
-            </a:r>
-            <a:endParaRPr lang="en-US" sz="1800" dirty="0"/>
-          </a:p>
-        </p:txBody>
-      </p:sp>
-      <p:sp>
-        <p:nvSpPr>
-          <p:cNvPr id="8" name="Text 6"/>
-          <p:cNvSpPr/>
-          <p:nvPr/>
-        </p:nvSpPr>
-        <p:spPr>
-          <a:xfrm>
-            <a:off x="896112" y="4837176"/>
-            <a:ext cx="10454335" cy="397764"/>
-          </a:xfrm>
-          <a:prstGeom prst="rect">
-            <a:avLst/>
-          </a:prstGeom>
-          <a:noFill/>
-          <a:ln/>
-        </p:spPr>
-        <p:txBody>
-          <a:bodyPr wrap="square" rtlCol="0" anchor="t"/>
-          <a:lstStyle/>
-          <a:p>
-            <a:pPr algn="l" indent="0" marL="0">
-              <a:lnSpc>
-                <a:spcPct val="115000"/>
-              </a:lnSpc>
-              <a:buNone/>
-            </a:pPr>
-            <a:r>
-              <a:rPr lang="en-US" sz="1800" b="1" dirty="0">
-                <a:solidFill>
-                  <a:srgbClr val="1F4E9C"/>
-                </a:solidFill>
-                <a:latin typeface="微软雅黑" pitchFamily="34" charset="0"/>
-                <a:ea typeface="微软雅黑" pitchFamily="34" charset="-122"/>
-                <a:cs typeface="微软雅黑" pitchFamily="34" charset="-120"/>
-              </a:rPr>
-              <a:t>•  </a:t>
-            </a:r>
-            <a:pPr algn="l" indent="0" marL="0">
-              <a:lnSpc>
-                <a:spcPct val="115000"/>
-              </a:lnSpc>
-              <a:buNone/>
-            </a:pPr>
             <a:r>
               <a:rPr lang="en-US" sz="1800" dirty="0">
                 <a:solidFill>
@@ -3896,13 +3628,12 @@
             <a:avLst/>
           </a:prstGeom>
           <a:noFill/>
-          <a:ln/>
         </p:spPr>
         <p:txBody>
           <a:bodyPr wrap="square" rtlCol="0" anchor="t"/>
           <a:lstStyle/>
           <a:p>
-            <a:pPr algn="l" indent="0" marL="0">
+            <a:pPr marL="0" indent="0" algn="l">
               <a:buNone/>
             </a:pPr>
             <a:r>
@@ -3910,9 +3641,9 @@
                 <a:solidFill>
                   <a:srgbClr val="8A9099"/>
                 </a:solidFill>
-                <a:latin typeface="微软雅黑" pitchFamily="34" charset="0"/>
-                <a:ea typeface="微软雅黑" pitchFamily="34" charset="-122"/>
-                <a:cs typeface="微软雅黑" pitchFamily="34" charset="-120"/>
+                <a:latin typeface="微软雅黑" panose="020B0503020204020204" pitchFamily="34" charset="-122"/>
+                <a:ea typeface="微软雅黑" panose="020B0503020204020204" pitchFamily="34" charset="-122"/>
+                <a:cs typeface="微软雅黑" panose="020B0503020204020204" pitchFamily="34" charset="-120"/>
               </a:rPr>
               <a:t>串和数组、广义表在 802 里都以填空、选择为主，考手算和概念，不考写大段代码</a:t>
             </a:r>
@@ -3930,7 +3661,7 @@
 
 <file path=ppt/slides/slide14.xml><?xml version="1.0" encoding="utf-8"?>
 <p:sld xmlns:a="http://schemas.openxmlformats.org/drawingml/2006/main" xmlns:r="http://schemas.openxmlformats.org/officeDocument/2006/relationships" xmlns:p="http://schemas.openxmlformats.org/presentationml/2006/main">
-  <p:cSld name="Slide 14">
+  <p:cSld>
     <p:bg>
       <p:bgPr>
         <a:blipFill dpi="0" rotWithShape="1">
@@ -3974,13 +3705,12 @@
             <a:avLst/>
           </a:prstGeom>
           <a:noFill/>
-          <a:ln/>
         </p:spPr>
         <p:txBody>
           <a:bodyPr wrap="square" rtlCol="0" anchor="ctr"/>
           <a:lstStyle/>
           <a:p>
-            <a:pPr algn="r" indent="0" marL="0">
+            <a:pPr marL="0" indent="0" algn="r">
               <a:buNone/>
             </a:pPr>
             <a:r>
@@ -3988,9 +3718,9 @@
                 <a:solidFill>
                   <a:srgbClr val="8A9099"/>
                 </a:solidFill>
-                <a:latin typeface="微软雅黑" pitchFamily="34" charset="0"/>
-                <a:ea typeface="微软雅黑" pitchFamily="34" charset="-122"/>
-                <a:cs typeface="微软雅黑" pitchFamily="34" charset="-120"/>
+                <a:latin typeface="微软雅黑" panose="020B0503020204020204" pitchFamily="34" charset="-122"/>
+                <a:ea typeface="微软雅黑" panose="020B0503020204020204" pitchFamily="34" charset="-122"/>
+                <a:cs typeface="微软雅黑" panose="020B0503020204020204" pitchFamily="34" charset="-120"/>
               </a:rPr>
               <a:t>14 / 16</a:t>
             </a:r>
@@ -4013,13 +3743,12 @@
             <a:avLst/>
           </a:prstGeom>
           <a:noFill/>
-          <a:ln/>
         </p:spPr>
         <p:txBody>
           <a:bodyPr wrap="square" rtlCol="0" anchor="ctr"/>
           <a:lstStyle/>
           <a:p>
-            <a:pPr algn="l" indent="0" marL="0">
+            <a:pPr marL="0" indent="0" algn="l">
               <a:buNone/>
             </a:pPr>
             <a:r>
@@ -4027,9 +3756,9 @@
                 <a:solidFill>
                   <a:srgbClr val="1F4E9C"/>
                 </a:solidFill>
-                <a:latin typeface="微软雅黑" pitchFamily="34" charset="0"/>
-                <a:ea typeface="微软雅黑" pitchFamily="34" charset="-122"/>
-                <a:cs typeface="微软雅黑" pitchFamily="34" charset="-120"/>
+                <a:latin typeface="微软雅黑" panose="020B0503020204020204" pitchFamily="34" charset="-122"/>
+                <a:ea typeface="微软雅黑" panose="020B0503020204020204" pitchFamily="34" charset="-122"/>
+                <a:cs typeface="微软雅黑" panose="020B0503020204020204" pitchFamily="34" charset="-120"/>
               </a:rPr>
               <a:t>课后任务</a:t>
             </a:r>
@@ -4052,13 +3781,12 @@
             <a:avLst/>
           </a:prstGeom>
           <a:noFill/>
-          <a:ln/>
         </p:spPr>
         <p:txBody>
           <a:bodyPr wrap="square" rtlCol="0" anchor="ctr"/>
           <a:lstStyle/>
           <a:p>
-            <a:pPr algn="l" indent="0" marL="0">
+            <a:pPr marL="0" indent="0" algn="l">
               <a:buNone/>
             </a:pPr>
             <a:r>
@@ -4066,9 +3794,9 @@
                 <a:solidFill>
                   <a:srgbClr val="1F2329"/>
                 </a:solidFill>
-                <a:latin typeface="微软雅黑" pitchFamily="34" charset="0"/>
-                <a:ea typeface="微软雅黑" pitchFamily="34" charset="-122"/>
-                <a:cs typeface="微软雅黑" pitchFamily="34" charset="-120"/>
+                <a:latin typeface="微软雅黑" panose="020B0503020204020204" pitchFamily="34" charset="-122"/>
+                <a:ea typeface="微软雅黑" panose="020B0503020204020204" pitchFamily="34" charset="-122"/>
+                <a:cs typeface="微软雅黑" panose="020B0503020204020204" pitchFamily="34" charset="-120"/>
               </a:rPr>
               <a:t>1道跟练 ＋ 1道模仿</a:t>
             </a:r>
@@ -4091,13 +3819,12 @@
             <a:avLst/>
           </a:prstGeom>
           <a:noFill/>
-          <a:ln/>
         </p:spPr>
         <p:txBody>
           <a:bodyPr wrap="square" rtlCol="0" anchor="t"/>
           <a:lstStyle/>
           <a:p>
-            <a:pPr algn="l" indent="0" marL="0">
+            <a:pPr marL="0" indent="0" algn="l">
               <a:lnSpc>
                 <a:spcPct val="115000"/>
               </a:lnSpc>
@@ -4108,13 +3835,85 @@
                 <a:solidFill>
                   <a:srgbClr val="1F4E9C"/>
                 </a:solidFill>
-                <a:latin typeface="微软雅黑" pitchFamily="34" charset="0"/>
-                <a:ea typeface="微软雅黑" pitchFamily="34" charset="-122"/>
-                <a:cs typeface="微软雅黑" pitchFamily="34" charset="-120"/>
+                <a:latin typeface="微软雅黑" panose="020B0503020204020204" pitchFamily="34" charset="-122"/>
+                <a:ea typeface="微软雅黑" panose="020B0503020204020204" pitchFamily="34" charset="-122"/>
+                <a:cs typeface="微软雅黑" panose="020B0503020204020204" pitchFamily="34" charset="-120"/>
               </a:rPr>
               <a:t>•  </a:t>
             </a:r>
-            <a:pPr algn="l" indent="0" marL="0">
+            <a:r>
+              <a:rPr lang="en-US" sz="1800" b="1" dirty="0">
+                <a:solidFill>
+                  <a:srgbClr val="000000"/>
+                </a:solidFill>
+              </a:rPr>
+              <a:t>跟练题</a:t>
+            </a:r>
+            <a:r>
+              <a:rPr lang="en-US" sz="1800" dirty="0">
+                <a:solidFill>
+                  <a:srgbClr val="000000"/>
+                </a:solidFill>
+              </a:rPr>
+              <a:t>：给模式串 ababaa</a:t>
+            </a:r>
+            <a:r>
+              <a:rPr lang="zh-CN" altLang="en-US" sz="1800" dirty="0">
+                <a:solidFill>
+                  <a:srgbClr val="000000"/>
+                </a:solidFill>
+              </a:rPr>
+              <a:t>（或者让</a:t>
+            </a:r>
+            <a:r>
+              <a:rPr lang="en-US" altLang="zh-CN" sz="1800" dirty="0">
+                <a:solidFill>
+                  <a:srgbClr val="000000"/>
+                </a:solidFill>
+              </a:rPr>
+              <a:t>AI</a:t>
+            </a:r>
+            <a:r>
+              <a:rPr lang="zh-CN" altLang="en-US" sz="1800" dirty="0">
+                <a:solidFill>
+                  <a:srgbClr val="000000"/>
+                </a:solidFill>
+              </a:rPr>
+              <a:t>给你出个题）</a:t>
+            </a:r>
+            <a:r>
+              <a:rPr lang="en-US" sz="1800" dirty="0">
+                <a:solidFill>
+                  <a:srgbClr val="000000"/>
+                </a:solidFill>
+              </a:rPr>
+              <a:t> 手算 next 与 nextval 数组，写出每一位的推导</a:t>
+            </a:r>
+            <a:endParaRPr lang="en-US" sz="1800" dirty="0"/>
+          </a:p>
+        </p:txBody>
+      </p:sp>
+      <p:sp>
+        <p:nvSpPr>
+          <p:cNvPr id="6" name="Text 4"/>
+          <p:cNvSpPr/>
+          <p:nvPr/>
+        </p:nvSpPr>
+        <p:spPr>
+          <a:xfrm>
+            <a:off x="896112" y="3209544"/>
+            <a:ext cx="10454335" cy="740664"/>
+          </a:xfrm>
+          <a:prstGeom prst="rect">
+            <a:avLst/>
+          </a:prstGeom>
+          <a:noFill/>
+        </p:spPr>
+        <p:txBody>
+          <a:bodyPr wrap="square" rtlCol="0" anchor="t"/>
+          <a:lstStyle/>
+          <a:p>
+            <a:pPr marL="0" indent="0" algn="l">
               <a:lnSpc>
                 <a:spcPct val="115000"/>
               </a:lnSpc>
@@ -4123,87 +3922,22 @@
             <a:r>
               <a:rPr lang="en-US" sz="1800" b="1" dirty="0">
                 <a:solidFill>
+                  <a:srgbClr val="1F4E9C"/>
+                </a:solidFill>
+                <a:latin typeface="微软雅黑" panose="020B0503020204020204" pitchFamily="34" charset="-122"/>
+                <a:ea typeface="微软雅黑" panose="020B0503020204020204" pitchFamily="34" charset="-122"/>
+                <a:cs typeface="微软雅黑" panose="020B0503020204020204" pitchFamily="34" charset="-120"/>
+              </a:rPr>
+              <a:t>•  </a:t>
+            </a:r>
+            <a:r>
+              <a:rPr lang="en-US" sz="1800" b="1" dirty="0">
+                <a:solidFill>
                   <a:srgbClr val="000000"/>
                 </a:solidFill>
               </a:rPr>
-              <a:t>跟练题</a:t>
-            </a:r>
-            <a:pPr algn="l" indent="0" marL="0">
-              <a:lnSpc>
-                <a:spcPct val="115000"/>
-              </a:lnSpc>
-              <a:buNone/>
-            </a:pPr>
-            <a:r>
-              <a:rPr lang="en-US" sz="1800" dirty="0">
-                <a:solidFill>
-                  <a:srgbClr val="000000"/>
-                </a:solidFill>
-              </a:rPr>
-              <a:t>：给模式串 ababaa 手算 next 与 nextval 数组，写出每一位的推导</a:t>
-            </a:r>
-            <a:endParaRPr lang="en-US" sz="1800" dirty="0"/>
-          </a:p>
-        </p:txBody>
-      </p:sp>
-      <p:sp>
-        <p:nvSpPr>
-          <p:cNvPr id="6" name="Text 4"/>
-          <p:cNvSpPr/>
-          <p:nvPr/>
-        </p:nvSpPr>
-        <p:spPr>
-          <a:xfrm>
-            <a:off x="896112" y="3209544"/>
-            <a:ext cx="10454335" cy="740664"/>
-          </a:xfrm>
-          <a:prstGeom prst="rect">
-            <a:avLst/>
-          </a:prstGeom>
-          <a:noFill/>
-          <a:ln/>
-        </p:spPr>
-        <p:txBody>
-          <a:bodyPr wrap="square" rtlCol="0" anchor="t"/>
-          <a:lstStyle/>
-          <a:p>
-            <a:pPr algn="l" indent="0" marL="0">
-              <a:lnSpc>
-                <a:spcPct val="115000"/>
-              </a:lnSpc>
-              <a:buNone/>
-            </a:pPr>
-            <a:r>
-              <a:rPr lang="en-US" sz="1800" b="1" dirty="0">
-                <a:solidFill>
-                  <a:srgbClr val="1F4E9C"/>
-                </a:solidFill>
-                <a:latin typeface="微软雅黑" pitchFamily="34" charset="0"/>
-                <a:ea typeface="微软雅黑" pitchFamily="34" charset="-122"/>
-                <a:cs typeface="微软雅黑" pitchFamily="34" charset="-120"/>
-              </a:rPr>
-              <a:t>•  </a:t>
-            </a:r>
-            <a:pPr algn="l" indent="0" marL="0">
-              <a:lnSpc>
-                <a:spcPct val="115000"/>
-              </a:lnSpc>
-              <a:buNone/>
-            </a:pPr>
-            <a:r>
-              <a:rPr lang="en-US" sz="1800" b="1" dirty="0">
-                <a:solidFill>
-                  <a:srgbClr val="000000"/>
-                </a:solidFill>
-              </a:rPr>
               <a:t>模仿题</a:t>
             </a:r>
-            <a:pPr algn="l" indent="0" marL="0">
-              <a:lnSpc>
-                <a:spcPct val="115000"/>
-              </a:lnSpc>
-              <a:buNone/>
-            </a:pPr>
             <a:r>
               <a:rPr lang="en-US" sz="1800" dirty="0">
                 <a:solidFill>
@@ -4231,13 +3965,12 @@
             <a:avLst/>
           </a:prstGeom>
           <a:noFill/>
-          <a:ln/>
         </p:spPr>
         <p:txBody>
           <a:bodyPr wrap="square" rtlCol="0" anchor="t"/>
           <a:lstStyle/>
           <a:p>
-            <a:pPr algn="l" indent="0" marL="0">
+            <a:pPr marL="0" indent="0" algn="l">
               <a:buNone/>
             </a:pPr>
             <a:r>
@@ -4245,9 +3978,9 @@
                 <a:solidFill>
                   <a:srgbClr val="8A9099"/>
                 </a:solidFill>
-                <a:latin typeface="微软雅黑" pitchFamily="34" charset="0"/>
-                <a:ea typeface="微软雅黑" pitchFamily="34" charset="-122"/>
-                <a:cs typeface="微软雅黑" pitchFamily="34" charset="-120"/>
+                <a:latin typeface="微软雅黑" panose="020B0503020204020204" pitchFamily="34" charset="-122"/>
+                <a:ea typeface="微软雅黑" panose="020B0503020204020204" pitchFamily="34" charset="-122"/>
+                <a:cs typeface="微软雅黑" panose="020B0503020204020204" pitchFamily="34" charset="-120"/>
               </a:rPr>
               <a:t>要求：next/nextval 能逐位说清怎么来的；head/tail 不忘括号。参考答案在本PPT最后两页，课后自行对照</a:t>
             </a:r>
@@ -4265,7 +3998,7 @@
 
 <file path=ppt/slides/slide15.xml><?xml version="1.0" encoding="utf-8"?>
 <p:sld xmlns:a="http://schemas.openxmlformats.org/drawingml/2006/main" xmlns:r="http://schemas.openxmlformats.org/officeDocument/2006/relationships" xmlns:p="http://schemas.openxmlformats.org/presentationml/2006/main">
-  <p:cSld name="Slide 15">
+  <p:cSld>
     <p:bg>
       <p:bgPr>
         <a:blipFill dpi="0" rotWithShape="1">
@@ -4309,13 +4042,12 @@
             <a:avLst/>
           </a:prstGeom>
           <a:noFill/>
-          <a:ln/>
         </p:spPr>
         <p:txBody>
           <a:bodyPr wrap="square" rtlCol="0" anchor="ctr"/>
           <a:lstStyle/>
           <a:p>
-            <a:pPr algn="r" indent="0" marL="0">
+            <a:pPr marL="0" indent="0" algn="r">
               <a:buNone/>
             </a:pPr>
             <a:r>
@@ -4323,9 +4055,9 @@
                 <a:solidFill>
                   <a:srgbClr val="8A9099"/>
                 </a:solidFill>
-                <a:latin typeface="微软雅黑" pitchFamily="34" charset="0"/>
-                <a:ea typeface="微软雅黑" pitchFamily="34" charset="-122"/>
-                <a:cs typeface="微软雅黑" pitchFamily="34" charset="-120"/>
+                <a:latin typeface="微软雅黑" panose="020B0503020204020204" pitchFamily="34" charset="-122"/>
+                <a:ea typeface="微软雅黑" panose="020B0503020204020204" pitchFamily="34" charset="-122"/>
+                <a:cs typeface="微软雅黑" panose="020B0503020204020204" pitchFamily="34" charset="-120"/>
               </a:rPr>
               <a:t>15 / 16</a:t>
             </a:r>
@@ -4348,13 +4080,12 @@
             <a:avLst/>
           </a:prstGeom>
           <a:noFill/>
-          <a:ln/>
         </p:spPr>
         <p:txBody>
           <a:bodyPr wrap="square" rtlCol="0" anchor="ctr"/>
           <a:lstStyle/>
           <a:p>
-            <a:pPr algn="l" indent="0" marL="0">
+            <a:pPr marL="0" indent="0" algn="l">
               <a:buNone/>
             </a:pPr>
             <a:r>
@@ -4362,9 +4093,9 @@
                 <a:solidFill>
                   <a:srgbClr val="1F4E9C"/>
                 </a:solidFill>
-                <a:latin typeface="微软雅黑" pitchFamily="34" charset="0"/>
-                <a:ea typeface="微软雅黑" pitchFamily="34" charset="-122"/>
-                <a:cs typeface="微软雅黑" pitchFamily="34" charset="-120"/>
+                <a:latin typeface="微软雅黑" panose="020B0503020204020204" pitchFamily="34" charset="-122"/>
+                <a:ea typeface="微软雅黑" panose="020B0503020204020204" pitchFamily="34" charset="-122"/>
+                <a:cs typeface="微软雅黑" panose="020B0503020204020204" pitchFamily="34" charset="-120"/>
               </a:rPr>
               <a:t>参考答案 · 跟练题</a:t>
             </a:r>
@@ -4387,13 +4118,12 @@
             <a:avLst/>
           </a:prstGeom>
           <a:noFill/>
-          <a:ln/>
         </p:spPr>
         <p:txBody>
           <a:bodyPr wrap="square" rtlCol="0" anchor="ctr"/>
           <a:lstStyle/>
           <a:p>
-            <a:pPr algn="l" indent="0" marL="0">
+            <a:pPr marL="0" indent="0" algn="l">
               <a:buNone/>
             </a:pPr>
             <a:r>
@@ -4401,9 +4131,9 @@
                 <a:solidFill>
                   <a:srgbClr val="1F2329"/>
                 </a:solidFill>
-                <a:latin typeface="微软雅黑" pitchFamily="34" charset="0"/>
-                <a:ea typeface="微软雅黑" pitchFamily="34" charset="-122"/>
-                <a:cs typeface="微软雅黑" pitchFamily="34" charset="-120"/>
+                <a:latin typeface="微软雅黑" panose="020B0503020204020204" pitchFamily="34" charset="-122"/>
+                <a:ea typeface="微软雅黑" panose="020B0503020204020204" pitchFamily="34" charset="-122"/>
+                <a:cs typeface="微软雅黑" panose="020B0503020204020204" pitchFamily="34" charset="-120"/>
               </a:rPr>
               <a:t>跟练题参考答案（自行对照）</a:t>
             </a:r>
@@ -4417,17 +4147,11 @@
           <p:cNvGraphicFramePr>
             <a:graphicFrameLocks noGrp="1"/>
           </p:cNvGraphicFramePr>
-          <p:nvPr>
-            <p:extLst>
-              <p:ext uri="{D42A27DB-BD31-4B8C-83A1-F6EECF244321}">
-                <p14:modId xmlns:p14="http://schemas.microsoft.com/office/powerpoint/2010/main" val="1579011935"/>
-              </p:ext>
-            </p:extLst>
-          </p:nvPr>
+          <p:nvPr/>
         </p:nvGraphicFramePr>
         <p:xfrm>
           <a:off x="822960" y="2395728"/>
-          <a:ext cx="10545775" cy="914400"/>
+          <a:ext cx="10545775" cy="1682496"/>
         </p:xfrm>
         <a:graphic>
           <a:graphicData uri="http://schemas.openxmlformats.org/drawingml/2006/table">
@@ -4448,7 +4172,7 @@
                     <a:bodyPr/>
                     <a:lstStyle/>
                     <a:p>
-                      <a:pPr algn="ctr" indent="0" marL="0">
+                      <a:pPr marL="0" indent="0" algn="ctr">
                         <a:buNone/>
                       </a:pPr>
                       <a:r>
@@ -4456,20 +4180,20 @@
                           <a:solidFill>
                             <a:srgbClr val="1F4E9C"/>
                           </a:solidFill>
-                          <a:latin typeface="微软雅黑" pitchFamily="34" charset="0"/>
-                          <a:ea typeface="微软雅黑" pitchFamily="34" charset="-122"/>
-                          <a:cs typeface="微软雅黑" pitchFamily="34" charset="-120"/>
+                          <a:latin typeface="微软雅黑" panose="020B0503020204020204" pitchFamily="34" charset="-122"/>
+                          <a:ea typeface="微软雅黑" panose="020B0503020204020204" pitchFamily="34" charset="-122"/>
+                          <a:cs typeface="微软雅黑" panose="020B0503020204020204" pitchFamily="34" charset="-120"/>
                         </a:rPr>
                         <a:t>j</a:t>
                       </a:r>
                       <a:endParaRPr lang="en-US" sz="1500" dirty="0">
-                        <a:latin typeface="微软雅黑" charset="0"/>
-                        <a:ea typeface="微软雅黑" charset="0"/>
-                        <a:cs typeface="微软雅黑" charset="0"/>
+                        <a:latin typeface="微软雅黑" panose="020B0503020204020204" pitchFamily="34" charset="-122"/>
+                        <a:ea typeface="微软雅黑" panose="020B0503020204020204" pitchFamily="34" charset="-122"/>
+                        <a:cs typeface="微软雅黑" panose="020B0503020204020204" pitchFamily="34" charset="-122"/>
                       </a:endParaRPr>
                     </a:p>
                   </a:txBody>
-                  <a:tcPr marL="91440" marR="91440" marT="45720" marB="45720" anchor="ctr">
+                  <a:tcPr anchor="ctr">
                     <a:lnL w="9525" cap="flat" cmpd="sng" algn="ctr">
                       <a:solidFill>
                         <a:srgbClr val="D8DBE0"/>
@@ -4516,7 +4240,7 @@
                     <a:bodyPr/>
                     <a:lstStyle/>
                     <a:p>
-                      <a:pPr algn="ctr" indent="0" marL="0">
+                      <a:pPr marL="0" indent="0" algn="ctr">
                         <a:buNone/>
                       </a:pPr>
                       <a:r>
@@ -4524,20 +4248,20 @@
                           <a:solidFill>
                             <a:srgbClr val="1F4E9C"/>
                           </a:solidFill>
-                          <a:latin typeface="微软雅黑" pitchFamily="34" charset="0"/>
-                          <a:ea typeface="微软雅黑" pitchFamily="34" charset="-122"/>
-                          <a:cs typeface="微软雅黑" pitchFamily="34" charset="-120"/>
+                          <a:latin typeface="微软雅黑" panose="020B0503020204020204" pitchFamily="34" charset="-122"/>
+                          <a:ea typeface="微软雅黑" panose="020B0503020204020204" pitchFamily="34" charset="-122"/>
+                          <a:cs typeface="微软雅黑" panose="020B0503020204020204" pitchFamily="34" charset="-120"/>
                         </a:rPr>
                         <a:t>1</a:t>
                       </a:r>
                       <a:endParaRPr lang="en-US" sz="1500" dirty="0">
-                        <a:latin typeface="微软雅黑" charset="0"/>
-                        <a:ea typeface="微软雅黑" charset="0"/>
-                        <a:cs typeface="微软雅黑" charset="0"/>
+                        <a:latin typeface="微软雅黑" panose="020B0503020204020204" pitchFamily="34" charset="-122"/>
+                        <a:ea typeface="微软雅黑" panose="020B0503020204020204" pitchFamily="34" charset="-122"/>
+                        <a:cs typeface="微软雅黑" panose="020B0503020204020204" pitchFamily="34" charset="-122"/>
                       </a:endParaRPr>
                     </a:p>
                   </a:txBody>
-                  <a:tcPr marL="91440" marR="91440" marT="45720" marB="45720" anchor="ctr">
+                  <a:tcPr anchor="ctr">
                     <a:lnL w="9525" cap="flat" cmpd="sng" algn="ctr">
                       <a:solidFill>
                         <a:srgbClr val="D8DBE0"/>
@@ -4584,7 +4308,7 @@
                     <a:bodyPr/>
                     <a:lstStyle/>
                     <a:p>
-                      <a:pPr algn="ctr" indent="0" marL="0">
+                      <a:pPr marL="0" indent="0" algn="ctr">
                         <a:buNone/>
                       </a:pPr>
                       <a:r>
@@ -4592,20 +4316,20 @@
                           <a:solidFill>
                             <a:srgbClr val="1F4E9C"/>
                           </a:solidFill>
-                          <a:latin typeface="微软雅黑" pitchFamily="34" charset="0"/>
-                          <a:ea typeface="微软雅黑" pitchFamily="34" charset="-122"/>
-                          <a:cs typeface="微软雅黑" pitchFamily="34" charset="-120"/>
+                          <a:latin typeface="微软雅黑" panose="020B0503020204020204" pitchFamily="34" charset="-122"/>
+                          <a:ea typeface="微软雅黑" panose="020B0503020204020204" pitchFamily="34" charset="-122"/>
+                          <a:cs typeface="微软雅黑" panose="020B0503020204020204" pitchFamily="34" charset="-120"/>
                         </a:rPr>
                         <a:t>2</a:t>
                       </a:r>
                       <a:endParaRPr lang="en-US" sz="1500" dirty="0">
-                        <a:latin typeface="微软雅黑" charset="0"/>
-                        <a:ea typeface="微软雅黑" charset="0"/>
-                        <a:cs typeface="微软雅黑" charset="0"/>
+                        <a:latin typeface="微软雅黑" panose="020B0503020204020204" pitchFamily="34" charset="-122"/>
+                        <a:ea typeface="微软雅黑" panose="020B0503020204020204" pitchFamily="34" charset="-122"/>
+                        <a:cs typeface="微软雅黑" panose="020B0503020204020204" pitchFamily="34" charset="-122"/>
                       </a:endParaRPr>
                     </a:p>
                   </a:txBody>
-                  <a:tcPr marL="91440" marR="91440" marT="45720" marB="45720" anchor="ctr">
+                  <a:tcPr anchor="ctr">
                     <a:lnL w="9525" cap="flat" cmpd="sng" algn="ctr">
                       <a:solidFill>
                         <a:srgbClr val="D8DBE0"/>
@@ -4652,7 +4376,7 @@
                     <a:bodyPr/>
                     <a:lstStyle/>
                     <a:p>
-                      <a:pPr algn="ctr" indent="0" marL="0">
+                      <a:pPr marL="0" indent="0" algn="ctr">
                         <a:buNone/>
                       </a:pPr>
                       <a:r>
@@ -4660,20 +4384,20 @@
                           <a:solidFill>
                             <a:srgbClr val="1F4E9C"/>
                           </a:solidFill>
-                          <a:latin typeface="微软雅黑" pitchFamily="34" charset="0"/>
-                          <a:ea typeface="微软雅黑" pitchFamily="34" charset="-122"/>
-                          <a:cs typeface="微软雅黑" pitchFamily="34" charset="-120"/>
+                          <a:latin typeface="微软雅黑" panose="020B0503020204020204" pitchFamily="34" charset="-122"/>
+                          <a:ea typeface="微软雅黑" panose="020B0503020204020204" pitchFamily="34" charset="-122"/>
+                          <a:cs typeface="微软雅黑" panose="020B0503020204020204" pitchFamily="34" charset="-120"/>
                         </a:rPr>
                         <a:t>3</a:t>
                       </a:r>
                       <a:endParaRPr lang="en-US" sz="1500" dirty="0">
-                        <a:latin typeface="微软雅黑" charset="0"/>
-                        <a:ea typeface="微软雅黑" charset="0"/>
-                        <a:cs typeface="微软雅黑" charset="0"/>
+                        <a:latin typeface="微软雅黑" panose="020B0503020204020204" pitchFamily="34" charset="-122"/>
+                        <a:ea typeface="微软雅黑" panose="020B0503020204020204" pitchFamily="34" charset="-122"/>
+                        <a:cs typeface="微软雅黑" panose="020B0503020204020204" pitchFamily="34" charset="-122"/>
                       </a:endParaRPr>
                     </a:p>
                   </a:txBody>
-                  <a:tcPr marL="91440" marR="91440" marT="45720" marB="45720" anchor="ctr">
+                  <a:tcPr anchor="ctr">
                     <a:lnL w="9525" cap="flat" cmpd="sng" algn="ctr">
                       <a:solidFill>
                         <a:srgbClr val="D8DBE0"/>
@@ -4720,7 +4444,7 @@
                     <a:bodyPr/>
                     <a:lstStyle/>
                     <a:p>
-                      <a:pPr algn="ctr" indent="0" marL="0">
+                      <a:pPr marL="0" indent="0" algn="ctr">
                         <a:buNone/>
                       </a:pPr>
                       <a:r>
@@ -4728,20 +4452,20 @@
                           <a:solidFill>
                             <a:srgbClr val="1F4E9C"/>
                           </a:solidFill>
-                          <a:latin typeface="微软雅黑" pitchFamily="34" charset="0"/>
-                          <a:ea typeface="微软雅黑" pitchFamily="34" charset="-122"/>
-                          <a:cs typeface="微软雅黑" pitchFamily="34" charset="-120"/>
+                          <a:latin typeface="微软雅黑" panose="020B0503020204020204" pitchFamily="34" charset="-122"/>
+                          <a:ea typeface="微软雅黑" panose="020B0503020204020204" pitchFamily="34" charset="-122"/>
+                          <a:cs typeface="微软雅黑" panose="020B0503020204020204" pitchFamily="34" charset="-120"/>
                         </a:rPr>
                         <a:t>4</a:t>
                       </a:r>
                       <a:endParaRPr lang="en-US" sz="1500" dirty="0">
-                        <a:latin typeface="微软雅黑" charset="0"/>
-                        <a:ea typeface="微软雅黑" charset="0"/>
-                        <a:cs typeface="微软雅黑" charset="0"/>
+                        <a:latin typeface="微软雅黑" panose="020B0503020204020204" pitchFamily="34" charset="-122"/>
+                        <a:ea typeface="微软雅黑" panose="020B0503020204020204" pitchFamily="34" charset="-122"/>
+                        <a:cs typeface="微软雅黑" panose="020B0503020204020204" pitchFamily="34" charset="-122"/>
                       </a:endParaRPr>
                     </a:p>
                   </a:txBody>
-                  <a:tcPr marL="91440" marR="91440" marT="45720" marB="45720" anchor="ctr">
+                  <a:tcPr anchor="ctr">
                     <a:lnL w="9525" cap="flat" cmpd="sng" algn="ctr">
                       <a:solidFill>
                         <a:srgbClr val="D8DBE0"/>
@@ -4788,7 +4512,7 @@
                     <a:bodyPr/>
                     <a:lstStyle/>
                     <a:p>
-                      <a:pPr algn="ctr" indent="0" marL="0">
+                      <a:pPr marL="0" indent="0" algn="ctr">
                         <a:buNone/>
                       </a:pPr>
                       <a:r>
@@ -4796,20 +4520,20 @@
                           <a:solidFill>
                             <a:srgbClr val="1F4E9C"/>
                           </a:solidFill>
-                          <a:latin typeface="微软雅黑" pitchFamily="34" charset="0"/>
-                          <a:ea typeface="微软雅黑" pitchFamily="34" charset="-122"/>
-                          <a:cs typeface="微软雅黑" pitchFamily="34" charset="-120"/>
+                          <a:latin typeface="微软雅黑" panose="020B0503020204020204" pitchFamily="34" charset="-122"/>
+                          <a:ea typeface="微软雅黑" panose="020B0503020204020204" pitchFamily="34" charset="-122"/>
+                          <a:cs typeface="微软雅黑" panose="020B0503020204020204" pitchFamily="34" charset="-120"/>
                         </a:rPr>
                         <a:t>5</a:t>
                       </a:r>
                       <a:endParaRPr lang="en-US" sz="1500" dirty="0">
-                        <a:latin typeface="微软雅黑" charset="0"/>
-                        <a:ea typeface="微软雅黑" charset="0"/>
-                        <a:cs typeface="微软雅黑" charset="0"/>
+                        <a:latin typeface="微软雅黑" panose="020B0503020204020204" pitchFamily="34" charset="-122"/>
+                        <a:ea typeface="微软雅黑" panose="020B0503020204020204" pitchFamily="34" charset="-122"/>
+                        <a:cs typeface="微软雅黑" panose="020B0503020204020204" pitchFamily="34" charset="-122"/>
                       </a:endParaRPr>
                     </a:p>
                   </a:txBody>
-                  <a:tcPr marL="91440" marR="91440" marT="45720" marB="45720" anchor="ctr">
+                  <a:tcPr anchor="ctr">
                     <a:lnL w="9525" cap="flat" cmpd="sng" algn="ctr">
                       <a:solidFill>
                         <a:srgbClr val="D8DBE0"/>
@@ -4856,7 +4580,7 @@
                     <a:bodyPr/>
                     <a:lstStyle/>
                     <a:p>
-                      <a:pPr algn="ctr" indent="0" marL="0">
+                      <a:pPr marL="0" indent="0" algn="ctr">
                         <a:buNone/>
                       </a:pPr>
                       <a:r>
@@ -4864,20 +4588,20 @@
                           <a:solidFill>
                             <a:srgbClr val="1F4E9C"/>
                           </a:solidFill>
-                          <a:latin typeface="微软雅黑" pitchFamily="34" charset="0"/>
-                          <a:ea typeface="微软雅黑" pitchFamily="34" charset="-122"/>
-                          <a:cs typeface="微软雅黑" pitchFamily="34" charset="-120"/>
+                          <a:latin typeface="微软雅黑" panose="020B0503020204020204" pitchFamily="34" charset="-122"/>
+                          <a:ea typeface="微软雅黑" panose="020B0503020204020204" pitchFamily="34" charset="-122"/>
+                          <a:cs typeface="微软雅黑" panose="020B0503020204020204" pitchFamily="34" charset="-120"/>
                         </a:rPr>
                         <a:t>6</a:t>
                       </a:r>
                       <a:endParaRPr lang="en-US" sz="1500" dirty="0">
-                        <a:latin typeface="微软雅黑" charset="0"/>
-                        <a:ea typeface="微软雅黑" charset="0"/>
-                        <a:cs typeface="微软雅黑" charset="0"/>
+                        <a:latin typeface="微软雅黑" panose="020B0503020204020204" pitchFamily="34" charset="-122"/>
+                        <a:ea typeface="微软雅黑" panose="020B0503020204020204" pitchFamily="34" charset="-122"/>
+                        <a:cs typeface="微软雅黑" panose="020B0503020204020204" pitchFamily="34" charset="-122"/>
                       </a:endParaRPr>
                     </a:p>
                   </a:txBody>
-                  <a:tcPr marL="91440" marR="91440" marT="45720" marB="45720" anchor="ctr">
+                  <a:tcPr anchor="ctr">
                     <a:lnL w="9525" cap="flat" cmpd="sng" algn="ctr">
                       <a:solidFill>
                         <a:srgbClr val="D8DBE0"/>
@@ -4926,7 +4650,7 @@
                     <a:bodyPr/>
                     <a:lstStyle/>
                     <a:p>
-                      <a:pPr algn="ctr" indent="0" marL="0">
+                      <a:pPr marL="0" indent="0" algn="ctr">
                         <a:buNone/>
                       </a:pPr>
                       <a:r>
@@ -4934,20 +4658,20 @@
                           <a:solidFill>
                             <a:srgbClr val="1F2329"/>
                           </a:solidFill>
-                          <a:latin typeface="微软雅黑" pitchFamily="34" charset="0"/>
-                          <a:ea typeface="微软雅黑" pitchFamily="34" charset="-122"/>
-                          <a:cs typeface="微软雅黑" pitchFamily="34" charset="-120"/>
+                          <a:latin typeface="微软雅黑" panose="020B0503020204020204" pitchFamily="34" charset="-122"/>
+                          <a:ea typeface="微软雅黑" panose="020B0503020204020204" pitchFamily="34" charset="-122"/>
+                          <a:cs typeface="微软雅黑" panose="020B0503020204020204" pitchFamily="34" charset="-120"/>
                         </a:rPr>
                         <a:t>字符</a:t>
                       </a:r>
                       <a:endParaRPr lang="en-US" sz="1500" dirty="0">
-                        <a:latin typeface="微软雅黑" charset="0"/>
-                        <a:ea typeface="微软雅黑" charset="0"/>
-                        <a:cs typeface="微软雅黑" charset="0"/>
+                        <a:latin typeface="微软雅黑" panose="020B0503020204020204" pitchFamily="34" charset="-122"/>
+                        <a:ea typeface="微软雅黑" panose="020B0503020204020204" pitchFamily="34" charset="-122"/>
+                        <a:cs typeface="微软雅黑" panose="020B0503020204020204" pitchFamily="34" charset="-122"/>
                       </a:endParaRPr>
                     </a:p>
                   </a:txBody>
-                  <a:tcPr marL="91440" marR="91440" marT="45720" marB="45720" anchor="ctr">
+                  <a:tcPr anchor="ctr">
                     <a:lnL w="9525" cap="flat" cmpd="sng" algn="ctr">
                       <a:solidFill>
                         <a:srgbClr val="D8DBE0"/>
@@ -4994,7 +4718,7 @@
                     <a:bodyPr/>
                     <a:lstStyle/>
                     <a:p>
-                      <a:pPr algn="ctr" indent="0" marL="0">
+                      <a:pPr marL="0" indent="0" algn="ctr">
                         <a:buNone/>
                       </a:pPr>
                       <a:r>
@@ -5002,20 +4726,20 @@
                           <a:solidFill>
                             <a:srgbClr val="1F2329"/>
                           </a:solidFill>
-                          <a:latin typeface="微软雅黑" pitchFamily="34" charset="0"/>
-                          <a:ea typeface="微软雅黑" pitchFamily="34" charset="-122"/>
-                          <a:cs typeface="微软雅黑" pitchFamily="34" charset="-120"/>
+                          <a:latin typeface="微软雅黑" panose="020B0503020204020204" pitchFamily="34" charset="-122"/>
+                          <a:ea typeface="微软雅黑" panose="020B0503020204020204" pitchFamily="34" charset="-122"/>
+                          <a:cs typeface="微软雅黑" panose="020B0503020204020204" pitchFamily="34" charset="-120"/>
                         </a:rPr>
                         <a:t>a</a:t>
                       </a:r>
                       <a:endParaRPr lang="en-US" sz="1500" dirty="0">
-                        <a:latin typeface="微软雅黑" charset="0"/>
-                        <a:ea typeface="微软雅黑" charset="0"/>
-                        <a:cs typeface="微软雅黑" charset="0"/>
+                        <a:latin typeface="微软雅黑" panose="020B0503020204020204" pitchFamily="34" charset="-122"/>
+                        <a:ea typeface="微软雅黑" panose="020B0503020204020204" pitchFamily="34" charset="-122"/>
+                        <a:cs typeface="微软雅黑" panose="020B0503020204020204" pitchFamily="34" charset="-122"/>
                       </a:endParaRPr>
                     </a:p>
                   </a:txBody>
-                  <a:tcPr marL="91440" marR="91440" marT="45720" marB="45720" anchor="ctr">
+                  <a:tcPr anchor="ctr">
                     <a:lnL w="9525" cap="flat" cmpd="sng" algn="ctr">
                       <a:solidFill>
                         <a:srgbClr val="D8DBE0"/>
@@ -5062,7 +4786,7 @@
                     <a:bodyPr/>
                     <a:lstStyle/>
                     <a:p>
-                      <a:pPr algn="ctr" indent="0" marL="0">
+                      <a:pPr marL="0" indent="0" algn="ctr">
                         <a:buNone/>
                       </a:pPr>
                       <a:r>
@@ -5070,20 +4794,20 @@
                           <a:solidFill>
                             <a:srgbClr val="1F2329"/>
                           </a:solidFill>
-                          <a:latin typeface="微软雅黑" pitchFamily="34" charset="0"/>
-                          <a:ea typeface="微软雅黑" pitchFamily="34" charset="-122"/>
-                          <a:cs typeface="微软雅黑" pitchFamily="34" charset="-120"/>
+                          <a:latin typeface="微软雅黑" panose="020B0503020204020204" pitchFamily="34" charset="-122"/>
+                          <a:ea typeface="微软雅黑" panose="020B0503020204020204" pitchFamily="34" charset="-122"/>
+                          <a:cs typeface="微软雅黑" panose="020B0503020204020204" pitchFamily="34" charset="-120"/>
                         </a:rPr>
                         <a:t>b</a:t>
                       </a:r>
                       <a:endParaRPr lang="en-US" sz="1500" dirty="0">
-                        <a:latin typeface="微软雅黑" charset="0"/>
-                        <a:ea typeface="微软雅黑" charset="0"/>
-                        <a:cs typeface="微软雅黑" charset="0"/>
+                        <a:latin typeface="微软雅黑" panose="020B0503020204020204" pitchFamily="34" charset="-122"/>
+                        <a:ea typeface="微软雅黑" panose="020B0503020204020204" pitchFamily="34" charset="-122"/>
+                        <a:cs typeface="微软雅黑" panose="020B0503020204020204" pitchFamily="34" charset="-122"/>
                       </a:endParaRPr>
                     </a:p>
                   </a:txBody>
-                  <a:tcPr marL="91440" marR="91440" marT="45720" marB="45720" anchor="ctr">
+                  <a:tcPr anchor="ctr">
                     <a:lnL w="9525" cap="flat" cmpd="sng" algn="ctr">
                       <a:solidFill>
                         <a:srgbClr val="D8DBE0"/>
@@ -5130,7 +4854,7 @@
                     <a:bodyPr/>
                     <a:lstStyle/>
                     <a:p>
-                      <a:pPr algn="ctr" indent="0" marL="0">
+                      <a:pPr marL="0" indent="0" algn="ctr">
                         <a:buNone/>
                       </a:pPr>
                       <a:r>
@@ -5138,20 +4862,20 @@
                           <a:solidFill>
                             <a:srgbClr val="1F2329"/>
                           </a:solidFill>
-                          <a:latin typeface="微软雅黑" pitchFamily="34" charset="0"/>
-                          <a:ea typeface="微软雅黑" pitchFamily="34" charset="-122"/>
-                          <a:cs typeface="微软雅黑" pitchFamily="34" charset="-120"/>
+                          <a:latin typeface="微软雅黑" panose="020B0503020204020204" pitchFamily="34" charset="-122"/>
+                          <a:ea typeface="微软雅黑" panose="020B0503020204020204" pitchFamily="34" charset="-122"/>
+                          <a:cs typeface="微软雅黑" panose="020B0503020204020204" pitchFamily="34" charset="-120"/>
                         </a:rPr>
                         <a:t>a</a:t>
                       </a:r>
                       <a:endParaRPr lang="en-US" sz="1500" dirty="0">
-                        <a:latin typeface="微软雅黑" charset="0"/>
-                        <a:ea typeface="微软雅黑" charset="0"/>
-                        <a:cs typeface="微软雅黑" charset="0"/>
+                        <a:latin typeface="微软雅黑" panose="020B0503020204020204" pitchFamily="34" charset="-122"/>
+                        <a:ea typeface="微软雅黑" panose="020B0503020204020204" pitchFamily="34" charset="-122"/>
+                        <a:cs typeface="微软雅黑" panose="020B0503020204020204" pitchFamily="34" charset="-122"/>
                       </a:endParaRPr>
                     </a:p>
                   </a:txBody>
-                  <a:tcPr marL="91440" marR="91440" marT="45720" marB="45720" anchor="ctr">
+                  <a:tcPr anchor="ctr">
                     <a:lnL w="9525" cap="flat" cmpd="sng" algn="ctr">
                       <a:solidFill>
                         <a:srgbClr val="D8DBE0"/>
@@ -5198,7 +4922,7 @@
                     <a:bodyPr/>
                     <a:lstStyle/>
                     <a:p>
-                      <a:pPr algn="ctr" indent="0" marL="0">
+                      <a:pPr marL="0" indent="0" algn="ctr">
                         <a:buNone/>
                       </a:pPr>
                       <a:r>
@@ -5206,20 +4930,20 @@
                           <a:solidFill>
                             <a:srgbClr val="1F2329"/>
                           </a:solidFill>
-                          <a:latin typeface="微软雅黑" pitchFamily="34" charset="0"/>
-                          <a:ea typeface="微软雅黑" pitchFamily="34" charset="-122"/>
-                          <a:cs typeface="微软雅黑" pitchFamily="34" charset="-120"/>
+                          <a:latin typeface="微软雅黑" panose="020B0503020204020204" pitchFamily="34" charset="-122"/>
+                          <a:ea typeface="微软雅黑" panose="020B0503020204020204" pitchFamily="34" charset="-122"/>
+                          <a:cs typeface="微软雅黑" panose="020B0503020204020204" pitchFamily="34" charset="-120"/>
                         </a:rPr>
                         <a:t>b</a:t>
                       </a:r>
                       <a:endParaRPr lang="en-US" sz="1500" dirty="0">
-                        <a:latin typeface="微软雅黑" charset="0"/>
-                        <a:ea typeface="微软雅黑" charset="0"/>
-                        <a:cs typeface="微软雅黑" charset="0"/>
+                        <a:latin typeface="微软雅黑" panose="020B0503020204020204" pitchFamily="34" charset="-122"/>
+                        <a:ea typeface="微软雅黑" panose="020B0503020204020204" pitchFamily="34" charset="-122"/>
+                        <a:cs typeface="微软雅黑" panose="020B0503020204020204" pitchFamily="34" charset="-122"/>
                       </a:endParaRPr>
                     </a:p>
                   </a:txBody>
-                  <a:tcPr marL="91440" marR="91440" marT="45720" marB="45720" anchor="ctr">
+                  <a:tcPr anchor="ctr">
                     <a:lnL w="9525" cap="flat" cmpd="sng" algn="ctr">
                       <a:solidFill>
                         <a:srgbClr val="D8DBE0"/>
@@ -5266,7 +4990,7 @@
                     <a:bodyPr/>
                     <a:lstStyle/>
                     <a:p>
-                      <a:pPr algn="ctr" indent="0" marL="0">
+                      <a:pPr marL="0" indent="0" algn="ctr">
                         <a:buNone/>
                       </a:pPr>
                       <a:r>
@@ -5274,20 +4998,20 @@
                           <a:solidFill>
                             <a:srgbClr val="1F2329"/>
                           </a:solidFill>
-                          <a:latin typeface="微软雅黑" pitchFamily="34" charset="0"/>
-                          <a:ea typeface="微软雅黑" pitchFamily="34" charset="-122"/>
-                          <a:cs typeface="微软雅黑" pitchFamily="34" charset="-120"/>
+                          <a:latin typeface="微软雅黑" panose="020B0503020204020204" pitchFamily="34" charset="-122"/>
+                          <a:ea typeface="微软雅黑" panose="020B0503020204020204" pitchFamily="34" charset="-122"/>
+                          <a:cs typeface="微软雅黑" panose="020B0503020204020204" pitchFamily="34" charset="-120"/>
                         </a:rPr>
                         <a:t>a</a:t>
                       </a:r>
                       <a:endParaRPr lang="en-US" sz="1500" dirty="0">
-                        <a:latin typeface="微软雅黑" charset="0"/>
-                        <a:ea typeface="微软雅黑" charset="0"/>
-                        <a:cs typeface="微软雅黑" charset="0"/>
+                        <a:latin typeface="微软雅黑" panose="020B0503020204020204" pitchFamily="34" charset="-122"/>
+                        <a:ea typeface="微软雅黑" panose="020B0503020204020204" pitchFamily="34" charset="-122"/>
+                        <a:cs typeface="微软雅黑" panose="020B0503020204020204" pitchFamily="34" charset="-122"/>
                       </a:endParaRPr>
                     </a:p>
                   </a:txBody>
-                  <a:tcPr marL="91440" marR="91440" marT="45720" marB="45720" anchor="ctr">
+                  <a:tcPr anchor="ctr">
                     <a:lnL w="9525" cap="flat" cmpd="sng" algn="ctr">
                       <a:solidFill>
                         <a:srgbClr val="D8DBE0"/>
@@ -5334,7 +5058,7 @@
                     <a:bodyPr/>
                     <a:lstStyle/>
                     <a:p>
-                      <a:pPr algn="ctr" indent="0" marL="0">
+                      <a:pPr marL="0" indent="0" algn="ctr">
                         <a:buNone/>
                       </a:pPr>
                       <a:r>
@@ -5342,20 +5066,20 @@
                           <a:solidFill>
                             <a:srgbClr val="1F2329"/>
                           </a:solidFill>
-                          <a:latin typeface="微软雅黑" pitchFamily="34" charset="0"/>
-                          <a:ea typeface="微软雅黑" pitchFamily="34" charset="-122"/>
-                          <a:cs typeface="微软雅黑" pitchFamily="34" charset="-120"/>
+                          <a:latin typeface="微软雅黑" panose="020B0503020204020204" pitchFamily="34" charset="-122"/>
+                          <a:ea typeface="微软雅黑" panose="020B0503020204020204" pitchFamily="34" charset="-122"/>
+                          <a:cs typeface="微软雅黑" panose="020B0503020204020204" pitchFamily="34" charset="-120"/>
                         </a:rPr>
                         <a:t>a</a:t>
                       </a:r>
                       <a:endParaRPr lang="en-US" sz="1500" dirty="0">
-                        <a:latin typeface="微软雅黑" charset="0"/>
-                        <a:ea typeface="微软雅黑" charset="0"/>
-                        <a:cs typeface="微软雅黑" charset="0"/>
+                        <a:latin typeface="微软雅黑" panose="020B0503020204020204" pitchFamily="34" charset="-122"/>
+                        <a:ea typeface="微软雅黑" panose="020B0503020204020204" pitchFamily="34" charset="-122"/>
+                        <a:cs typeface="微软雅黑" panose="020B0503020204020204" pitchFamily="34" charset="-122"/>
                       </a:endParaRPr>
                     </a:p>
                   </a:txBody>
-                  <a:tcPr marL="91440" marR="91440" marT="45720" marB="45720" anchor="ctr">
+                  <a:tcPr anchor="ctr">
                     <a:lnL w="9525" cap="flat" cmpd="sng" algn="ctr">
                       <a:solidFill>
                         <a:srgbClr val="D8DBE0"/>
@@ -5404,7 +5128,7 @@
                     <a:bodyPr/>
                     <a:lstStyle/>
                     <a:p>
-                      <a:pPr algn="ctr" indent="0" marL="0">
+                      <a:pPr marL="0" indent="0" algn="ctr">
                         <a:buNone/>
                       </a:pPr>
                       <a:r>
@@ -5412,20 +5136,20 @@
                           <a:solidFill>
                             <a:srgbClr val="1F2329"/>
                           </a:solidFill>
-                          <a:latin typeface="微软雅黑" pitchFamily="34" charset="0"/>
-                          <a:ea typeface="微软雅黑" pitchFamily="34" charset="-122"/>
-                          <a:cs typeface="微软雅黑" pitchFamily="34" charset="-120"/>
+                          <a:latin typeface="微软雅黑" panose="020B0503020204020204" pitchFamily="34" charset="-122"/>
+                          <a:ea typeface="微软雅黑" panose="020B0503020204020204" pitchFamily="34" charset="-122"/>
+                          <a:cs typeface="微软雅黑" panose="020B0503020204020204" pitchFamily="34" charset="-120"/>
                         </a:rPr>
                         <a:t>next</a:t>
                       </a:r>
                       <a:endParaRPr lang="en-US" sz="1500" dirty="0">
-                        <a:latin typeface="微软雅黑" charset="0"/>
-                        <a:ea typeface="微软雅黑" charset="0"/>
-                        <a:cs typeface="微软雅黑" charset="0"/>
+                        <a:latin typeface="微软雅黑" panose="020B0503020204020204" pitchFamily="34" charset="-122"/>
+                        <a:ea typeface="微软雅黑" panose="020B0503020204020204" pitchFamily="34" charset="-122"/>
+                        <a:cs typeface="微软雅黑" panose="020B0503020204020204" pitchFamily="34" charset="-122"/>
                       </a:endParaRPr>
                     </a:p>
                   </a:txBody>
-                  <a:tcPr marL="91440" marR="91440" marT="45720" marB="45720" anchor="ctr">
+                  <a:tcPr anchor="ctr">
                     <a:lnL w="9525" cap="flat" cmpd="sng" algn="ctr">
                       <a:solidFill>
                         <a:srgbClr val="D8DBE0"/>
@@ -5472,7 +5196,7 @@
                     <a:bodyPr/>
                     <a:lstStyle/>
                     <a:p>
-                      <a:pPr algn="ctr" indent="0" marL="0">
+                      <a:pPr marL="0" indent="0" algn="ctr">
                         <a:buNone/>
                       </a:pPr>
                       <a:r>
@@ -5480,20 +5204,20 @@
                           <a:solidFill>
                             <a:srgbClr val="1F2329"/>
                           </a:solidFill>
-                          <a:latin typeface="微软雅黑" pitchFamily="34" charset="0"/>
-                          <a:ea typeface="微软雅黑" pitchFamily="34" charset="-122"/>
-                          <a:cs typeface="微软雅黑" pitchFamily="34" charset="-120"/>
+                          <a:latin typeface="微软雅黑" panose="020B0503020204020204" pitchFamily="34" charset="-122"/>
+                          <a:ea typeface="微软雅黑" panose="020B0503020204020204" pitchFamily="34" charset="-122"/>
+                          <a:cs typeface="微软雅黑" panose="020B0503020204020204" pitchFamily="34" charset="-120"/>
                         </a:rPr>
                         <a:t>0</a:t>
                       </a:r>
                       <a:endParaRPr lang="en-US" sz="1500" dirty="0">
-                        <a:latin typeface="微软雅黑" charset="0"/>
-                        <a:ea typeface="微软雅黑" charset="0"/>
-                        <a:cs typeface="微软雅黑" charset="0"/>
+                        <a:latin typeface="微软雅黑" panose="020B0503020204020204" pitchFamily="34" charset="-122"/>
+                        <a:ea typeface="微软雅黑" panose="020B0503020204020204" pitchFamily="34" charset="-122"/>
+                        <a:cs typeface="微软雅黑" panose="020B0503020204020204" pitchFamily="34" charset="-122"/>
                       </a:endParaRPr>
                     </a:p>
                   </a:txBody>
-                  <a:tcPr marL="91440" marR="91440" marT="45720" marB="45720" anchor="ctr">
+                  <a:tcPr anchor="ctr">
                     <a:lnL w="9525" cap="flat" cmpd="sng" algn="ctr">
                       <a:solidFill>
                         <a:srgbClr val="D8DBE0"/>
@@ -5540,7 +5264,7 @@
                     <a:bodyPr/>
                     <a:lstStyle/>
                     <a:p>
-                      <a:pPr algn="ctr" indent="0" marL="0">
+                      <a:pPr marL="0" indent="0" algn="ctr">
                         <a:buNone/>
                       </a:pPr>
                       <a:r>
@@ -5548,20 +5272,20 @@
                           <a:solidFill>
                             <a:srgbClr val="1F2329"/>
                           </a:solidFill>
-                          <a:latin typeface="微软雅黑" pitchFamily="34" charset="0"/>
-                          <a:ea typeface="微软雅黑" pitchFamily="34" charset="-122"/>
-                          <a:cs typeface="微软雅黑" pitchFamily="34" charset="-120"/>
+                          <a:latin typeface="微软雅黑" panose="020B0503020204020204" pitchFamily="34" charset="-122"/>
+                          <a:ea typeface="微软雅黑" panose="020B0503020204020204" pitchFamily="34" charset="-122"/>
+                          <a:cs typeface="微软雅黑" panose="020B0503020204020204" pitchFamily="34" charset="-120"/>
                         </a:rPr>
                         <a:t>1</a:t>
                       </a:r>
                       <a:endParaRPr lang="en-US" sz="1500" dirty="0">
-                        <a:latin typeface="微软雅黑" charset="0"/>
-                        <a:ea typeface="微软雅黑" charset="0"/>
-                        <a:cs typeface="微软雅黑" charset="0"/>
+                        <a:latin typeface="微软雅黑" panose="020B0503020204020204" pitchFamily="34" charset="-122"/>
+                        <a:ea typeface="微软雅黑" panose="020B0503020204020204" pitchFamily="34" charset="-122"/>
+                        <a:cs typeface="微软雅黑" panose="020B0503020204020204" pitchFamily="34" charset="-122"/>
                       </a:endParaRPr>
                     </a:p>
                   </a:txBody>
-                  <a:tcPr marL="91440" marR="91440" marT="45720" marB="45720" anchor="ctr">
+                  <a:tcPr anchor="ctr">
                     <a:lnL w="9525" cap="flat" cmpd="sng" algn="ctr">
                       <a:solidFill>
                         <a:srgbClr val="D8DBE0"/>
@@ -5608,7 +5332,7 @@
                     <a:bodyPr/>
                     <a:lstStyle/>
                     <a:p>
-                      <a:pPr algn="ctr" indent="0" marL="0">
+                      <a:pPr marL="0" indent="0" algn="ctr">
                         <a:buNone/>
                       </a:pPr>
                       <a:r>
@@ -5616,20 +5340,20 @@
                           <a:solidFill>
                             <a:srgbClr val="1F2329"/>
                           </a:solidFill>
-                          <a:latin typeface="微软雅黑" pitchFamily="34" charset="0"/>
-                          <a:ea typeface="微软雅黑" pitchFamily="34" charset="-122"/>
-                          <a:cs typeface="微软雅黑" pitchFamily="34" charset="-120"/>
+                          <a:latin typeface="微软雅黑" panose="020B0503020204020204" pitchFamily="34" charset="-122"/>
+                          <a:ea typeface="微软雅黑" panose="020B0503020204020204" pitchFamily="34" charset="-122"/>
+                          <a:cs typeface="微软雅黑" panose="020B0503020204020204" pitchFamily="34" charset="-120"/>
                         </a:rPr>
                         <a:t>1</a:t>
                       </a:r>
                       <a:endParaRPr lang="en-US" sz="1500" dirty="0">
-                        <a:latin typeface="微软雅黑" charset="0"/>
-                        <a:ea typeface="微软雅黑" charset="0"/>
-                        <a:cs typeface="微软雅黑" charset="0"/>
+                        <a:latin typeface="微软雅黑" panose="020B0503020204020204" pitchFamily="34" charset="-122"/>
+                        <a:ea typeface="微软雅黑" panose="020B0503020204020204" pitchFamily="34" charset="-122"/>
+                        <a:cs typeface="微软雅黑" panose="020B0503020204020204" pitchFamily="34" charset="-122"/>
                       </a:endParaRPr>
                     </a:p>
                   </a:txBody>
-                  <a:tcPr marL="91440" marR="91440" marT="45720" marB="45720" anchor="ctr">
+                  <a:tcPr anchor="ctr">
                     <a:lnL w="9525" cap="flat" cmpd="sng" algn="ctr">
                       <a:solidFill>
                         <a:srgbClr val="D8DBE0"/>
@@ -5676,7 +5400,7 @@
                     <a:bodyPr/>
                     <a:lstStyle/>
                     <a:p>
-                      <a:pPr algn="ctr" indent="0" marL="0">
+                      <a:pPr marL="0" indent="0" algn="ctr">
                         <a:buNone/>
                       </a:pPr>
                       <a:r>
@@ -5684,20 +5408,20 @@
                           <a:solidFill>
                             <a:srgbClr val="1F2329"/>
                           </a:solidFill>
-                          <a:latin typeface="微软雅黑" pitchFamily="34" charset="0"/>
-                          <a:ea typeface="微软雅黑" pitchFamily="34" charset="-122"/>
-                          <a:cs typeface="微软雅黑" pitchFamily="34" charset="-120"/>
+                          <a:latin typeface="微软雅黑" panose="020B0503020204020204" pitchFamily="34" charset="-122"/>
+                          <a:ea typeface="微软雅黑" panose="020B0503020204020204" pitchFamily="34" charset="-122"/>
+                          <a:cs typeface="微软雅黑" panose="020B0503020204020204" pitchFamily="34" charset="-120"/>
                         </a:rPr>
                         <a:t>2</a:t>
                       </a:r>
                       <a:endParaRPr lang="en-US" sz="1500" dirty="0">
-                        <a:latin typeface="微软雅黑" charset="0"/>
-                        <a:ea typeface="微软雅黑" charset="0"/>
-                        <a:cs typeface="微软雅黑" charset="0"/>
+                        <a:latin typeface="微软雅黑" panose="020B0503020204020204" pitchFamily="34" charset="-122"/>
+                        <a:ea typeface="微软雅黑" panose="020B0503020204020204" pitchFamily="34" charset="-122"/>
+                        <a:cs typeface="微软雅黑" panose="020B0503020204020204" pitchFamily="34" charset="-122"/>
                       </a:endParaRPr>
                     </a:p>
                   </a:txBody>
-                  <a:tcPr marL="91440" marR="91440" marT="45720" marB="45720" anchor="ctr">
+                  <a:tcPr anchor="ctr">
                     <a:lnL w="9525" cap="flat" cmpd="sng" algn="ctr">
                       <a:solidFill>
                         <a:srgbClr val="D8DBE0"/>
@@ -5744,7 +5468,7 @@
                     <a:bodyPr/>
                     <a:lstStyle/>
                     <a:p>
-                      <a:pPr algn="ctr" indent="0" marL="0">
+                      <a:pPr marL="0" indent="0" algn="ctr">
                         <a:buNone/>
                       </a:pPr>
                       <a:r>
@@ -5752,20 +5476,20 @@
                           <a:solidFill>
                             <a:srgbClr val="1F2329"/>
                           </a:solidFill>
-                          <a:latin typeface="微软雅黑" pitchFamily="34" charset="0"/>
-                          <a:ea typeface="微软雅黑" pitchFamily="34" charset="-122"/>
-                          <a:cs typeface="微软雅黑" pitchFamily="34" charset="-120"/>
+                          <a:latin typeface="微软雅黑" panose="020B0503020204020204" pitchFamily="34" charset="-122"/>
+                          <a:ea typeface="微软雅黑" panose="020B0503020204020204" pitchFamily="34" charset="-122"/>
+                          <a:cs typeface="微软雅黑" panose="020B0503020204020204" pitchFamily="34" charset="-120"/>
                         </a:rPr>
                         <a:t>3</a:t>
                       </a:r>
                       <a:endParaRPr lang="en-US" sz="1500" dirty="0">
-                        <a:latin typeface="微软雅黑" charset="0"/>
-                        <a:ea typeface="微软雅黑" charset="0"/>
-                        <a:cs typeface="微软雅黑" charset="0"/>
+                        <a:latin typeface="微软雅黑" panose="020B0503020204020204" pitchFamily="34" charset="-122"/>
+                        <a:ea typeface="微软雅黑" panose="020B0503020204020204" pitchFamily="34" charset="-122"/>
+                        <a:cs typeface="微软雅黑" panose="020B0503020204020204" pitchFamily="34" charset="-122"/>
                       </a:endParaRPr>
                     </a:p>
                   </a:txBody>
-                  <a:tcPr marL="91440" marR="91440" marT="45720" marB="45720" anchor="ctr">
+                  <a:tcPr anchor="ctr">
                     <a:lnL w="9525" cap="flat" cmpd="sng" algn="ctr">
                       <a:solidFill>
                         <a:srgbClr val="D8DBE0"/>
@@ -5812,7 +5536,7 @@
                     <a:bodyPr/>
                     <a:lstStyle/>
                     <a:p>
-                      <a:pPr algn="ctr" indent="0" marL="0">
+                      <a:pPr marL="0" indent="0" algn="ctr">
                         <a:buNone/>
                       </a:pPr>
                       <a:r>
@@ -5820,20 +5544,20 @@
                           <a:solidFill>
                             <a:srgbClr val="1F2329"/>
                           </a:solidFill>
-                          <a:latin typeface="微软雅黑" pitchFamily="34" charset="0"/>
-                          <a:ea typeface="微软雅黑" pitchFamily="34" charset="-122"/>
-                          <a:cs typeface="微软雅黑" pitchFamily="34" charset="-120"/>
+                          <a:latin typeface="微软雅黑" panose="020B0503020204020204" pitchFamily="34" charset="-122"/>
+                          <a:ea typeface="微软雅黑" panose="020B0503020204020204" pitchFamily="34" charset="-122"/>
+                          <a:cs typeface="微软雅黑" panose="020B0503020204020204" pitchFamily="34" charset="-120"/>
                         </a:rPr>
                         <a:t>4</a:t>
                       </a:r>
                       <a:endParaRPr lang="en-US" sz="1500" dirty="0">
-                        <a:latin typeface="微软雅黑" charset="0"/>
-                        <a:ea typeface="微软雅黑" charset="0"/>
-                        <a:cs typeface="微软雅黑" charset="0"/>
+                        <a:latin typeface="微软雅黑" panose="020B0503020204020204" pitchFamily="34" charset="-122"/>
+                        <a:ea typeface="微软雅黑" panose="020B0503020204020204" pitchFamily="34" charset="-122"/>
+                        <a:cs typeface="微软雅黑" panose="020B0503020204020204" pitchFamily="34" charset="-122"/>
                       </a:endParaRPr>
                     </a:p>
                   </a:txBody>
-                  <a:tcPr marL="91440" marR="91440" marT="45720" marB="45720" anchor="ctr">
+                  <a:tcPr anchor="ctr">
                     <a:lnL w="9525" cap="flat" cmpd="sng" algn="ctr">
                       <a:solidFill>
                         <a:srgbClr val="D8DBE0"/>
@@ -5882,7 +5606,7 @@
                     <a:bodyPr/>
                     <a:lstStyle/>
                     <a:p>
-                      <a:pPr algn="ctr" indent="0" marL="0">
+                      <a:pPr marL="0" indent="0" algn="ctr">
                         <a:buNone/>
                       </a:pPr>
                       <a:r>
@@ -5890,20 +5614,20 @@
                           <a:solidFill>
                             <a:srgbClr val="1F2329"/>
                           </a:solidFill>
-                          <a:latin typeface="微软雅黑" pitchFamily="34" charset="0"/>
-                          <a:ea typeface="微软雅黑" pitchFamily="34" charset="-122"/>
-                          <a:cs typeface="微软雅黑" pitchFamily="34" charset="-120"/>
+                          <a:latin typeface="微软雅黑" panose="020B0503020204020204" pitchFamily="34" charset="-122"/>
+                          <a:ea typeface="微软雅黑" panose="020B0503020204020204" pitchFamily="34" charset="-122"/>
+                          <a:cs typeface="微软雅黑" panose="020B0503020204020204" pitchFamily="34" charset="-120"/>
                         </a:rPr>
                         <a:t>nextval</a:t>
                       </a:r>
                       <a:endParaRPr lang="en-US" sz="1500" dirty="0">
-                        <a:latin typeface="微软雅黑" charset="0"/>
-                        <a:ea typeface="微软雅黑" charset="0"/>
-                        <a:cs typeface="微软雅黑" charset="0"/>
+                        <a:latin typeface="微软雅黑" panose="020B0503020204020204" pitchFamily="34" charset="-122"/>
+                        <a:ea typeface="微软雅黑" panose="020B0503020204020204" pitchFamily="34" charset="-122"/>
+                        <a:cs typeface="微软雅黑" panose="020B0503020204020204" pitchFamily="34" charset="-122"/>
                       </a:endParaRPr>
                     </a:p>
                   </a:txBody>
-                  <a:tcPr marL="91440" marR="91440" marT="45720" marB="45720" anchor="ctr">
+                  <a:tcPr anchor="ctr">
                     <a:lnL w="9525" cap="flat" cmpd="sng" algn="ctr">
                       <a:solidFill>
                         <a:srgbClr val="D8DBE0"/>
@@ -5950,7 +5674,7 @@
                     <a:bodyPr/>
                     <a:lstStyle/>
                     <a:p>
-                      <a:pPr algn="ctr" indent="0" marL="0">
+                      <a:pPr marL="0" indent="0" algn="ctr">
                         <a:buNone/>
                       </a:pPr>
                       <a:r>
@@ -5958,20 +5682,20 @@
                           <a:solidFill>
                             <a:srgbClr val="1F2329"/>
                           </a:solidFill>
-                          <a:latin typeface="微软雅黑" pitchFamily="34" charset="0"/>
-                          <a:ea typeface="微软雅黑" pitchFamily="34" charset="-122"/>
-                          <a:cs typeface="微软雅黑" pitchFamily="34" charset="-120"/>
+                          <a:latin typeface="微软雅黑" panose="020B0503020204020204" pitchFamily="34" charset="-122"/>
+                          <a:ea typeface="微软雅黑" panose="020B0503020204020204" pitchFamily="34" charset="-122"/>
+                          <a:cs typeface="微软雅黑" panose="020B0503020204020204" pitchFamily="34" charset="-120"/>
                         </a:rPr>
                         <a:t>0</a:t>
                       </a:r>
                       <a:endParaRPr lang="en-US" sz="1500" dirty="0">
-                        <a:latin typeface="微软雅黑" charset="0"/>
-                        <a:ea typeface="微软雅黑" charset="0"/>
-                        <a:cs typeface="微软雅黑" charset="0"/>
+                        <a:latin typeface="微软雅黑" panose="020B0503020204020204" pitchFamily="34" charset="-122"/>
+                        <a:ea typeface="微软雅黑" panose="020B0503020204020204" pitchFamily="34" charset="-122"/>
+                        <a:cs typeface="微软雅黑" panose="020B0503020204020204" pitchFamily="34" charset="-122"/>
                       </a:endParaRPr>
                     </a:p>
                   </a:txBody>
-                  <a:tcPr marL="91440" marR="91440" marT="45720" marB="45720" anchor="ctr">
+                  <a:tcPr anchor="ctr">
                     <a:lnL w="9525" cap="flat" cmpd="sng" algn="ctr">
                       <a:solidFill>
                         <a:srgbClr val="D8DBE0"/>
@@ -6018,7 +5742,7 @@
                     <a:bodyPr/>
                     <a:lstStyle/>
                     <a:p>
-                      <a:pPr algn="ctr" indent="0" marL="0">
+                      <a:pPr marL="0" indent="0" algn="ctr">
                         <a:buNone/>
                       </a:pPr>
                       <a:r>
@@ -6026,20 +5750,20 @@
                           <a:solidFill>
                             <a:srgbClr val="1F2329"/>
                           </a:solidFill>
-                          <a:latin typeface="微软雅黑" pitchFamily="34" charset="0"/>
-                          <a:ea typeface="微软雅黑" pitchFamily="34" charset="-122"/>
-                          <a:cs typeface="微软雅黑" pitchFamily="34" charset="-120"/>
+                          <a:latin typeface="微软雅黑" panose="020B0503020204020204" pitchFamily="34" charset="-122"/>
+                          <a:ea typeface="微软雅黑" panose="020B0503020204020204" pitchFamily="34" charset="-122"/>
+                          <a:cs typeface="微软雅黑" panose="020B0503020204020204" pitchFamily="34" charset="-120"/>
                         </a:rPr>
                         <a:t>1</a:t>
                       </a:r>
                       <a:endParaRPr lang="en-US" sz="1500" dirty="0">
-                        <a:latin typeface="微软雅黑" charset="0"/>
-                        <a:ea typeface="微软雅黑" charset="0"/>
-                        <a:cs typeface="微软雅黑" charset="0"/>
+                        <a:latin typeface="微软雅黑" panose="020B0503020204020204" pitchFamily="34" charset="-122"/>
+                        <a:ea typeface="微软雅黑" panose="020B0503020204020204" pitchFamily="34" charset="-122"/>
+                        <a:cs typeface="微软雅黑" panose="020B0503020204020204" pitchFamily="34" charset="-122"/>
                       </a:endParaRPr>
                     </a:p>
                   </a:txBody>
-                  <a:tcPr marL="91440" marR="91440" marT="45720" marB="45720" anchor="ctr">
+                  <a:tcPr anchor="ctr">
                     <a:lnL w="9525" cap="flat" cmpd="sng" algn="ctr">
                       <a:solidFill>
                         <a:srgbClr val="D8DBE0"/>
@@ -6086,7 +5810,7 @@
                     <a:bodyPr/>
                     <a:lstStyle/>
                     <a:p>
-                      <a:pPr algn="ctr" indent="0" marL="0">
+                      <a:pPr marL="0" indent="0" algn="ctr">
                         <a:buNone/>
                       </a:pPr>
                       <a:r>
@@ -6094,20 +5818,20 @@
                           <a:solidFill>
                             <a:srgbClr val="1F2329"/>
                           </a:solidFill>
-                          <a:latin typeface="微软雅黑" pitchFamily="34" charset="0"/>
-                          <a:ea typeface="微软雅黑" pitchFamily="34" charset="-122"/>
-                          <a:cs typeface="微软雅黑" pitchFamily="34" charset="-120"/>
+                          <a:latin typeface="微软雅黑" panose="020B0503020204020204" pitchFamily="34" charset="-122"/>
+                          <a:ea typeface="微软雅黑" panose="020B0503020204020204" pitchFamily="34" charset="-122"/>
+                          <a:cs typeface="微软雅黑" panose="020B0503020204020204" pitchFamily="34" charset="-120"/>
                         </a:rPr>
                         <a:t>0</a:t>
                       </a:r>
                       <a:endParaRPr lang="en-US" sz="1500" dirty="0">
-                        <a:latin typeface="微软雅黑" charset="0"/>
-                        <a:ea typeface="微软雅黑" charset="0"/>
-                        <a:cs typeface="微软雅黑" charset="0"/>
+                        <a:latin typeface="微软雅黑" panose="020B0503020204020204" pitchFamily="34" charset="-122"/>
+                        <a:ea typeface="微软雅黑" panose="020B0503020204020204" pitchFamily="34" charset="-122"/>
+                        <a:cs typeface="微软雅黑" panose="020B0503020204020204" pitchFamily="34" charset="-122"/>
                       </a:endParaRPr>
                     </a:p>
                   </a:txBody>
-                  <a:tcPr marL="91440" marR="91440" marT="45720" marB="45720" anchor="ctr">
+                  <a:tcPr anchor="ctr">
                     <a:lnL w="9525" cap="flat" cmpd="sng" algn="ctr">
                       <a:solidFill>
                         <a:srgbClr val="D8DBE0"/>
@@ -6154,7 +5878,7 @@
                     <a:bodyPr/>
                     <a:lstStyle/>
                     <a:p>
-                      <a:pPr algn="ctr" indent="0" marL="0">
+                      <a:pPr marL="0" indent="0" algn="ctr">
                         <a:buNone/>
                       </a:pPr>
                       <a:r>
@@ -6162,20 +5886,20 @@
                           <a:solidFill>
                             <a:srgbClr val="1F2329"/>
                           </a:solidFill>
-                          <a:latin typeface="微软雅黑" pitchFamily="34" charset="0"/>
-                          <a:ea typeface="微软雅黑" pitchFamily="34" charset="-122"/>
-                          <a:cs typeface="微软雅黑" pitchFamily="34" charset="-120"/>
+                          <a:latin typeface="微软雅黑" panose="020B0503020204020204" pitchFamily="34" charset="-122"/>
+                          <a:ea typeface="微软雅黑" panose="020B0503020204020204" pitchFamily="34" charset="-122"/>
+                          <a:cs typeface="微软雅黑" panose="020B0503020204020204" pitchFamily="34" charset="-120"/>
                         </a:rPr>
                         <a:t>1</a:t>
                       </a:r>
                       <a:endParaRPr lang="en-US" sz="1500" dirty="0">
-                        <a:latin typeface="微软雅黑" charset="0"/>
-                        <a:ea typeface="微软雅黑" charset="0"/>
-                        <a:cs typeface="微软雅黑" charset="0"/>
+                        <a:latin typeface="微软雅黑" panose="020B0503020204020204" pitchFamily="34" charset="-122"/>
+                        <a:ea typeface="微软雅黑" panose="020B0503020204020204" pitchFamily="34" charset="-122"/>
+                        <a:cs typeface="微软雅黑" panose="020B0503020204020204" pitchFamily="34" charset="-122"/>
                       </a:endParaRPr>
                     </a:p>
                   </a:txBody>
-                  <a:tcPr marL="91440" marR="91440" marT="45720" marB="45720" anchor="ctr">
+                  <a:tcPr anchor="ctr">
                     <a:lnL w="9525" cap="flat" cmpd="sng" algn="ctr">
                       <a:solidFill>
                         <a:srgbClr val="D8DBE0"/>
@@ -6222,7 +5946,7 @@
                     <a:bodyPr/>
                     <a:lstStyle/>
                     <a:p>
-                      <a:pPr algn="ctr" indent="0" marL="0">
+                      <a:pPr marL="0" indent="0" algn="ctr">
                         <a:buNone/>
                       </a:pPr>
                       <a:r>
@@ -6230,20 +5954,20 @@
                           <a:solidFill>
                             <a:srgbClr val="1F2329"/>
                           </a:solidFill>
-                          <a:latin typeface="微软雅黑" pitchFamily="34" charset="0"/>
-                          <a:ea typeface="微软雅黑" pitchFamily="34" charset="-122"/>
-                          <a:cs typeface="微软雅黑" pitchFamily="34" charset="-120"/>
+                          <a:latin typeface="微软雅黑" panose="020B0503020204020204" pitchFamily="34" charset="-122"/>
+                          <a:ea typeface="微软雅黑" panose="020B0503020204020204" pitchFamily="34" charset="-122"/>
+                          <a:cs typeface="微软雅黑" panose="020B0503020204020204" pitchFamily="34" charset="-120"/>
                         </a:rPr>
                         <a:t>0</a:t>
                       </a:r>
                       <a:endParaRPr lang="en-US" sz="1500" dirty="0">
-                        <a:latin typeface="微软雅黑" charset="0"/>
-                        <a:ea typeface="微软雅黑" charset="0"/>
-                        <a:cs typeface="微软雅黑" charset="0"/>
+                        <a:latin typeface="微软雅黑" panose="020B0503020204020204" pitchFamily="34" charset="-122"/>
+                        <a:ea typeface="微软雅黑" panose="020B0503020204020204" pitchFamily="34" charset="-122"/>
+                        <a:cs typeface="微软雅黑" panose="020B0503020204020204" pitchFamily="34" charset="-122"/>
                       </a:endParaRPr>
                     </a:p>
                   </a:txBody>
-                  <a:tcPr marL="91440" marR="91440" marT="45720" marB="45720" anchor="ctr">
+                  <a:tcPr anchor="ctr">
                     <a:lnL w="9525" cap="flat" cmpd="sng" algn="ctr">
                       <a:solidFill>
                         <a:srgbClr val="D8DBE0"/>
@@ -6290,7 +6014,7 @@
                     <a:bodyPr/>
                     <a:lstStyle/>
                     <a:p>
-                      <a:pPr algn="ctr" indent="0" marL="0">
+                      <a:pPr marL="0" indent="0" algn="ctr">
                         <a:buNone/>
                       </a:pPr>
                       <a:r>
@@ -6298,20 +6022,20 @@
                           <a:solidFill>
                             <a:srgbClr val="1F2329"/>
                           </a:solidFill>
-                          <a:latin typeface="微软雅黑" pitchFamily="34" charset="0"/>
-                          <a:ea typeface="微软雅黑" pitchFamily="34" charset="-122"/>
-                          <a:cs typeface="微软雅黑" pitchFamily="34" charset="-120"/>
+                          <a:latin typeface="微软雅黑" panose="020B0503020204020204" pitchFamily="34" charset="-122"/>
+                          <a:ea typeface="微软雅黑" panose="020B0503020204020204" pitchFamily="34" charset="-122"/>
+                          <a:cs typeface="微软雅黑" panose="020B0503020204020204" pitchFamily="34" charset="-120"/>
                         </a:rPr>
                         <a:t>4</a:t>
                       </a:r>
                       <a:endParaRPr lang="en-US" sz="1500" dirty="0">
-                        <a:latin typeface="微软雅黑" charset="0"/>
-                        <a:ea typeface="微软雅黑" charset="0"/>
-                        <a:cs typeface="微软雅黑" charset="0"/>
+                        <a:latin typeface="微软雅黑" panose="020B0503020204020204" pitchFamily="34" charset="-122"/>
+                        <a:ea typeface="微软雅黑" panose="020B0503020204020204" pitchFamily="34" charset="-122"/>
+                        <a:cs typeface="微软雅黑" panose="020B0503020204020204" pitchFamily="34" charset="-122"/>
                       </a:endParaRPr>
                     </a:p>
                   </a:txBody>
-                  <a:tcPr marL="91440" marR="91440" marT="45720" marB="45720" anchor="ctr">
+                  <a:tcPr anchor="ctr">
                     <a:lnL w="9525" cap="flat" cmpd="sng" algn="ctr">
                       <a:solidFill>
                         <a:srgbClr val="D8DBE0"/>
@@ -6373,13 +6097,12 @@
             <a:avLst/>
           </a:prstGeom>
           <a:noFill/>
-          <a:ln/>
         </p:spPr>
         <p:txBody>
           <a:bodyPr wrap="square" rtlCol="0" anchor="t"/>
           <a:lstStyle/>
           <a:p>
-            <a:pPr algn="l" indent="0" marL="0">
+            <a:pPr marL="0" indent="0" algn="l">
               <a:buNone/>
             </a:pPr>
             <a:r>
@@ -6387,9 +6110,9 @@
                 <a:solidFill>
                   <a:srgbClr val="8A9099"/>
                 </a:solidFill>
-                <a:latin typeface="微软雅黑" pitchFamily="34" charset="0"/>
-                <a:ea typeface="微软雅黑" pitchFamily="34" charset="-122"/>
-                <a:cs typeface="微软雅黑" pitchFamily="34" charset="-120"/>
+                <a:latin typeface="微软雅黑" panose="020B0503020204020204" pitchFamily="34" charset="-122"/>
+                <a:ea typeface="微软雅黑" panose="020B0503020204020204" pitchFamily="34" charset="-122"/>
+                <a:cs typeface="微软雅黑" panose="020B0503020204020204" pitchFamily="34" charset="-120"/>
               </a:rPr>
               <a:t>next[1]=0、next[2]=1 规定；next[j]=前 j-1 个字符最长相等前后缀长度+1。nextval[j]：若第 j 字符等于第 next[j] 字符则取 nextval[next[j]]，否则等于 next[j]</a:t>
             </a:r>
@@ -6407,7 +6130,7 @@
 
 <file path=ppt/slides/slide16.xml><?xml version="1.0" encoding="utf-8"?>
 <p:sld xmlns:a="http://schemas.openxmlformats.org/drawingml/2006/main" xmlns:r="http://schemas.openxmlformats.org/officeDocument/2006/relationships" xmlns:p="http://schemas.openxmlformats.org/presentationml/2006/main">
-  <p:cSld name="Slide 16">
+  <p:cSld>
     <p:bg>
       <p:bgPr>
         <a:blipFill dpi="0" rotWithShape="1">
@@ -6451,13 +6174,12 @@
             <a:avLst/>
           </a:prstGeom>
           <a:noFill/>
-          <a:ln/>
         </p:spPr>
         <p:txBody>
           <a:bodyPr wrap="square" rtlCol="0" anchor="ctr"/>
           <a:lstStyle/>
           <a:p>
-            <a:pPr algn="r" indent="0" marL="0">
+            <a:pPr marL="0" indent="0" algn="r">
               <a:buNone/>
             </a:pPr>
             <a:r>
@@ -6465,9 +6187,9 @@
                 <a:solidFill>
                   <a:srgbClr val="8A9099"/>
                 </a:solidFill>
-                <a:latin typeface="微软雅黑" pitchFamily="34" charset="0"/>
-                <a:ea typeface="微软雅黑" pitchFamily="34" charset="-122"/>
-                <a:cs typeface="微软雅黑" pitchFamily="34" charset="-120"/>
+                <a:latin typeface="微软雅黑" panose="020B0503020204020204" pitchFamily="34" charset="-122"/>
+                <a:ea typeface="微软雅黑" panose="020B0503020204020204" pitchFamily="34" charset="-122"/>
+                <a:cs typeface="微软雅黑" panose="020B0503020204020204" pitchFamily="34" charset="-120"/>
               </a:rPr>
               <a:t>16 / 16</a:t>
             </a:r>
@@ -6490,13 +6212,12 @@
             <a:avLst/>
           </a:prstGeom>
           <a:noFill/>
-          <a:ln/>
         </p:spPr>
         <p:txBody>
           <a:bodyPr wrap="square" rtlCol="0" anchor="ctr"/>
           <a:lstStyle/>
           <a:p>
-            <a:pPr algn="l" indent="0" marL="0">
+            <a:pPr marL="0" indent="0" algn="l">
               <a:buNone/>
             </a:pPr>
             <a:r>
@@ -6504,9 +6225,9 @@
                 <a:solidFill>
                   <a:srgbClr val="1F4E9C"/>
                 </a:solidFill>
-                <a:latin typeface="微软雅黑" pitchFamily="34" charset="0"/>
-                <a:ea typeface="微软雅黑" pitchFamily="34" charset="-122"/>
-                <a:cs typeface="微软雅黑" pitchFamily="34" charset="-120"/>
+                <a:latin typeface="微软雅黑" panose="020B0503020204020204" pitchFamily="34" charset="-122"/>
+                <a:ea typeface="微软雅黑" panose="020B0503020204020204" pitchFamily="34" charset="-122"/>
+                <a:cs typeface="微软雅黑" panose="020B0503020204020204" pitchFamily="34" charset="-120"/>
               </a:rPr>
               <a:t>参考答案 · 模仿题</a:t>
             </a:r>
@@ -6529,13 +6250,12 @@
             <a:avLst/>
           </a:prstGeom>
           <a:noFill/>
-          <a:ln/>
         </p:spPr>
         <p:txBody>
           <a:bodyPr wrap="square" rtlCol="0" anchor="ctr"/>
           <a:lstStyle/>
           <a:p>
-            <a:pPr algn="l" indent="0" marL="0">
+            <a:pPr marL="0" indent="0" algn="l">
               <a:buNone/>
             </a:pPr>
             <a:r>
@@ -6543,9 +6263,9 @@
                 <a:solidFill>
                   <a:srgbClr val="1F2329"/>
                 </a:solidFill>
-                <a:latin typeface="微软雅黑" pitchFamily="34" charset="0"/>
-                <a:ea typeface="微软雅黑" pitchFamily="34" charset="-122"/>
-                <a:cs typeface="微软雅黑" pitchFamily="34" charset="-120"/>
+                <a:latin typeface="微软雅黑" panose="020B0503020204020204" pitchFamily="34" charset="-122"/>
+                <a:ea typeface="微软雅黑" panose="020B0503020204020204" pitchFamily="34" charset="-122"/>
+                <a:cs typeface="微软雅黑" panose="020B0503020204020204" pitchFamily="34" charset="-120"/>
               </a:rPr>
               <a:t>模仿题参考答案（自行对照）</a:t>
             </a:r>
@@ -6568,13 +6288,12 @@
             <a:avLst/>
           </a:prstGeom>
           <a:noFill/>
-          <a:ln/>
         </p:spPr>
         <p:txBody>
           <a:bodyPr wrap="square" rtlCol="0" anchor="t"/>
           <a:lstStyle/>
           <a:p>
-            <a:pPr algn="l" indent="0" marL="0">
+            <a:pPr marL="0" indent="0" algn="l">
               <a:lnSpc>
                 <a:spcPct val="115000"/>
               </a:lnSpc>
@@ -6585,25 +6304,68 @@
                 <a:solidFill>
                   <a:srgbClr val="1F4E9C"/>
                 </a:solidFill>
-                <a:latin typeface="微软雅黑" pitchFamily="34" charset="0"/>
-                <a:ea typeface="微软雅黑" pitchFamily="34" charset="-122"/>
-                <a:cs typeface="微软雅黑" pitchFamily="34" charset="-120"/>
+                <a:latin typeface="微软雅黑" panose="020B0503020204020204" pitchFamily="34" charset="-122"/>
+                <a:ea typeface="微软雅黑" panose="020B0503020204020204" pitchFamily="34" charset="-122"/>
+                <a:cs typeface="微软雅黑" panose="020B0503020204020204" pitchFamily="34" charset="-120"/>
               </a:rPr>
               <a:t>•  </a:t>
             </a:r>
-            <a:pPr algn="l" indent="0" marL="0">
+            <a:r>
+              <a:rPr lang="en-US" sz="1800" dirty="0">
+                <a:solidFill>
+                  <a:srgbClr val="000000"/>
+                </a:solidFill>
+              </a:rPr>
+              <a:t>广义表 A = ((a,b),(c,(d,e)))</a:t>
+            </a:r>
+            <a:endParaRPr lang="en-US" sz="1800" dirty="0"/>
+          </a:p>
+        </p:txBody>
+      </p:sp>
+      <p:sp>
+        <p:nvSpPr>
+          <p:cNvPr id="6" name="Text 4"/>
+          <p:cNvSpPr/>
+          <p:nvPr/>
+        </p:nvSpPr>
+        <p:spPr>
+          <a:xfrm>
+            <a:off x="896112" y="2866644"/>
+            <a:ext cx="10454335" cy="397764"/>
+          </a:xfrm>
+          <a:prstGeom prst="rect">
+            <a:avLst/>
+          </a:prstGeom>
+          <a:noFill/>
+        </p:spPr>
+        <p:txBody>
+          <a:bodyPr wrap="square" rtlCol="0" anchor="t"/>
+          <a:lstStyle/>
+          <a:p>
+            <a:pPr marL="0" indent="0" algn="l">
               <a:lnSpc>
                 <a:spcPct val="115000"/>
               </a:lnSpc>
               <a:buNone/>
             </a:pPr>
             <a:r>
+              <a:rPr lang="en-US" sz="1800" b="1" dirty="0">
+                <a:solidFill>
+                  <a:srgbClr val="1F4E9C"/>
+                </a:solidFill>
+                <a:latin typeface="微软雅黑" panose="020B0503020204020204" pitchFamily="34" charset="-122"/>
+                <a:ea typeface="微软雅黑" panose="020B0503020204020204" pitchFamily="34" charset="-122"/>
+                <a:cs typeface="微软雅黑" panose="020B0503020204020204" pitchFamily="34" charset="-120"/>
+              </a:rPr>
+              <a:t>•  </a:t>
+            </a:r>
+            <a:r>
               <a:rPr lang="en-US" sz="1800" dirty="0">
                 <a:solidFill>
                   <a:srgbClr val="000000"/>
                 </a:solidFill>
               </a:rPr>
-              <a:t>广义表 A = ((a,b),(c,(d,e)))</a:t>
+              <a:t>head(A) = (a,b)，取第一个元素，它本身是个子表</a:t>
             </a:r>
             <a:endParaRPr lang="en-US" sz="1800" dirty="0"/>
           </a:p>
@@ -6611,26 +6373,25 @@
       </p:sp>
       <p:sp>
         <p:nvSpPr>
-          <p:cNvPr id="6" name="Text 4"/>
+          <p:cNvPr id="7" name="Text 5"/>
           <p:cNvSpPr/>
           <p:nvPr/>
         </p:nvSpPr>
         <p:spPr>
           <a:xfrm>
-            <a:off x="896112" y="2866644"/>
-            <a:ext cx="10454335" cy="397764"/>
+            <a:off x="896112" y="3337560"/>
+            <a:ext cx="10454335" cy="740664"/>
           </a:xfrm>
           <a:prstGeom prst="rect">
             <a:avLst/>
           </a:prstGeom>
           <a:noFill/>
-          <a:ln/>
         </p:spPr>
         <p:txBody>
           <a:bodyPr wrap="square" rtlCol="0" anchor="t"/>
           <a:lstStyle/>
           <a:p>
-            <a:pPr algn="l" indent="0" marL="0">
+            <a:pPr marL="0" indent="0" algn="l">
               <a:lnSpc>
                 <a:spcPct val="115000"/>
               </a:lnSpc>
@@ -6641,130 +6402,61 @@
                 <a:solidFill>
                   <a:srgbClr val="1F4E9C"/>
                 </a:solidFill>
-                <a:latin typeface="微软雅黑" pitchFamily="34" charset="0"/>
-                <a:ea typeface="微软雅黑" pitchFamily="34" charset="-122"/>
-                <a:cs typeface="微软雅黑" pitchFamily="34" charset="-120"/>
+                <a:latin typeface="微软雅黑" panose="020B0503020204020204" pitchFamily="34" charset="-122"/>
+                <a:ea typeface="微软雅黑" panose="020B0503020204020204" pitchFamily="34" charset="-122"/>
+                <a:cs typeface="微软雅黑" panose="020B0503020204020204" pitchFamily="34" charset="-120"/>
               </a:rPr>
               <a:t>•  </a:t>
             </a:r>
-            <a:pPr algn="l" indent="0" marL="0">
+            <a:r>
+              <a:rPr lang="en-US" sz="1800" dirty="0">
+                <a:solidFill>
+                  <a:srgbClr val="000000"/>
+                </a:solidFill>
+              </a:rPr>
+              <a:t>tail(A) = ((c,(d,e)))，取剩下的，外面要加括号，只剩一个元素也是表</a:t>
+            </a:r>
+            <a:endParaRPr lang="en-US" sz="1800" dirty="0"/>
+          </a:p>
+        </p:txBody>
+      </p:sp>
+      <p:sp>
+        <p:nvSpPr>
+          <p:cNvPr id="8" name="Text 6"/>
+          <p:cNvSpPr/>
+          <p:nvPr/>
+        </p:nvSpPr>
+        <p:spPr>
+          <a:xfrm>
+            <a:off x="896112" y="4151376"/>
+            <a:ext cx="10454335" cy="740664"/>
+          </a:xfrm>
+          <a:prstGeom prst="rect">
+            <a:avLst/>
+          </a:prstGeom>
+          <a:noFill/>
+        </p:spPr>
+        <p:txBody>
+          <a:bodyPr wrap="square" rtlCol="0" anchor="t"/>
+          <a:lstStyle/>
+          <a:p>
+            <a:pPr marL="0" indent="0" algn="l">
               <a:lnSpc>
                 <a:spcPct val="115000"/>
               </a:lnSpc>
               <a:buNone/>
             </a:pPr>
             <a:r>
-              <a:rPr lang="en-US" sz="1800" dirty="0">
-                <a:solidFill>
-                  <a:srgbClr val="000000"/>
-                </a:solidFill>
-              </a:rPr>
-              <a:t>head(A) = (a,b)，取第一个元素，它本身是个子表</a:t>
-            </a:r>
-            <a:endParaRPr lang="en-US" sz="1800" dirty="0"/>
-          </a:p>
-        </p:txBody>
-      </p:sp>
-      <p:sp>
-        <p:nvSpPr>
-          <p:cNvPr id="7" name="Text 5"/>
-          <p:cNvSpPr/>
-          <p:nvPr/>
-        </p:nvSpPr>
-        <p:spPr>
-          <a:xfrm>
-            <a:off x="896112" y="3337560"/>
-            <a:ext cx="10454335" cy="740664"/>
-          </a:xfrm>
-          <a:prstGeom prst="rect">
-            <a:avLst/>
-          </a:prstGeom>
-          <a:noFill/>
-          <a:ln/>
-        </p:spPr>
-        <p:txBody>
-          <a:bodyPr wrap="square" rtlCol="0" anchor="t"/>
-          <a:lstStyle/>
-          <a:p>
-            <a:pPr algn="l" indent="0" marL="0">
-              <a:lnSpc>
-                <a:spcPct val="115000"/>
-              </a:lnSpc>
-              <a:buNone/>
-            </a:pPr>
-            <a:r>
               <a:rPr lang="en-US" sz="1800" b="1" dirty="0">
                 <a:solidFill>
                   <a:srgbClr val="1F4E9C"/>
                 </a:solidFill>
-                <a:latin typeface="微软雅黑" pitchFamily="34" charset="0"/>
-                <a:ea typeface="微软雅黑" pitchFamily="34" charset="-122"/>
-                <a:cs typeface="微软雅黑" pitchFamily="34" charset="-120"/>
+                <a:latin typeface="微软雅黑" panose="020B0503020204020204" pitchFamily="34" charset="-122"/>
+                <a:ea typeface="微软雅黑" panose="020B0503020204020204" pitchFamily="34" charset="-122"/>
+                <a:cs typeface="微软雅黑" panose="020B0503020204020204" pitchFamily="34" charset="-120"/>
               </a:rPr>
               <a:t>•  </a:t>
             </a:r>
-            <a:pPr algn="l" indent="0" marL="0">
-              <a:lnSpc>
-                <a:spcPct val="115000"/>
-              </a:lnSpc>
-              <a:buNone/>
-            </a:pPr>
-            <a:r>
-              <a:rPr lang="en-US" sz="1800" dirty="0">
-                <a:solidFill>
-                  <a:srgbClr val="000000"/>
-                </a:solidFill>
-              </a:rPr>
-              <a:t>tail(A) = ((c,(d,e)))，取剩下的，外面要加括号，只剩一个元素也是表</a:t>
-            </a:r>
-            <a:endParaRPr lang="en-US" sz="1800" dirty="0"/>
-          </a:p>
-        </p:txBody>
-      </p:sp>
-      <p:sp>
-        <p:nvSpPr>
-          <p:cNvPr id="8" name="Text 6"/>
-          <p:cNvSpPr/>
-          <p:nvPr/>
-        </p:nvSpPr>
-        <p:spPr>
-          <a:xfrm>
-            <a:off x="896112" y="4151376"/>
-            <a:ext cx="10454335" cy="740664"/>
-          </a:xfrm>
-          <a:prstGeom prst="rect">
-            <a:avLst/>
-          </a:prstGeom>
-          <a:noFill/>
-          <a:ln/>
-        </p:spPr>
-        <p:txBody>
-          <a:bodyPr wrap="square" rtlCol="0" anchor="t"/>
-          <a:lstStyle/>
-          <a:p>
-            <a:pPr algn="l" indent="0" marL="0">
-              <a:lnSpc>
-                <a:spcPct val="115000"/>
-              </a:lnSpc>
-              <a:buNone/>
-            </a:pPr>
-            <a:r>
-              <a:rPr lang="en-US" sz="1800" b="1" dirty="0">
-                <a:solidFill>
-                  <a:srgbClr val="1F4E9C"/>
-                </a:solidFill>
-                <a:latin typeface="微软雅黑" pitchFamily="34" charset="0"/>
-                <a:ea typeface="微软雅黑" pitchFamily="34" charset="-122"/>
-                <a:cs typeface="微软雅黑" pitchFamily="34" charset="-120"/>
-              </a:rPr>
-              <a:t>•  </a:t>
-            </a:r>
-            <a:pPr algn="l" indent="0" marL="0">
-              <a:lnSpc>
-                <a:spcPct val="115000"/>
-              </a:lnSpc>
-              <a:buNone/>
-            </a:pPr>
             <a:r>
               <a:rPr lang="en-US" sz="1800" dirty="0">
                 <a:solidFill>
@@ -6792,13 +6484,12 @@
             <a:avLst/>
           </a:prstGeom>
           <a:noFill/>
-          <a:ln/>
         </p:spPr>
         <p:txBody>
           <a:bodyPr wrap="square" rtlCol="0" anchor="t"/>
           <a:lstStyle/>
           <a:p>
-            <a:pPr algn="l" indent="0" marL="0">
+            <a:pPr marL="0" indent="0" algn="l">
               <a:buNone/>
             </a:pPr>
             <a:r>
@@ -6806,9 +6497,9 @@
                 <a:solidFill>
                   <a:srgbClr val="8A9099"/>
                 </a:solidFill>
-                <a:latin typeface="微软雅黑" pitchFamily="34" charset="0"/>
-                <a:ea typeface="微软雅黑" pitchFamily="34" charset="-122"/>
-                <a:cs typeface="微软雅黑" pitchFamily="34" charset="-120"/>
+                <a:latin typeface="微软雅黑" panose="020B0503020204020204" pitchFamily="34" charset="-122"/>
+                <a:ea typeface="微软雅黑" panose="020B0503020204020204" pitchFamily="34" charset="-122"/>
+                <a:cs typeface="微软雅黑" panose="020B0503020204020204" pitchFamily="34" charset="-120"/>
               </a:rPr>
               <a:t>关键：tail 的结果一定是表、带括号；head 的结果可能是原子也可能是子表，看第一个元素是什么</a:t>
             </a:r>
@@ -6826,7 +6517,7 @@
 
 <file path=ppt/slides/slide2.xml><?xml version="1.0" encoding="utf-8"?>
 <p:sld xmlns:a="http://schemas.openxmlformats.org/drawingml/2006/main" xmlns:r="http://schemas.openxmlformats.org/officeDocument/2006/relationships" xmlns:p="http://schemas.openxmlformats.org/presentationml/2006/main">
-  <p:cSld name="Slide 2">
+  <p:cSld>
     <p:bg>
       <p:bgPr>
         <a:blipFill dpi="0" rotWithShape="1">
@@ -6870,13 +6561,12 @@
             <a:avLst/>
           </a:prstGeom>
           <a:noFill/>
-          <a:ln/>
         </p:spPr>
         <p:txBody>
           <a:bodyPr wrap="square" rtlCol="0" anchor="ctr"/>
           <a:lstStyle/>
           <a:p>
-            <a:pPr algn="r" indent="0" marL="0">
+            <a:pPr marL="0" indent="0" algn="r">
               <a:buNone/>
             </a:pPr>
             <a:r>
@@ -6884,9 +6574,9 @@
                 <a:solidFill>
                   <a:srgbClr val="8A9099"/>
                 </a:solidFill>
-                <a:latin typeface="微软雅黑" pitchFamily="34" charset="0"/>
-                <a:ea typeface="微软雅黑" pitchFamily="34" charset="-122"/>
-                <a:cs typeface="微软雅黑" pitchFamily="34" charset="-120"/>
+                <a:latin typeface="微软雅黑" panose="020B0503020204020204" pitchFamily="34" charset="-122"/>
+                <a:ea typeface="微软雅黑" panose="020B0503020204020204" pitchFamily="34" charset="-122"/>
+                <a:cs typeface="微软雅黑" panose="020B0503020204020204" pitchFamily="34" charset="-120"/>
               </a:rPr>
               <a:t>2 / 16</a:t>
             </a:r>
@@ -6909,13 +6599,12 @@
             <a:avLst/>
           </a:prstGeom>
           <a:noFill/>
-          <a:ln/>
         </p:spPr>
         <p:txBody>
           <a:bodyPr wrap="square" rtlCol="0" anchor="ctr"/>
           <a:lstStyle/>
           <a:p>
-            <a:pPr algn="l" indent="0" marL="0">
+            <a:pPr marL="0" indent="0" algn="l">
               <a:buNone/>
             </a:pPr>
             <a:r>
@@ -6923,9 +6612,9 @@
                 <a:solidFill>
                   <a:srgbClr val="1F4E9C"/>
                 </a:solidFill>
-                <a:latin typeface="微软雅黑" pitchFamily="34" charset="0"/>
-                <a:ea typeface="微软雅黑" pitchFamily="34" charset="-122"/>
-                <a:cs typeface="微软雅黑" pitchFamily="34" charset="-120"/>
+                <a:latin typeface="微软雅黑" panose="020B0503020204020204" pitchFamily="34" charset="-122"/>
+                <a:ea typeface="微软雅黑" panose="020B0503020204020204" pitchFamily="34" charset="-122"/>
+                <a:cs typeface="微软雅黑" panose="020B0503020204020204" pitchFamily="34" charset="-120"/>
               </a:rPr>
               <a:t>引题</a:t>
             </a:r>
@@ -6948,13 +6637,12 @@
             <a:avLst/>
           </a:prstGeom>
           <a:noFill/>
-          <a:ln/>
         </p:spPr>
         <p:txBody>
           <a:bodyPr wrap="square" rtlCol="0" anchor="ctr"/>
           <a:lstStyle/>
           <a:p>
-            <a:pPr algn="l" indent="0" marL="0">
+            <a:pPr marL="0" indent="0" algn="l">
               <a:buNone/>
             </a:pPr>
             <a:r>
@@ -6962,9 +6650,9 @@
                 <a:solidFill>
                   <a:srgbClr val="1F2329"/>
                 </a:solidFill>
-                <a:latin typeface="微软雅黑" pitchFamily="34" charset="0"/>
-                <a:ea typeface="微软雅黑" pitchFamily="34" charset="-122"/>
-                <a:cs typeface="微软雅黑" pitchFamily="34" charset="-120"/>
+                <a:latin typeface="微软雅黑" panose="020B0503020204020204" pitchFamily="34" charset="-122"/>
+                <a:ea typeface="微软雅黑" panose="020B0503020204020204" pitchFamily="34" charset="-122"/>
+                <a:cs typeface="微软雅黑" panose="020B0503020204020204" pitchFamily="34" charset="-120"/>
               </a:rPr>
               <a:t>这一节考什么、不考什么</a:t>
             </a:r>
@@ -6987,13 +6675,12 @@
             <a:avLst/>
           </a:prstGeom>
           <a:noFill/>
-          <a:ln/>
         </p:spPr>
         <p:txBody>
           <a:bodyPr wrap="square" rtlCol="0" anchor="t"/>
           <a:lstStyle/>
           <a:p>
-            <a:pPr algn="l" indent="0" marL="0">
+            <a:pPr marL="0" indent="0" algn="l">
               <a:lnSpc>
                 <a:spcPct val="115000"/>
               </a:lnSpc>
@@ -7004,25 +6691,68 @@
                 <a:solidFill>
                   <a:srgbClr val="1F4E9C"/>
                 </a:solidFill>
-                <a:latin typeface="微软雅黑" pitchFamily="34" charset="0"/>
-                <a:ea typeface="微软雅黑" pitchFamily="34" charset="-122"/>
-                <a:cs typeface="微软雅黑" pitchFamily="34" charset="-120"/>
+                <a:latin typeface="微软雅黑" panose="020B0503020204020204" pitchFamily="34" charset="-122"/>
+                <a:ea typeface="微软雅黑" panose="020B0503020204020204" pitchFamily="34" charset="-122"/>
+                <a:cs typeface="微软雅黑" panose="020B0503020204020204" pitchFamily="34" charset="-120"/>
               </a:rPr>
               <a:t>•  </a:t>
             </a:r>
-            <a:pPr algn="l" indent="0" marL="0">
+            <a:r>
+              <a:rPr lang="en-US" sz="1800" dirty="0">
+                <a:solidFill>
+                  <a:srgbClr val="000000"/>
+                </a:solidFill>
+              </a:rPr>
+              <a:t>串就是字符数组加一个结束标记 '\0'，这个在C语言强化阶段讲字符串时埋过</a:t>
+            </a:r>
+            <a:endParaRPr lang="en-US" sz="1800" dirty="0"/>
+          </a:p>
+        </p:txBody>
+      </p:sp>
+      <p:sp>
+        <p:nvSpPr>
+          <p:cNvPr id="6" name="Text 4"/>
+          <p:cNvSpPr/>
+          <p:nvPr/>
+        </p:nvSpPr>
+        <p:spPr>
+          <a:xfrm>
+            <a:off x="896112" y="2866644"/>
+            <a:ext cx="10454335" cy="740664"/>
+          </a:xfrm>
+          <a:prstGeom prst="rect">
+            <a:avLst/>
+          </a:prstGeom>
+          <a:noFill/>
+        </p:spPr>
+        <p:txBody>
+          <a:bodyPr wrap="square" rtlCol="0" anchor="t"/>
+          <a:lstStyle/>
+          <a:p>
+            <a:pPr marL="0" indent="0" algn="l">
               <a:lnSpc>
                 <a:spcPct val="115000"/>
               </a:lnSpc>
               <a:buNone/>
             </a:pPr>
             <a:r>
+              <a:rPr lang="en-US" sz="1800" b="1" dirty="0">
+                <a:solidFill>
+                  <a:srgbClr val="1F4E9C"/>
+                </a:solidFill>
+                <a:latin typeface="微软雅黑" panose="020B0503020204020204" pitchFamily="34" charset="-122"/>
+                <a:ea typeface="微软雅黑" panose="020B0503020204020204" pitchFamily="34" charset="-122"/>
+                <a:cs typeface="微软雅黑" panose="020B0503020204020204" pitchFamily="34" charset="-120"/>
+              </a:rPr>
+              <a:t>•  </a:t>
+            </a:r>
+            <a:r>
               <a:rPr lang="en-US" sz="1800" dirty="0">
                 <a:solidFill>
                   <a:srgbClr val="000000"/>
                 </a:solidFill>
               </a:rPr>
-              <a:t>串就是字符数组加一个结束标记 '\0'，这个在C语言强化阶段讲字符串时埋过</a:t>
+              <a:t>802 里串几乎不要求写代码，考的是 KMP 的 next、nextval 手算，和 BF 匹配返回什么</a:t>
             </a:r>
             <a:endParaRPr lang="en-US" sz="1800" dirty="0"/>
           </a:p>
@@ -7030,26 +6760,25 @@
       </p:sp>
       <p:sp>
         <p:nvSpPr>
-          <p:cNvPr id="6" name="Text 4"/>
+          <p:cNvPr id="7" name="Text 5"/>
           <p:cNvSpPr/>
           <p:nvPr/>
         </p:nvSpPr>
         <p:spPr>
           <a:xfrm>
-            <a:off x="896112" y="2866644"/>
+            <a:off x="896112" y="3680460"/>
             <a:ext cx="10454335" cy="740664"/>
           </a:xfrm>
           <a:prstGeom prst="rect">
             <a:avLst/>
           </a:prstGeom>
           <a:noFill/>
-          <a:ln/>
         </p:spPr>
         <p:txBody>
           <a:bodyPr wrap="square" rtlCol="0" anchor="t"/>
           <a:lstStyle/>
           <a:p>
-            <a:pPr algn="l" indent="0" marL="0">
+            <a:pPr marL="0" indent="0" algn="l">
               <a:lnSpc>
                 <a:spcPct val="115000"/>
               </a:lnSpc>
@@ -7060,74 +6789,12 @@
                 <a:solidFill>
                   <a:srgbClr val="1F4E9C"/>
                 </a:solidFill>
-                <a:latin typeface="微软雅黑" pitchFamily="34" charset="0"/>
-                <a:ea typeface="微软雅黑" pitchFamily="34" charset="-122"/>
-                <a:cs typeface="微软雅黑" pitchFamily="34" charset="-120"/>
+                <a:latin typeface="微软雅黑" panose="020B0503020204020204" pitchFamily="34" charset="-122"/>
+                <a:ea typeface="微软雅黑" panose="020B0503020204020204" pitchFamily="34" charset="-122"/>
+                <a:cs typeface="微软雅黑" panose="020B0503020204020204" pitchFamily="34" charset="-120"/>
               </a:rPr>
               <a:t>•  </a:t>
             </a:r>
-            <a:pPr algn="l" indent="0" marL="0">
-              <a:lnSpc>
-                <a:spcPct val="115000"/>
-              </a:lnSpc>
-              <a:buNone/>
-            </a:pPr>
-            <a:r>
-              <a:rPr lang="en-US" sz="1800" dirty="0">
-                <a:solidFill>
-                  <a:srgbClr val="000000"/>
-                </a:solidFill>
-              </a:rPr>
-              <a:t>802 里串几乎不要求写代码，考的是 KMP 的 next、nextval 手算，和 BF 匹配返回什么</a:t>
-            </a:r>
-            <a:endParaRPr lang="en-US" sz="1800" dirty="0"/>
-          </a:p>
-        </p:txBody>
-      </p:sp>
-      <p:sp>
-        <p:nvSpPr>
-          <p:cNvPr id="7" name="Text 5"/>
-          <p:cNvSpPr/>
-          <p:nvPr/>
-        </p:nvSpPr>
-        <p:spPr>
-          <a:xfrm>
-            <a:off x="896112" y="3680460"/>
-            <a:ext cx="10454335" cy="740664"/>
-          </a:xfrm>
-          <a:prstGeom prst="rect">
-            <a:avLst/>
-          </a:prstGeom>
-          <a:noFill/>
-          <a:ln/>
-        </p:spPr>
-        <p:txBody>
-          <a:bodyPr wrap="square" rtlCol="0" anchor="t"/>
-          <a:lstStyle/>
-          <a:p>
-            <a:pPr algn="l" indent="0" marL="0">
-              <a:lnSpc>
-                <a:spcPct val="115000"/>
-              </a:lnSpc>
-              <a:buNone/>
-            </a:pPr>
-            <a:r>
-              <a:rPr lang="en-US" sz="1800" b="1" dirty="0">
-                <a:solidFill>
-                  <a:srgbClr val="1F4E9C"/>
-                </a:solidFill>
-                <a:latin typeface="微软雅黑" pitchFamily="34" charset="0"/>
-                <a:ea typeface="微软雅黑" pitchFamily="34" charset="-122"/>
-                <a:cs typeface="微软雅黑" pitchFamily="34" charset="-120"/>
-              </a:rPr>
-              <a:t>•  </a:t>
-            </a:r>
-            <a:pPr algn="l" indent="0" marL="0">
-              <a:lnSpc>
-                <a:spcPct val="115000"/>
-              </a:lnSpc>
-              <a:buNone/>
-            </a:pPr>
             <a:r>
               <a:rPr lang="en-US" sz="1800" dirty="0">
                 <a:solidFill>
@@ -7155,13 +6822,12 @@
             <a:avLst/>
           </a:prstGeom>
           <a:noFill/>
-          <a:ln/>
         </p:spPr>
         <p:txBody>
           <a:bodyPr wrap="square" rtlCol="0" anchor="t"/>
           <a:lstStyle/>
           <a:p>
-            <a:pPr algn="l" indent="0" marL="0">
+            <a:pPr marL="0" indent="0" algn="l">
               <a:buNone/>
             </a:pPr>
             <a:r>
@@ -7169,9 +6835,9 @@
                 <a:solidFill>
                   <a:srgbClr val="8A9099"/>
                 </a:solidFill>
-                <a:latin typeface="微软雅黑" pitchFamily="34" charset="0"/>
-                <a:ea typeface="微软雅黑" pitchFamily="34" charset="-122"/>
-                <a:cs typeface="微软雅黑" pitchFamily="34" charset="-120"/>
+                <a:latin typeface="微软雅黑" panose="020B0503020204020204" pitchFamily="34" charset="-122"/>
+                <a:ea typeface="微软雅黑" panose="020B0503020204020204" pitchFamily="34" charset="-122"/>
+                <a:cs typeface="微软雅黑" panose="020B0503020204020204" pitchFamily="34" charset="-120"/>
               </a:rPr>
               <a:t>所以这一节串重点讲 next 手算和 BF 思想，堆分配的几个操作只讲易错点；数组和广义表讲清下标换算</a:t>
             </a:r>
@@ -7189,7 +6855,7 @@
 
 <file path=ppt/slides/slide3.xml><?xml version="1.0" encoding="utf-8"?>
 <p:sld xmlns:a="http://schemas.openxmlformats.org/drawingml/2006/main" xmlns:r="http://schemas.openxmlformats.org/officeDocument/2006/relationships" xmlns:p="http://schemas.openxmlformats.org/presentationml/2006/main">
-  <p:cSld name="Slide 3">
+  <p:cSld>
     <p:bg>
       <p:bgPr>
         <a:blipFill dpi="0" rotWithShape="1">
@@ -7233,13 +6899,12 @@
             <a:avLst/>
           </a:prstGeom>
           <a:noFill/>
-          <a:ln/>
         </p:spPr>
         <p:txBody>
           <a:bodyPr wrap="square" rtlCol="0" anchor="ctr"/>
           <a:lstStyle/>
           <a:p>
-            <a:pPr algn="r" indent="0" marL="0">
+            <a:pPr marL="0" indent="0" algn="r">
               <a:buNone/>
             </a:pPr>
             <a:r>
@@ -7247,9 +6912,9 @@
                 <a:solidFill>
                   <a:srgbClr val="8A9099"/>
                 </a:solidFill>
-                <a:latin typeface="微软雅黑" pitchFamily="34" charset="0"/>
-                <a:ea typeface="微软雅黑" pitchFamily="34" charset="-122"/>
-                <a:cs typeface="微软雅黑" pitchFamily="34" charset="-120"/>
+                <a:latin typeface="微软雅黑" panose="020B0503020204020204" pitchFamily="34" charset="-122"/>
+                <a:ea typeface="微软雅黑" panose="020B0503020204020204" pitchFamily="34" charset="-122"/>
+                <a:cs typeface="微软雅黑" panose="020B0503020204020204" pitchFamily="34" charset="-120"/>
               </a:rPr>
               <a:t>3 / 16</a:t>
             </a:r>
@@ -7272,13 +6937,12 @@
             <a:avLst/>
           </a:prstGeom>
           <a:noFill/>
-          <a:ln/>
         </p:spPr>
         <p:txBody>
           <a:bodyPr wrap="square" rtlCol="0" anchor="ctr"/>
           <a:lstStyle/>
           <a:p>
-            <a:pPr algn="l" indent="0" marL="0">
+            <a:pPr marL="0" indent="0" algn="l">
               <a:buNone/>
             </a:pPr>
             <a:r>
@@ -7286,9 +6950,9 @@
                 <a:solidFill>
                   <a:srgbClr val="1F4E9C"/>
                 </a:solidFill>
-                <a:latin typeface="微软雅黑" pitchFamily="34" charset="0"/>
-                <a:ea typeface="微软雅黑" pitchFamily="34" charset="-122"/>
-                <a:cs typeface="微软雅黑" pitchFamily="34" charset="-120"/>
+                <a:latin typeface="微软雅黑" panose="020B0503020204020204" pitchFamily="34" charset="-122"/>
+                <a:ea typeface="微软雅黑" panose="020B0503020204020204" pitchFamily="34" charset="-122"/>
+                <a:cs typeface="微软雅黑" panose="020B0503020204020204" pitchFamily="34" charset="-120"/>
               </a:rPr>
               <a:t>串 · 存储</a:t>
             </a:r>
@@ -7311,13 +6975,12 @@
             <a:avLst/>
           </a:prstGeom>
           <a:noFill/>
-          <a:ln/>
         </p:spPr>
         <p:txBody>
           <a:bodyPr wrap="square" rtlCol="0" anchor="ctr"/>
           <a:lstStyle/>
           <a:p>
-            <a:pPr algn="l" indent="0" marL="0">
+            <a:pPr marL="0" indent="0" algn="l">
               <a:buNone/>
             </a:pPr>
             <a:r>
@@ -7325,9 +6988,9 @@
                 <a:solidFill>
                   <a:srgbClr val="1F2329"/>
                 </a:solidFill>
-                <a:latin typeface="微软雅黑" pitchFamily="34" charset="0"/>
-                <a:ea typeface="微软雅黑" pitchFamily="34" charset="-122"/>
-                <a:cs typeface="微软雅黑" pitchFamily="34" charset="-120"/>
+                <a:latin typeface="微软雅黑" panose="020B0503020204020204" pitchFamily="34" charset="-122"/>
+                <a:ea typeface="微软雅黑" panose="020B0503020204020204" pitchFamily="34" charset="-122"/>
+                <a:cs typeface="微软雅黑" panose="020B0503020204020204" pitchFamily="34" charset="-120"/>
               </a:rPr>
               <a:t>串的三种存储，一个必须记住的易错点</a:t>
             </a:r>
@@ -7352,7 +7015,6 @@
           <a:solidFill>
             <a:srgbClr val="F7F9FC"/>
           </a:solidFill>
-          <a:ln/>
         </p:spPr>
       </p:sp>
       <p:sp>
@@ -7372,7 +7034,6 @@
           <a:solidFill>
             <a:srgbClr val="1F4E9C"/>
           </a:solidFill>
-          <a:ln/>
         </p:spPr>
       </p:sp>
       <p:sp>
@@ -7390,13 +7051,12 @@
             <a:avLst/>
           </a:prstGeom>
           <a:noFill/>
-          <a:ln/>
         </p:spPr>
         <p:txBody>
           <a:bodyPr wrap="square" rtlCol="0" anchor="t"/>
           <a:lstStyle/>
           <a:p>
-            <a:pPr algn="l" indent="0" marL="0">
+            <a:pPr marL="0" indent="0" algn="l">
               <a:lnSpc>
                 <a:spcPct val="125000"/>
               </a:lnSpc>
@@ -7407,9 +7067,9 @@
                 <a:solidFill>
                   <a:srgbClr val="1F2329"/>
                 </a:solidFill>
-                <a:latin typeface="Consolas" pitchFamily="34" charset="0"/>
-                <a:ea typeface="Consolas" pitchFamily="34" charset="-122"/>
-                <a:cs typeface="Consolas" pitchFamily="34" charset="-120"/>
+                <a:latin typeface="Consolas" panose="020B0609020204030204" pitchFamily="34" charset="0"/>
+                <a:ea typeface="Consolas" panose="020B0609020204030204" pitchFamily="34" charset="-122"/>
+                <a:cs typeface="Consolas" panose="020B0609020204030204" pitchFamily="34" charset="-120"/>
               </a:rPr>
               <a:t>typedef struct{ char ch[MaxSize]; int length; }SString;  // 定长顺序存储
 typedef struct{ char *ch; int length; }String;           // 堆分配存储
@@ -7434,13 +7094,12 @@
             <a:avLst/>
           </a:prstGeom>
           <a:noFill/>
-          <a:ln/>
         </p:spPr>
         <p:txBody>
           <a:bodyPr wrap="square" rtlCol="0" anchor="t"/>
           <a:lstStyle/>
           <a:p>
-            <a:pPr algn="l" indent="0" marL="0">
+            <a:pPr marL="0" indent="0" algn="l">
               <a:lnSpc>
                 <a:spcPct val="115000"/>
               </a:lnSpc>
@@ -7451,25 +7110,68 @@
                 <a:solidFill>
                   <a:srgbClr val="1F4E9C"/>
                 </a:solidFill>
-                <a:latin typeface="微软雅黑" pitchFamily="34" charset="0"/>
-                <a:ea typeface="微软雅黑" pitchFamily="34" charset="-122"/>
-                <a:cs typeface="微软雅黑" pitchFamily="34" charset="-120"/>
+                <a:latin typeface="微软雅黑" panose="020B0503020204020204" pitchFamily="34" charset="-122"/>
+                <a:ea typeface="微软雅黑" panose="020B0503020204020204" pitchFamily="34" charset="-122"/>
+                <a:cs typeface="微软雅黑" panose="020B0503020204020204" pitchFamily="34" charset="-120"/>
               </a:rPr>
               <a:t>•  </a:t>
             </a:r>
-            <a:pPr algn="l" indent="0" marL="0">
+            <a:r>
+              <a:rPr lang="en-US" sz="1800" dirty="0">
+                <a:solidFill>
+                  <a:srgbClr val="000000"/>
+                </a:solidFill>
+              </a:rPr>
+              <a:t>定长存储 ch 是数组，堆分配 ch 是指针、要 malloc；本节四个操作都基于堆分配这种</a:t>
+            </a:r>
+            <a:endParaRPr lang="en-US" sz="1800" dirty="0"/>
+          </a:p>
+        </p:txBody>
+      </p:sp>
+      <p:sp>
+        <p:nvSpPr>
+          <p:cNvPr id="9" name="Text 7"/>
+          <p:cNvSpPr/>
+          <p:nvPr/>
+        </p:nvSpPr>
+        <p:spPr>
+          <a:xfrm>
+            <a:off x="896112" y="4443984"/>
+            <a:ext cx="10454335" cy="397764"/>
+          </a:xfrm>
+          <a:prstGeom prst="rect">
+            <a:avLst/>
+          </a:prstGeom>
+          <a:noFill/>
+        </p:spPr>
+        <p:txBody>
+          <a:bodyPr wrap="square" rtlCol="0" anchor="t"/>
+          <a:lstStyle/>
+          <a:p>
+            <a:pPr marL="0" indent="0" algn="l">
               <a:lnSpc>
                 <a:spcPct val="115000"/>
               </a:lnSpc>
               <a:buNone/>
             </a:pPr>
             <a:r>
+              <a:rPr lang="en-US" sz="1800" b="1" dirty="0">
+                <a:solidFill>
+                  <a:srgbClr val="1F4E9C"/>
+                </a:solidFill>
+                <a:latin typeface="微软雅黑" panose="020B0503020204020204" pitchFamily="34" charset="-122"/>
+                <a:ea typeface="微软雅黑" panose="020B0503020204020204" pitchFamily="34" charset="-122"/>
+                <a:cs typeface="微软雅黑" panose="020B0503020204020204" pitchFamily="34" charset="-120"/>
+              </a:rPr>
+              <a:t>•  </a:t>
+            </a:r>
+            <a:r>
               <a:rPr lang="en-US" sz="1800" dirty="0">
                 <a:solidFill>
                   <a:srgbClr val="000000"/>
                 </a:solidFill>
               </a:rPr>
-              <a:t>定长存储 ch 是数组，堆分配 ch 是指针、要 malloc；本节四个操作都基于堆分配这种</a:t>
+              <a:t>易错点：两种定义不能混用。定长的 ch 是数组，不能 free、也不能赋 NULL</a:t>
             </a:r>
             <a:endParaRPr lang="en-US" sz="1800" dirty="0"/>
           </a:p>
@@ -7477,26 +7179,25 @@
       </p:sp>
       <p:sp>
         <p:nvSpPr>
-          <p:cNvPr id="9" name="Text 7"/>
+          <p:cNvPr id="10" name="Text 8"/>
           <p:cNvSpPr/>
           <p:nvPr/>
         </p:nvSpPr>
         <p:spPr>
           <a:xfrm>
-            <a:off x="896112" y="4443984"/>
-            <a:ext cx="10454335" cy="397764"/>
+            <a:off x="896112" y="4914900"/>
+            <a:ext cx="10454335" cy="740664"/>
           </a:xfrm>
           <a:prstGeom prst="rect">
             <a:avLst/>
           </a:prstGeom>
           <a:noFill/>
-          <a:ln/>
         </p:spPr>
         <p:txBody>
           <a:bodyPr wrap="square" rtlCol="0" anchor="t"/>
           <a:lstStyle/>
           <a:p>
-            <a:pPr algn="l" indent="0" marL="0">
+            <a:pPr marL="0" indent="0" algn="l">
               <a:lnSpc>
                 <a:spcPct val="115000"/>
               </a:lnSpc>
@@ -7507,74 +7208,12 @@
                 <a:solidFill>
                   <a:srgbClr val="1F4E9C"/>
                 </a:solidFill>
-                <a:latin typeface="微软雅黑" pitchFamily="34" charset="0"/>
-                <a:ea typeface="微软雅黑" pitchFamily="34" charset="-122"/>
-                <a:cs typeface="微软雅黑" pitchFamily="34" charset="-120"/>
+                <a:latin typeface="微软雅黑" panose="020B0503020204020204" pitchFamily="34" charset="-122"/>
+                <a:ea typeface="微软雅黑" panose="020B0503020204020204" pitchFamily="34" charset="-122"/>
+                <a:cs typeface="微软雅黑" panose="020B0503020204020204" pitchFamily="34" charset="-120"/>
               </a:rPr>
               <a:t>•  </a:t>
             </a:r>
-            <a:pPr algn="l" indent="0" marL="0">
-              <a:lnSpc>
-                <a:spcPct val="115000"/>
-              </a:lnSpc>
-              <a:buNone/>
-            </a:pPr>
-            <a:r>
-              <a:rPr lang="en-US" sz="1800" dirty="0">
-                <a:solidFill>
-                  <a:srgbClr val="000000"/>
-                </a:solidFill>
-              </a:rPr>
-              <a:t>易错点：两种定义不能混用。定长的 ch 是数组，不能 free、也不能赋 NULL</a:t>
-            </a:r>
-            <a:endParaRPr lang="en-US" sz="1800" dirty="0"/>
-          </a:p>
-        </p:txBody>
-      </p:sp>
-      <p:sp>
-        <p:nvSpPr>
-          <p:cNvPr id="10" name="Text 8"/>
-          <p:cNvSpPr/>
-          <p:nvPr/>
-        </p:nvSpPr>
-        <p:spPr>
-          <a:xfrm>
-            <a:off x="896112" y="4914900"/>
-            <a:ext cx="10454335" cy="740664"/>
-          </a:xfrm>
-          <a:prstGeom prst="rect">
-            <a:avLst/>
-          </a:prstGeom>
-          <a:noFill/>
-          <a:ln/>
-        </p:spPr>
-        <p:txBody>
-          <a:bodyPr wrap="square" rtlCol="0" anchor="t"/>
-          <a:lstStyle/>
-          <a:p>
-            <a:pPr algn="l" indent="0" marL="0">
-              <a:lnSpc>
-                <a:spcPct val="115000"/>
-              </a:lnSpc>
-              <a:buNone/>
-            </a:pPr>
-            <a:r>
-              <a:rPr lang="en-US" sz="1800" b="1" dirty="0">
-                <a:solidFill>
-                  <a:srgbClr val="1F4E9C"/>
-                </a:solidFill>
-                <a:latin typeface="微软雅黑" pitchFamily="34" charset="0"/>
-                <a:ea typeface="微软雅黑" pitchFamily="34" charset="-122"/>
-                <a:cs typeface="微软雅黑" pitchFamily="34" charset="-120"/>
-              </a:rPr>
-              <a:t>•  </a:t>
-            </a:r>
-            <a:pPr algn="l" indent="0" marL="0">
-              <a:lnSpc>
-                <a:spcPct val="115000"/>
-              </a:lnSpc>
-              <a:buNone/>
-            </a:pPr>
             <a:r>
               <a:rPr lang="en-US" sz="1800" dirty="0">
                 <a:solidFill>
@@ -7597,7 +7236,7 @@
 
 <file path=ppt/slides/slide4.xml><?xml version="1.0" encoding="utf-8"?>
 <p:sld xmlns:a="http://schemas.openxmlformats.org/drawingml/2006/main" xmlns:r="http://schemas.openxmlformats.org/officeDocument/2006/relationships" xmlns:p="http://schemas.openxmlformats.org/presentationml/2006/main">
-  <p:cSld name="Slide 4">
+  <p:cSld>
     <p:bg>
       <p:bgPr>
         <a:blipFill dpi="0" rotWithShape="1">
@@ -7641,13 +7280,12 @@
             <a:avLst/>
           </a:prstGeom>
           <a:noFill/>
-          <a:ln/>
         </p:spPr>
         <p:txBody>
           <a:bodyPr wrap="square" rtlCol="0" anchor="ctr"/>
           <a:lstStyle/>
           <a:p>
-            <a:pPr algn="r" indent="0" marL="0">
+            <a:pPr marL="0" indent="0" algn="r">
               <a:buNone/>
             </a:pPr>
             <a:r>
@@ -7655,9 +7293,9 @@
                 <a:solidFill>
                   <a:srgbClr val="8A9099"/>
                 </a:solidFill>
-                <a:latin typeface="微软雅黑" pitchFamily="34" charset="0"/>
-                <a:ea typeface="微软雅黑" pitchFamily="34" charset="-122"/>
-                <a:cs typeface="微软雅黑" pitchFamily="34" charset="-120"/>
+                <a:latin typeface="微软雅黑" panose="020B0503020204020204" pitchFamily="34" charset="-122"/>
+                <a:ea typeface="微软雅黑" panose="020B0503020204020204" pitchFamily="34" charset="-122"/>
+                <a:cs typeface="微软雅黑" panose="020B0503020204020204" pitchFamily="34" charset="-120"/>
               </a:rPr>
               <a:t>4 / 16</a:t>
             </a:r>
@@ -7680,13 +7318,12 @@
             <a:avLst/>
           </a:prstGeom>
           <a:noFill/>
-          <a:ln/>
         </p:spPr>
         <p:txBody>
           <a:bodyPr wrap="square" rtlCol="0" anchor="ctr"/>
           <a:lstStyle/>
           <a:p>
-            <a:pPr algn="l" indent="0" marL="0">
+            <a:pPr marL="0" indent="0" algn="l">
               <a:buNone/>
             </a:pPr>
             <a:r>
@@ -7694,9 +7331,9 @@
                 <a:solidFill>
                   <a:srgbClr val="1F4E9C"/>
                 </a:solidFill>
-                <a:latin typeface="微软雅黑" pitchFamily="34" charset="0"/>
-                <a:ea typeface="微软雅黑" pitchFamily="34" charset="-122"/>
-                <a:cs typeface="微软雅黑" pitchFamily="34" charset="-120"/>
+                <a:latin typeface="微软雅黑" panose="020B0503020204020204" pitchFamily="34" charset="-122"/>
+                <a:ea typeface="微软雅黑" panose="020B0503020204020204" pitchFamily="34" charset="-122"/>
+                <a:cs typeface="微软雅黑" panose="020B0503020204020204" pitchFamily="34" charset="-120"/>
               </a:rPr>
               <a:t>串 · 堆分配操作</a:t>
             </a:r>
@@ -7719,13 +7356,12 @@
             <a:avLst/>
           </a:prstGeom>
           <a:noFill/>
-          <a:ln/>
         </p:spPr>
         <p:txBody>
           <a:bodyPr wrap="square" rtlCol="0" anchor="ctr"/>
           <a:lstStyle/>
           <a:p>
-            <a:pPr algn="l" indent="0" marL="0">
+            <a:pPr marL="0" indent="0" algn="l">
               <a:buNone/>
             </a:pPr>
             <a:r>
@@ -7733,9 +7369,9 @@
                 <a:solidFill>
                   <a:srgbClr val="1F2329"/>
                 </a:solidFill>
-                <a:latin typeface="微软雅黑" pitchFamily="34" charset="0"/>
-                <a:ea typeface="微软雅黑" pitchFamily="34" charset="-122"/>
-                <a:cs typeface="微软雅黑" pitchFamily="34" charset="-120"/>
+                <a:latin typeface="微软雅黑" panose="020B0503020204020204" pitchFamily="34" charset="-122"/>
+                <a:ea typeface="微软雅黑" panose="020B0503020204020204" pitchFamily="34" charset="-122"/>
+                <a:cs typeface="微软雅黑" panose="020B0503020204020204" pitchFamily="34" charset="-120"/>
               </a:rPr>
               <a:t>strassign：两个数字 len+1 和 i&lt;=len</a:t>
             </a:r>
@@ -7760,7 +7396,6 @@
           <a:solidFill>
             <a:srgbClr val="F7F9FC"/>
           </a:solidFill>
-          <a:ln/>
         </p:spPr>
       </p:sp>
       <p:sp>
@@ -7780,7 +7415,6 @@
           <a:solidFill>
             <a:srgbClr val="1F4E9C"/>
           </a:solidFill>
-          <a:ln/>
         </p:spPr>
       </p:sp>
       <p:sp>
@@ -7798,13 +7432,12 @@
             <a:avLst/>
           </a:prstGeom>
           <a:noFill/>
-          <a:ln/>
         </p:spPr>
         <p:txBody>
           <a:bodyPr wrap="square" rtlCol="0" anchor="t"/>
           <a:lstStyle/>
           <a:p>
-            <a:pPr algn="l" indent="0" marL="0">
+            <a:pPr marL="0" indent="0" algn="l">
               <a:lnSpc>
                 <a:spcPct val="125000"/>
               </a:lnSpc>
@@ -7815,9 +7448,9 @@
                 <a:solidFill>
                   <a:srgbClr val="1F2329"/>
                 </a:solidFill>
-                <a:latin typeface="Consolas" pitchFamily="34" charset="0"/>
-                <a:ea typeface="Consolas" pitchFamily="34" charset="-122"/>
-                <a:cs typeface="Consolas" pitchFamily="34" charset="-120"/>
+                <a:latin typeface="Consolas" panose="020B0609020204030204" pitchFamily="34" charset="0"/>
+                <a:ea typeface="Consolas" panose="020B0609020204030204" pitchFamily="34" charset="-122"/>
+                <a:cs typeface="Consolas" panose="020B0609020204030204" pitchFamily="34" charset="-120"/>
               </a:rPr>
               <a:t>int strassign(String &amp;str, char *ch){
     if(str.ch){ free(str.ch); str.ch = NULL; }     // free 后置 NULL
@@ -7850,13 +7483,12 @@
             <a:avLst/>
           </a:prstGeom>
           <a:noFill/>
-          <a:ln/>
         </p:spPr>
         <p:txBody>
           <a:bodyPr wrap="square" rtlCol="0" anchor="t"/>
           <a:lstStyle/>
           <a:p>
-            <a:pPr algn="l" indent="0" marL="0">
+            <a:pPr marL="0" indent="0" algn="l">
               <a:buNone/>
             </a:pPr>
             <a:r>
@@ -7864,9 +7496,9 @@
                 <a:solidFill>
                   <a:srgbClr val="8A9099"/>
                 </a:solidFill>
-                <a:latin typeface="微软雅黑" pitchFamily="34" charset="0"/>
-                <a:ea typeface="微软雅黑" pitchFamily="34" charset="-122"/>
-                <a:cs typeface="微软雅黑" pitchFamily="34" charset="-120"/>
+                <a:latin typeface="微软雅黑" panose="020B0503020204020204" pitchFamily="34" charset="-122"/>
+                <a:ea typeface="微软雅黑" panose="020B0503020204020204" pitchFamily="34" charset="-122"/>
+                <a:cs typeface="微软雅黑" panose="020B0503020204020204" pitchFamily="34" charset="-120"/>
               </a:rPr>
               <a:t>两个数字要记牢：申请 len+1 是留给结束符 '\0'；循环写到 i&lt;=len 是为了把 '\0' 也拷过去</a:t>
             </a:r>
@@ -7884,7 +7516,7 @@
 
 <file path=ppt/slides/slide5.xml><?xml version="1.0" encoding="utf-8"?>
 <p:sld xmlns:a="http://schemas.openxmlformats.org/drawingml/2006/main" xmlns:r="http://schemas.openxmlformats.org/officeDocument/2006/relationships" xmlns:p="http://schemas.openxmlformats.org/presentationml/2006/main">
-  <p:cSld name="Slide 5">
+  <p:cSld>
     <p:bg>
       <p:bgPr>
         <a:blipFill dpi="0" rotWithShape="1">
@@ -7928,13 +7560,12 @@
             <a:avLst/>
           </a:prstGeom>
           <a:noFill/>
-          <a:ln/>
         </p:spPr>
         <p:txBody>
           <a:bodyPr wrap="square" rtlCol="0" anchor="ctr"/>
           <a:lstStyle/>
           <a:p>
-            <a:pPr algn="r" indent="0" marL="0">
+            <a:pPr marL="0" indent="0" algn="r">
               <a:buNone/>
             </a:pPr>
             <a:r>
@@ -7942,9 +7573,9 @@
                 <a:solidFill>
                   <a:srgbClr val="8A9099"/>
                 </a:solidFill>
-                <a:latin typeface="微软雅黑" pitchFamily="34" charset="0"/>
-                <a:ea typeface="微软雅黑" pitchFamily="34" charset="-122"/>
-                <a:cs typeface="微软雅黑" pitchFamily="34" charset="-120"/>
+                <a:latin typeface="微软雅黑" panose="020B0503020204020204" pitchFamily="34" charset="-122"/>
+                <a:ea typeface="微软雅黑" panose="020B0503020204020204" pitchFamily="34" charset="-122"/>
+                <a:cs typeface="微软雅黑" panose="020B0503020204020204" pitchFamily="34" charset="-120"/>
               </a:rPr>
               <a:t>5 / 16</a:t>
             </a:r>
@@ -7967,13 +7598,12 @@
             <a:avLst/>
           </a:prstGeom>
           <a:noFill/>
-          <a:ln/>
         </p:spPr>
         <p:txBody>
           <a:bodyPr wrap="square" rtlCol="0" anchor="ctr"/>
           <a:lstStyle/>
           <a:p>
-            <a:pPr algn="l" indent="0" marL="0">
+            <a:pPr marL="0" indent="0" algn="l">
               <a:buNone/>
             </a:pPr>
             <a:r>
@@ -7981,9 +7611,9 @@
                 <a:solidFill>
                   <a:srgbClr val="1F4E9C"/>
                 </a:solidFill>
-                <a:latin typeface="微软雅黑" pitchFamily="34" charset="0"/>
-                <a:ea typeface="微软雅黑" pitchFamily="34" charset="-122"/>
-                <a:cs typeface="微软雅黑" pitchFamily="34" charset="-120"/>
+                <a:latin typeface="微软雅黑" panose="020B0503020204020204" pitchFamily="34" charset="-122"/>
+                <a:ea typeface="微软雅黑" panose="020B0503020204020204" pitchFamily="34" charset="-122"/>
+                <a:cs typeface="微软雅黑" panose="020B0503020204020204" pitchFamily="34" charset="-120"/>
               </a:rPr>
               <a:t>串 · 其余操作</a:t>
             </a:r>
@@ -8006,13 +7636,12 @@
             <a:avLst/>
           </a:prstGeom>
           <a:noFill/>
-          <a:ln/>
         </p:spPr>
         <p:txBody>
           <a:bodyPr wrap="square" rtlCol="0" anchor="ctr"/>
           <a:lstStyle/>
           <a:p>
-            <a:pPr algn="l" indent="0" marL="0">
+            <a:pPr marL="0" indent="0" algn="l">
               <a:buNone/>
             </a:pPr>
             <a:r>
@@ -8020,9 +7649,9 @@
                 <a:solidFill>
                   <a:srgbClr val="1F2329"/>
                 </a:solidFill>
-                <a:latin typeface="微软雅黑" pitchFamily="34" charset="0"/>
-                <a:ea typeface="微软雅黑" pitchFamily="34" charset="-122"/>
-                <a:cs typeface="微软雅黑" pitchFamily="34" charset="-120"/>
+                <a:latin typeface="微软雅黑" panose="020B0503020204020204" pitchFamily="34" charset="-122"/>
+                <a:ea typeface="微软雅黑" panose="020B0503020204020204" pitchFamily="34" charset="-122"/>
+                <a:cs typeface="微软雅黑" panose="020B0503020204020204" pitchFamily="34" charset="-120"/>
               </a:rPr>
               <a:t>strcompare、concat、substring 的易错点</a:t>
             </a:r>
@@ -8047,7 +7676,6 @@
           <a:solidFill>
             <a:srgbClr val="F7F9FC"/>
           </a:solidFill>
-          <a:ln/>
         </p:spPr>
       </p:sp>
       <p:sp>
@@ -8067,7 +7695,6 @@
           <a:solidFill>
             <a:srgbClr val="1F4E9C"/>
           </a:solidFill>
-          <a:ln/>
         </p:spPr>
       </p:sp>
       <p:sp>
@@ -8085,13 +7712,12 @@
             <a:avLst/>
           </a:prstGeom>
           <a:noFill/>
-          <a:ln/>
         </p:spPr>
         <p:txBody>
           <a:bodyPr wrap="square" rtlCol="0" anchor="t"/>
           <a:lstStyle/>
           <a:p>
-            <a:pPr algn="l" indent="0" marL="0">
+            <a:pPr marL="0" indent="0" algn="l">
               <a:lnSpc>
                 <a:spcPct val="125000"/>
               </a:lnSpc>
@@ -8102,9 +7728,9 @@
                 <a:solidFill>
                   <a:srgbClr val="1F2329"/>
                 </a:solidFill>
-                <a:latin typeface="Consolas" pitchFamily="34" charset="0"/>
-                <a:ea typeface="Consolas" pitchFamily="34" charset="-122"/>
-                <a:cs typeface="Consolas" pitchFamily="34" charset="-120"/>
+                <a:latin typeface="Consolas" panose="020B0609020204030204" pitchFamily="34" charset="0"/>
+                <a:ea typeface="Consolas" panose="020B0609020204030204" pitchFamily="34" charset="-122"/>
+                <a:cs typeface="Consolas" panose="020B0609020204030204" pitchFamily="34" charset="-120"/>
               </a:rPr>
               <a:t>bool strcompare(String s1, String s2){
     for(int i = 0; i &lt; s1.length &amp;&amp; i &lt; s2.length; i++)
@@ -8132,13 +7758,12 @@
             <a:avLst/>
           </a:prstGeom>
           <a:noFill/>
-          <a:ln/>
         </p:spPr>
         <p:txBody>
           <a:bodyPr wrap="square" rtlCol="0" anchor="t"/>
           <a:lstStyle/>
           <a:p>
-            <a:pPr algn="l" indent="0" marL="0">
+            <a:pPr marL="0" indent="0" algn="l">
               <a:lnSpc>
                 <a:spcPct val="115000"/>
               </a:lnSpc>
@@ -8149,25 +7774,68 @@
                 <a:solidFill>
                   <a:srgbClr val="1F4E9C"/>
                 </a:solidFill>
-                <a:latin typeface="微软雅黑" pitchFamily="34" charset="0"/>
-                <a:ea typeface="微软雅黑" pitchFamily="34" charset="-122"/>
-                <a:cs typeface="微软雅黑" pitchFamily="34" charset="-120"/>
+                <a:latin typeface="微软雅黑" panose="020B0503020204020204" pitchFamily="34" charset="-122"/>
+                <a:ea typeface="微软雅黑" panose="020B0503020204020204" pitchFamily="34" charset="-122"/>
+                <a:cs typeface="微软雅黑" panose="020B0503020204020204" pitchFamily="34" charset="-120"/>
               </a:rPr>
               <a:t>•  </a:t>
             </a:r>
-            <a:pPr algn="l" indent="0" marL="0">
+            <a:r>
+              <a:rPr lang="en-US" sz="1500" dirty="0">
+                <a:solidFill>
+                  <a:srgbClr val="000000"/>
+                </a:solidFill>
+              </a:rPr>
+              <a:t>strcompare 名字叫比较，其实是判等：遇第一个不同字符就 false，最后比长度；它不返回大小关系</a:t>
+            </a:r>
+            <a:endParaRPr lang="en-US" sz="1500" dirty="0"/>
+          </a:p>
+        </p:txBody>
+      </p:sp>
+      <p:sp>
+        <p:nvSpPr>
+          <p:cNvPr id="9" name="Text 7"/>
+          <p:cNvSpPr/>
+          <p:nvPr/>
+        </p:nvSpPr>
+        <p:spPr>
+          <a:xfrm>
+            <a:off x="896112" y="4807785"/>
+            <a:ext cx="10454335" cy="626364"/>
+          </a:xfrm>
+          <a:prstGeom prst="rect">
+            <a:avLst/>
+          </a:prstGeom>
+          <a:noFill/>
+        </p:spPr>
+        <p:txBody>
+          <a:bodyPr wrap="square" rtlCol="0" anchor="t"/>
+          <a:lstStyle/>
+          <a:p>
+            <a:pPr marL="0" indent="0" algn="l">
               <a:lnSpc>
                 <a:spcPct val="115000"/>
               </a:lnSpc>
               <a:buNone/>
             </a:pPr>
             <a:r>
+              <a:rPr lang="en-US" sz="1500" b="1" dirty="0">
+                <a:solidFill>
+                  <a:srgbClr val="1F4E9C"/>
+                </a:solidFill>
+                <a:latin typeface="微软雅黑" panose="020B0503020204020204" pitchFamily="34" charset="-122"/>
+                <a:ea typeface="微软雅黑" panose="020B0503020204020204" pitchFamily="34" charset="-122"/>
+                <a:cs typeface="微软雅黑" panose="020B0503020204020204" pitchFamily="34" charset="-120"/>
+              </a:rPr>
+              <a:t>•  </a:t>
+            </a:r>
+            <a:r>
               <a:rPr lang="en-US" sz="1500" dirty="0">
                 <a:solidFill>
                   <a:srgbClr val="000000"/>
                 </a:solidFill>
               </a:rPr>
-              <a:t>strcompare 名字叫比较，其实是判等：遇第一个不同字符就 false，最后比长度；它不返回大小关系</a:t>
+              <a:t>concat 拼接申请 len1+len2+1，第一个循环拷 str1 有效字符（不拷它的 '\0'），第二个循环多拷一个把 str2 的 '\0' 当结果结束符</a:t>
             </a:r>
             <a:endParaRPr lang="en-US" sz="1500" dirty="0"/>
           </a:p>
@@ -8175,26 +7843,25 @@
       </p:sp>
       <p:sp>
         <p:nvSpPr>
-          <p:cNvPr id="9" name="Text 7"/>
+          <p:cNvPr id="10" name="Text 8"/>
           <p:cNvSpPr/>
           <p:nvPr/>
         </p:nvSpPr>
         <p:spPr>
           <a:xfrm>
-            <a:off x="896112" y="4807785"/>
-            <a:ext cx="10454335" cy="626364"/>
+            <a:off x="896112" y="5507301"/>
+            <a:ext cx="10454335" cy="340614"/>
           </a:xfrm>
           <a:prstGeom prst="rect">
             <a:avLst/>
           </a:prstGeom>
           <a:noFill/>
-          <a:ln/>
         </p:spPr>
         <p:txBody>
           <a:bodyPr wrap="square" rtlCol="0" anchor="t"/>
           <a:lstStyle/>
           <a:p>
-            <a:pPr algn="l" indent="0" marL="0">
+            <a:pPr marL="0" indent="0" algn="l">
               <a:lnSpc>
                 <a:spcPct val="115000"/>
               </a:lnSpc>
@@ -8205,74 +7872,12 @@
                 <a:solidFill>
                   <a:srgbClr val="1F4E9C"/>
                 </a:solidFill>
-                <a:latin typeface="微软雅黑" pitchFamily="34" charset="0"/>
-                <a:ea typeface="微软雅黑" pitchFamily="34" charset="-122"/>
-                <a:cs typeface="微软雅黑" pitchFamily="34" charset="-120"/>
+                <a:latin typeface="微软雅黑" panose="020B0503020204020204" pitchFamily="34" charset="-122"/>
+                <a:ea typeface="微软雅黑" panose="020B0503020204020204" pitchFamily="34" charset="-122"/>
+                <a:cs typeface="微软雅黑" panose="020B0503020204020204" pitchFamily="34" charset="-120"/>
               </a:rPr>
               <a:t>•  </a:t>
             </a:r>
-            <a:pPr algn="l" indent="0" marL="0">
-              <a:lnSpc>
-                <a:spcPct val="115000"/>
-              </a:lnSpc>
-              <a:buNone/>
-            </a:pPr>
-            <a:r>
-              <a:rPr lang="en-US" sz="1500" dirty="0">
-                <a:solidFill>
-                  <a:srgbClr val="000000"/>
-                </a:solidFill>
-              </a:rPr>
-              <a:t>concat 拼接申请 len1+len2+1，第一个循环拷 str1 有效字符（不拷它的 '\0'），第二个循环多拷一个把 str2 的 '\0' 当结果结束符</a:t>
-            </a:r>
-            <a:endParaRPr lang="en-US" sz="1500" dirty="0"/>
-          </a:p>
-        </p:txBody>
-      </p:sp>
-      <p:sp>
-        <p:nvSpPr>
-          <p:cNvPr id="10" name="Text 8"/>
-          <p:cNvSpPr/>
-          <p:nvPr/>
-        </p:nvSpPr>
-        <p:spPr>
-          <a:xfrm>
-            <a:off x="896112" y="5507301"/>
-            <a:ext cx="10454335" cy="340614"/>
-          </a:xfrm>
-          <a:prstGeom prst="rect">
-            <a:avLst/>
-          </a:prstGeom>
-          <a:noFill/>
-          <a:ln/>
-        </p:spPr>
-        <p:txBody>
-          <a:bodyPr wrap="square" rtlCol="0" anchor="t"/>
-          <a:lstStyle/>
-          <a:p>
-            <a:pPr algn="l" indent="0" marL="0">
-              <a:lnSpc>
-                <a:spcPct val="115000"/>
-              </a:lnSpc>
-              <a:buNone/>
-            </a:pPr>
-            <a:r>
-              <a:rPr lang="en-US" sz="1500" b="1" dirty="0">
-                <a:solidFill>
-                  <a:srgbClr val="1F4E9C"/>
-                </a:solidFill>
-                <a:latin typeface="微软雅黑" pitchFamily="34" charset="0"/>
-                <a:ea typeface="微软雅黑" pitchFamily="34" charset="-122"/>
-                <a:cs typeface="微软雅黑" pitchFamily="34" charset="-120"/>
-              </a:rPr>
-              <a:t>•  </a:t>
-            </a:r>
-            <a:pPr algn="l" indent="0" marL="0">
-              <a:lnSpc>
-                <a:spcPct val="115000"/>
-              </a:lnSpc>
-              <a:buNone/>
-            </a:pPr>
             <a:r>
               <a:rPr lang="en-US" sz="1500" dirty="0">
                 <a:solidFill>
@@ -8295,7 +7900,7 @@
 
 <file path=ppt/slides/slide6.xml><?xml version="1.0" encoding="utf-8"?>
 <p:sld xmlns:a="http://schemas.openxmlformats.org/drawingml/2006/main" xmlns:r="http://schemas.openxmlformats.org/officeDocument/2006/relationships" xmlns:p="http://schemas.openxmlformats.org/presentationml/2006/main">
-  <p:cSld name="Slide 6">
+  <p:cSld>
     <p:bg>
       <p:bgPr>
         <a:blipFill dpi="0" rotWithShape="1">
@@ -8339,13 +7944,12 @@
             <a:avLst/>
           </a:prstGeom>
           <a:noFill/>
-          <a:ln/>
         </p:spPr>
         <p:txBody>
           <a:bodyPr wrap="square" rtlCol="0" anchor="ctr"/>
           <a:lstStyle/>
           <a:p>
-            <a:pPr algn="r" indent="0" marL="0">
+            <a:pPr marL="0" indent="0" algn="r">
               <a:buNone/>
             </a:pPr>
             <a:r>
@@ -8353,9 +7957,9 @@
                 <a:solidFill>
                   <a:srgbClr val="8A9099"/>
                 </a:solidFill>
-                <a:latin typeface="微软雅黑" pitchFamily="34" charset="0"/>
-                <a:ea typeface="微软雅黑" pitchFamily="34" charset="-122"/>
-                <a:cs typeface="微软雅黑" pitchFamily="34" charset="-120"/>
+                <a:latin typeface="微软雅黑" panose="020B0503020204020204" pitchFamily="34" charset="-122"/>
+                <a:ea typeface="微软雅黑" panose="020B0503020204020204" pitchFamily="34" charset="-122"/>
+                <a:cs typeface="微软雅黑" panose="020B0503020204020204" pitchFamily="34" charset="-120"/>
               </a:rPr>
               <a:t>6 / 16</a:t>
             </a:r>
@@ -8378,13 +7982,12 @@
             <a:avLst/>
           </a:prstGeom>
           <a:noFill/>
-          <a:ln/>
         </p:spPr>
         <p:txBody>
           <a:bodyPr wrap="square" rtlCol="0" anchor="ctr"/>
           <a:lstStyle/>
           <a:p>
-            <a:pPr algn="l" indent="0" marL="0">
+            <a:pPr marL="0" indent="0" algn="l">
               <a:buNone/>
             </a:pPr>
             <a:r>
@@ -8392,9 +7995,9 @@
                 <a:solidFill>
                   <a:srgbClr val="1F4E9C"/>
                 </a:solidFill>
-                <a:latin typeface="微软雅黑" pitchFamily="34" charset="0"/>
-                <a:ea typeface="微软雅黑" pitchFamily="34" charset="-122"/>
-                <a:cs typeface="微软雅黑" pitchFamily="34" charset="-120"/>
+                <a:latin typeface="微软雅黑" panose="020B0503020204020204" pitchFamily="34" charset="-122"/>
+                <a:ea typeface="微软雅黑" panose="020B0503020204020204" pitchFamily="34" charset="-122"/>
+                <a:cs typeface="微软雅黑" panose="020B0503020204020204" pitchFamily="34" charset="-120"/>
               </a:rPr>
               <a:t>串 · BF 匹配</a:t>
             </a:r>
@@ -8417,13 +8020,12 @@
             <a:avLst/>
           </a:prstGeom>
           <a:noFill/>
-          <a:ln/>
         </p:spPr>
         <p:txBody>
           <a:bodyPr wrap="square" rtlCol="0" anchor="ctr"/>
           <a:lstStyle/>
           <a:p>
-            <a:pPr algn="l" indent="0" marL="0">
+            <a:pPr marL="0" indent="0" algn="l">
               <a:buNone/>
             </a:pPr>
             <a:r>
@@ -8431,9 +8033,9 @@
                 <a:solidFill>
                   <a:srgbClr val="1F2329"/>
                 </a:solidFill>
-                <a:latin typeface="微软雅黑" pitchFamily="34" charset="0"/>
-                <a:ea typeface="微软雅黑" pitchFamily="34" charset="-122"/>
-                <a:cs typeface="微软雅黑" pitchFamily="34" charset="-120"/>
+                <a:latin typeface="微软雅黑" panose="020B0503020204020204" pitchFamily="34" charset="-122"/>
+                <a:ea typeface="微软雅黑" panose="020B0503020204020204" pitchFamily="34" charset="-122"/>
+                <a:cs typeface="微软雅黑" panose="020B0503020204020204" pitchFamily="34" charset="-120"/>
               </a:rPr>
               <a:t>BF 匹配：i、j、k 三个指针各干什么</a:t>
             </a:r>
@@ -8458,7 +8060,6 @@
           <a:solidFill>
             <a:srgbClr val="F7F9FC"/>
           </a:solidFill>
-          <a:ln/>
         </p:spPr>
       </p:sp>
       <p:sp>
@@ -8478,7 +8079,6 @@
           <a:solidFill>
             <a:srgbClr val="1F4E9C"/>
           </a:solidFill>
-          <a:ln/>
         </p:spPr>
       </p:sp>
       <p:sp>
@@ -8496,13 +8096,12 @@
             <a:avLst/>
           </a:prstGeom>
           <a:noFill/>
-          <a:ln/>
         </p:spPr>
         <p:txBody>
           <a:bodyPr wrap="square" rtlCol="0" anchor="t"/>
           <a:lstStyle/>
           <a:p>
-            <a:pPr algn="l" indent="0" marL="0">
+            <a:pPr marL="0" indent="0" algn="l">
               <a:lnSpc>
                 <a:spcPct val="125000"/>
               </a:lnSpc>
@@ -8513,9 +8112,9 @@
                 <a:solidFill>
                   <a:srgbClr val="1F2329"/>
                 </a:solidFill>
-                <a:latin typeface="Consolas" pitchFamily="34" charset="0"/>
-                <a:ea typeface="Consolas" pitchFamily="34" charset="-122"/>
-                <a:cs typeface="Consolas" pitchFamily="34" charset="-120"/>
+                <a:latin typeface="Consolas" panose="020B0609020204030204" pitchFamily="34" charset="0"/>
+                <a:ea typeface="Consolas" panose="020B0609020204030204" pitchFamily="34" charset="-122"/>
+                <a:cs typeface="Consolas" panose="020B0609020204030204" pitchFamily="34" charset="-120"/>
               </a:rPr>
               <a:t>int index(String str, String substr){
     if(str.length == 0 || substr.length == 0) return 0;
@@ -8548,13 +8147,12 @@
             <a:avLst/>
           </a:prstGeom>
           <a:noFill/>
-          <a:ln/>
         </p:spPr>
         <p:txBody>
           <a:bodyPr wrap="square" rtlCol="0" anchor="t"/>
           <a:lstStyle/>
           <a:p>
-            <a:pPr algn="l" indent="0" marL="0">
+            <a:pPr marL="0" indent="0" algn="l">
               <a:buNone/>
             </a:pPr>
             <a:r>
@@ -8562,9 +8160,9 @@
                 <a:solidFill>
                   <a:srgbClr val="8A9099"/>
                 </a:solidFill>
-                <a:latin typeface="微软雅黑" pitchFamily="34" charset="0"/>
-                <a:ea typeface="微软雅黑" pitchFamily="34" charset="-122"/>
-                <a:cs typeface="微软雅黑" pitchFamily="34" charset="-120"/>
+                <a:latin typeface="微软雅黑" panose="020B0503020204020204" pitchFamily="34" charset="-122"/>
+                <a:ea typeface="微软雅黑" panose="020B0503020204020204" pitchFamily="34" charset="-122"/>
+                <a:cs typeface="微软雅黑" panose="020B0503020204020204" pitchFamily="34" charset="-120"/>
               </a:rPr>
               <a:t>i 扫主串、j 扫模式串、k 记本轮起点；失配时 j 归零、i 回到 k+1，这就是回溯；最坏 O(nm)</a:t>
             </a:r>
@@ -8582,7 +8180,7 @@
 
 <file path=ppt/slides/slide7.xml><?xml version="1.0" encoding="utf-8"?>
 <p:sld xmlns:a="http://schemas.openxmlformats.org/drawingml/2006/main" xmlns:r="http://schemas.openxmlformats.org/officeDocument/2006/relationships" xmlns:p="http://schemas.openxmlformats.org/presentationml/2006/main">
-  <p:cSld name="Slide 7">
+  <p:cSld>
     <p:bg>
       <p:bgPr>
         <a:blipFill dpi="0" rotWithShape="1">
@@ -8626,13 +8224,12 @@
             <a:avLst/>
           </a:prstGeom>
           <a:noFill/>
-          <a:ln/>
         </p:spPr>
         <p:txBody>
           <a:bodyPr wrap="square" rtlCol="0" anchor="ctr"/>
           <a:lstStyle/>
           <a:p>
-            <a:pPr algn="r" indent="0" marL="0">
+            <a:pPr marL="0" indent="0" algn="r">
               <a:buNone/>
             </a:pPr>
             <a:r>
@@ -8640,9 +8237,9 @@
                 <a:solidFill>
                   <a:srgbClr val="8A9099"/>
                 </a:solidFill>
-                <a:latin typeface="微软雅黑" pitchFamily="34" charset="0"/>
-                <a:ea typeface="微软雅黑" pitchFamily="34" charset="-122"/>
-                <a:cs typeface="微软雅黑" pitchFamily="34" charset="-120"/>
+                <a:latin typeface="微软雅黑" panose="020B0503020204020204" pitchFamily="34" charset="-122"/>
+                <a:ea typeface="微软雅黑" panose="020B0503020204020204" pitchFamily="34" charset="-122"/>
+                <a:cs typeface="微软雅黑" panose="020B0503020204020204" pitchFamily="34" charset="-120"/>
               </a:rPr>
               <a:t>7 / 16</a:t>
             </a:r>
@@ -8665,13 +8262,12 @@
             <a:avLst/>
           </a:prstGeom>
           <a:noFill/>
-          <a:ln/>
         </p:spPr>
         <p:txBody>
           <a:bodyPr wrap="square" rtlCol="0" anchor="ctr"/>
           <a:lstStyle/>
           <a:p>
-            <a:pPr algn="l" indent="0" marL="0">
+            <a:pPr marL="0" indent="0" algn="l">
               <a:buNone/>
             </a:pPr>
             <a:r>
@@ -8679,9 +8275,9 @@
                 <a:solidFill>
                   <a:srgbClr val="1F4E9C"/>
                 </a:solidFill>
-                <a:latin typeface="微软雅黑" pitchFamily="34" charset="0"/>
-                <a:ea typeface="微软雅黑" pitchFamily="34" charset="-122"/>
-                <a:cs typeface="微软雅黑" pitchFamily="34" charset="-120"/>
+                <a:latin typeface="微软雅黑" panose="020B0503020204020204" pitchFamily="34" charset="-122"/>
+                <a:ea typeface="微软雅黑" panose="020B0503020204020204" pitchFamily="34" charset="-122"/>
+                <a:cs typeface="微软雅黑" panose="020B0503020204020204" pitchFamily="34" charset="-120"/>
               </a:rPr>
               <a:t>BF 匹配 · 过程页</a:t>
             </a:r>
@@ -8704,13 +8300,12 @@
             <a:avLst/>
           </a:prstGeom>
           <a:noFill/>
-          <a:ln/>
         </p:spPr>
         <p:txBody>
           <a:bodyPr wrap="square" rtlCol="0" anchor="ctr"/>
           <a:lstStyle/>
           <a:p>
-            <a:pPr algn="l" indent="0" marL="0">
+            <a:pPr marL="0" indent="0" algn="l">
               <a:buNone/>
             </a:pPr>
             <a:r>
@@ -8718,9 +8313,9 @@
                 <a:solidFill>
                   <a:srgbClr val="1F2329"/>
                 </a:solidFill>
-                <a:latin typeface="微软雅黑" pitchFamily="34" charset="0"/>
-                <a:ea typeface="微软雅黑" pitchFamily="34" charset="-122"/>
-                <a:cs typeface="微软雅黑" pitchFamily="34" charset="-120"/>
+                <a:latin typeface="微软雅黑" panose="020B0503020204020204" pitchFamily="34" charset="-122"/>
+                <a:ea typeface="微软雅黑" panose="020B0503020204020204" pitchFamily="34" charset="-122"/>
+                <a:cs typeface="微软雅黑" panose="020B0503020204020204" pitchFamily="34" charset="-120"/>
               </a:rPr>
               <a:t>BF 匹配走一趟：主串 ababcab、模式串 abc（拿纸跟画）</a:t>
             </a:r>
@@ -8730,7 +8325,7 @@
       </p:sp>
       <p:pic>
         <p:nvPicPr>
-          <p:cNvPr id="5" name="Image 0" descr="D:\Program Project\SpecialtyCourses\assets\diagrams\a6-bf-match.png">    </p:cNvPr>
+          <p:cNvPr id="5" name="Image 0" descr="D:\Program Project\SpecialtyCourses\assets\diagrams\a6-bf-match.png"/>
           <p:cNvPicPr>
             <a:picLocks noChangeAspect="1"/>
           </p:cNvPicPr>
@@ -8738,8 +8333,10 @@
         </p:nvPicPr>
         <p:blipFill>
           <a:blip r:embed="rId2"/>
-          <a:srcRect l="0" r="0" t="0" b="0"/>
-          <a:stretch/>
+          <a:srcRect/>
+          <a:stretch>
+            <a:fillRect/>
+          </a:stretch>
         </p:blipFill>
         <p:spPr>
           <a:xfrm>
@@ -8766,13 +8363,12 @@
             <a:avLst/>
           </a:prstGeom>
           <a:noFill/>
-          <a:ln/>
         </p:spPr>
         <p:txBody>
           <a:bodyPr wrap="square" rtlCol="0" anchor="t"/>
           <a:lstStyle/>
           <a:p>
-            <a:pPr algn="l" indent="0" marL="0">
+            <a:pPr marL="0" indent="0" algn="l">
               <a:lnSpc>
                 <a:spcPct val="115000"/>
               </a:lnSpc>
@@ -8783,25 +8379,68 @@
                 <a:solidFill>
                   <a:srgbClr val="1F4E9C"/>
                 </a:solidFill>
-                <a:latin typeface="微软雅黑" pitchFamily="34" charset="0"/>
-                <a:ea typeface="微软雅黑" pitchFamily="34" charset="-122"/>
-                <a:cs typeface="微软雅黑" pitchFamily="34" charset="-120"/>
+                <a:latin typeface="微软雅黑" panose="020B0503020204020204" pitchFamily="34" charset="-122"/>
+                <a:ea typeface="微软雅黑" panose="020B0503020204020204" pitchFamily="34" charset="-122"/>
+                <a:cs typeface="微软雅黑" panose="020B0503020204020204" pitchFamily="34" charset="-120"/>
               </a:rPr>
               <a:t>•  </a:t>
             </a:r>
-            <a:pPr algn="l" indent="0" marL="0">
+            <a:r>
+              <a:rPr lang="en-US" sz="1400" dirty="0">
+                <a:solidFill>
+                  <a:srgbClr val="000000"/>
+                </a:solidFill>
+              </a:rPr>
+              <a:t>① k=0，i=j=0：a=a、b=b 匹配，到第3个主串是 a、模式串是 c，失配</a:t>
+            </a:r>
+            <a:endParaRPr lang="en-US" sz="1400" dirty="0"/>
+          </a:p>
+        </p:txBody>
+      </p:sp>
+      <p:sp>
+        <p:nvSpPr>
+          <p:cNvPr id="7" name="Text 4"/>
+          <p:cNvSpPr/>
+          <p:nvPr/>
+        </p:nvSpPr>
+        <p:spPr>
+          <a:xfrm>
+            <a:off x="896112" y="4802124"/>
+            <a:ext cx="10454335" cy="321564"/>
+          </a:xfrm>
+          <a:prstGeom prst="rect">
+            <a:avLst/>
+          </a:prstGeom>
+          <a:noFill/>
+        </p:spPr>
+        <p:txBody>
+          <a:bodyPr wrap="square" rtlCol="0" anchor="t"/>
+          <a:lstStyle/>
+          <a:p>
+            <a:pPr marL="0" indent="0" algn="l">
               <a:lnSpc>
                 <a:spcPct val="115000"/>
               </a:lnSpc>
               <a:buNone/>
             </a:pPr>
             <a:r>
+              <a:rPr lang="en-US" sz="1400" b="1" dirty="0">
+                <a:solidFill>
+                  <a:srgbClr val="1F4E9C"/>
+                </a:solidFill>
+                <a:latin typeface="微软雅黑" panose="020B0503020204020204" pitchFamily="34" charset="-122"/>
+                <a:ea typeface="微软雅黑" panose="020B0503020204020204" pitchFamily="34" charset="-122"/>
+                <a:cs typeface="微软雅黑" panose="020B0503020204020204" pitchFamily="34" charset="-120"/>
+              </a:rPr>
+              <a:t>•  </a:t>
+            </a:r>
+            <a:r>
               <a:rPr lang="en-US" sz="1400" dirty="0">
                 <a:solidFill>
                   <a:srgbClr val="000000"/>
                 </a:solidFill>
               </a:rPr>
-              <a:t>① k=0，i=j=0：a=a、b=b 匹配，到第3个主串是 a、模式串是 c，失配</a:t>
+              <a:t>② 失配：j 归 0，k 变 1，i 回到 k=1；从主串第2个字符 b 重新和模式串开头 a 比</a:t>
             </a:r>
             <a:endParaRPr lang="en-US" sz="1400" dirty="0"/>
           </a:p>
@@ -8809,26 +8448,25 @@
       </p:sp>
       <p:sp>
         <p:nvSpPr>
-          <p:cNvPr id="7" name="Text 4"/>
+          <p:cNvPr id="8" name="Text 5"/>
           <p:cNvSpPr/>
           <p:nvPr/>
         </p:nvSpPr>
         <p:spPr>
           <a:xfrm>
-            <a:off x="896112" y="4802124"/>
+            <a:off x="896112" y="5196840"/>
             <a:ext cx="10454335" cy="321564"/>
           </a:xfrm>
           <a:prstGeom prst="rect">
             <a:avLst/>
           </a:prstGeom>
           <a:noFill/>
-          <a:ln/>
         </p:spPr>
         <p:txBody>
           <a:bodyPr wrap="square" rtlCol="0" anchor="t"/>
           <a:lstStyle/>
           <a:p>
-            <a:pPr algn="l" indent="0" marL="0">
+            <a:pPr marL="0" indent="0" algn="l">
               <a:lnSpc>
                 <a:spcPct val="115000"/>
               </a:lnSpc>
@@ -8839,130 +8477,61 @@
                 <a:solidFill>
                   <a:srgbClr val="1F4E9C"/>
                 </a:solidFill>
-                <a:latin typeface="微软雅黑" pitchFamily="34" charset="0"/>
-                <a:ea typeface="微软雅黑" pitchFamily="34" charset="-122"/>
-                <a:cs typeface="微软雅黑" pitchFamily="34" charset="-120"/>
+                <a:latin typeface="微软雅黑" panose="020B0503020204020204" pitchFamily="34" charset="-122"/>
+                <a:ea typeface="微软雅黑" panose="020B0503020204020204" pitchFamily="34" charset="-122"/>
+                <a:cs typeface="微软雅黑" panose="020B0503020204020204" pitchFamily="34" charset="-120"/>
               </a:rPr>
               <a:t>•  </a:t>
             </a:r>
-            <a:pPr algn="l" indent="0" marL="0">
+            <a:r>
+              <a:rPr lang="en-US" sz="1400" dirty="0">
+                <a:solidFill>
+                  <a:srgbClr val="000000"/>
+                </a:solidFill>
+              </a:rPr>
+              <a:t>③ b≠a 失配，k 变 2、i 回到 2；主串第3个 a 和模式 a 比，a=a、b=b、c=c 全中</a:t>
+            </a:r>
+            <a:endParaRPr lang="en-US" sz="1400" dirty="0"/>
+          </a:p>
+        </p:txBody>
+      </p:sp>
+      <p:sp>
+        <p:nvSpPr>
+          <p:cNvPr id="9" name="Text 6"/>
+          <p:cNvSpPr/>
+          <p:nvPr/>
+        </p:nvSpPr>
+        <p:spPr>
+          <a:xfrm>
+            <a:off x="896112" y="5591556"/>
+            <a:ext cx="10454335" cy="321564"/>
+          </a:xfrm>
+          <a:prstGeom prst="rect">
+            <a:avLst/>
+          </a:prstGeom>
+          <a:noFill/>
+        </p:spPr>
+        <p:txBody>
+          <a:bodyPr wrap="square" rtlCol="0" anchor="t"/>
+          <a:lstStyle/>
+          <a:p>
+            <a:pPr marL="0" indent="0" algn="l">
               <a:lnSpc>
                 <a:spcPct val="115000"/>
               </a:lnSpc>
               <a:buNone/>
             </a:pPr>
             <a:r>
-              <a:rPr lang="en-US" sz="1400" dirty="0">
-                <a:solidFill>
-                  <a:srgbClr val="000000"/>
-                </a:solidFill>
-              </a:rPr>
-              <a:t>② 失配：j 归 0，k 变 1，i 回到 k=1；从主串第2个字符 b 重新和模式串开头 a 比</a:t>
-            </a:r>
-            <a:endParaRPr lang="en-US" sz="1400" dirty="0"/>
-          </a:p>
-        </p:txBody>
-      </p:sp>
-      <p:sp>
-        <p:nvSpPr>
-          <p:cNvPr id="8" name="Text 5"/>
-          <p:cNvSpPr/>
-          <p:nvPr/>
-        </p:nvSpPr>
-        <p:spPr>
-          <a:xfrm>
-            <a:off x="896112" y="5196840"/>
-            <a:ext cx="10454335" cy="321564"/>
-          </a:xfrm>
-          <a:prstGeom prst="rect">
-            <a:avLst/>
-          </a:prstGeom>
-          <a:noFill/>
-          <a:ln/>
-        </p:spPr>
-        <p:txBody>
-          <a:bodyPr wrap="square" rtlCol="0" anchor="t"/>
-          <a:lstStyle/>
-          <a:p>
-            <a:pPr algn="l" indent="0" marL="0">
-              <a:lnSpc>
-                <a:spcPct val="115000"/>
-              </a:lnSpc>
-              <a:buNone/>
-            </a:pPr>
-            <a:r>
               <a:rPr lang="en-US" sz="1400" b="1" dirty="0">
                 <a:solidFill>
                   <a:srgbClr val="1F4E9C"/>
                 </a:solidFill>
-                <a:latin typeface="微软雅黑" pitchFamily="34" charset="0"/>
-                <a:ea typeface="微软雅黑" pitchFamily="34" charset="-122"/>
-                <a:cs typeface="微软雅黑" pitchFamily="34" charset="-120"/>
+                <a:latin typeface="微软雅黑" panose="020B0503020204020204" pitchFamily="34" charset="-122"/>
+                <a:ea typeface="微软雅黑" panose="020B0503020204020204" pitchFamily="34" charset="-122"/>
+                <a:cs typeface="微软雅黑" panose="020B0503020204020204" pitchFamily="34" charset="-120"/>
               </a:rPr>
               <a:t>•  </a:t>
             </a:r>
-            <a:pPr algn="l" indent="0" marL="0">
-              <a:lnSpc>
-                <a:spcPct val="115000"/>
-              </a:lnSpc>
-              <a:buNone/>
-            </a:pPr>
-            <a:r>
-              <a:rPr lang="en-US" sz="1400" dirty="0">
-                <a:solidFill>
-                  <a:srgbClr val="000000"/>
-                </a:solidFill>
-              </a:rPr>
-              <a:t>③ b≠a 失配，k 变 2、i 回到 2；主串第3个 a 和模式 a 比，a=a、b=b、c=c 全中</a:t>
-            </a:r>
-            <a:endParaRPr lang="en-US" sz="1400" dirty="0"/>
-          </a:p>
-        </p:txBody>
-      </p:sp>
-      <p:sp>
-        <p:nvSpPr>
-          <p:cNvPr id="9" name="Text 6"/>
-          <p:cNvSpPr/>
-          <p:nvPr/>
-        </p:nvSpPr>
-        <p:spPr>
-          <a:xfrm>
-            <a:off x="896112" y="5591556"/>
-            <a:ext cx="10454335" cy="321564"/>
-          </a:xfrm>
-          <a:prstGeom prst="rect">
-            <a:avLst/>
-          </a:prstGeom>
-          <a:noFill/>
-          <a:ln/>
-        </p:spPr>
-        <p:txBody>
-          <a:bodyPr wrap="square" rtlCol="0" anchor="t"/>
-          <a:lstStyle/>
-          <a:p>
-            <a:pPr algn="l" indent="0" marL="0">
-              <a:lnSpc>
-                <a:spcPct val="115000"/>
-              </a:lnSpc>
-              <a:buNone/>
-            </a:pPr>
-            <a:r>
-              <a:rPr lang="en-US" sz="1400" b="1" dirty="0">
-                <a:solidFill>
-                  <a:srgbClr val="1F4E9C"/>
-                </a:solidFill>
-                <a:latin typeface="微软雅黑" pitchFamily="34" charset="0"/>
-                <a:ea typeface="微软雅黑" pitchFamily="34" charset="-122"/>
-                <a:cs typeface="微软雅黑" pitchFamily="34" charset="-120"/>
-              </a:rPr>
-              <a:t>•  </a:t>
-            </a:r>
-            <a:pPr algn="l" indent="0" marL="0">
-              <a:lnSpc>
-                <a:spcPct val="115000"/>
-              </a:lnSpc>
-              <a:buNone/>
-            </a:pPr>
             <a:r>
               <a:rPr lang="en-US" sz="1400" dirty="0">
                 <a:solidFill>
@@ -8990,13 +8559,12 @@
             <a:avLst/>
           </a:prstGeom>
           <a:noFill/>
-          <a:ln/>
         </p:spPr>
         <p:txBody>
           <a:bodyPr wrap="square" rtlCol="0" anchor="t"/>
           <a:lstStyle/>
           <a:p>
-            <a:pPr algn="l" indent="0" marL="0">
+            <a:pPr marL="0" indent="0" algn="l">
               <a:buNone/>
             </a:pPr>
             <a:r>
@@ -9004,9 +8572,9 @@
                 <a:solidFill>
                   <a:srgbClr val="8A9099"/>
                 </a:solidFill>
-                <a:latin typeface="微软雅黑" pitchFamily="34" charset="0"/>
-                <a:ea typeface="微软雅黑" pitchFamily="34" charset="-122"/>
-                <a:cs typeface="微软雅黑" pitchFamily="34" charset="-120"/>
+                <a:latin typeface="微软雅黑" panose="020B0503020204020204" pitchFamily="34" charset="-122"/>
+                <a:ea typeface="微软雅黑" panose="020B0503020204020204" pitchFamily="34" charset="-122"/>
+                <a:cs typeface="微软雅黑" panose="020B0503020204020204" pitchFamily="34" charset="-120"/>
               </a:rPr>
               <a:t>你看到 BF 的毛病了：失配后主串指针 i 要退回去重比，已经比过的字符又比一遍，这就是它慢的原因</a:t>
             </a:r>
@@ -9024,7 +8592,7 @@
 
 <file path=ppt/slides/slide8.xml><?xml version="1.0" encoding="utf-8"?>
 <p:sld xmlns:a="http://schemas.openxmlformats.org/drawingml/2006/main" xmlns:r="http://schemas.openxmlformats.org/officeDocument/2006/relationships" xmlns:p="http://schemas.openxmlformats.org/presentationml/2006/main">
-  <p:cSld name="Slide 8">
+  <p:cSld>
     <p:bg>
       <p:bgPr>
         <a:blipFill dpi="0" rotWithShape="1">
@@ -9068,13 +8636,12 @@
             <a:avLst/>
           </a:prstGeom>
           <a:noFill/>
-          <a:ln/>
         </p:spPr>
         <p:txBody>
           <a:bodyPr wrap="square" rtlCol="0" anchor="ctr"/>
           <a:lstStyle/>
           <a:p>
-            <a:pPr algn="r" indent="0" marL="0">
+            <a:pPr marL="0" indent="0" algn="r">
               <a:buNone/>
             </a:pPr>
             <a:r>
@@ -9082,9 +8649,9 @@
                 <a:solidFill>
                   <a:srgbClr val="8A9099"/>
                 </a:solidFill>
-                <a:latin typeface="微软雅黑" pitchFamily="34" charset="0"/>
-                <a:ea typeface="微软雅黑" pitchFamily="34" charset="-122"/>
-                <a:cs typeface="微软雅黑" pitchFamily="34" charset="-120"/>
+                <a:latin typeface="微软雅黑" panose="020B0503020204020204" pitchFamily="34" charset="-122"/>
+                <a:ea typeface="微软雅黑" panose="020B0503020204020204" pitchFamily="34" charset="-122"/>
+                <a:cs typeface="微软雅黑" panose="020B0503020204020204" pitchFamily="34" charset="-120"/>
               </a:rPr>
               <a:t>8 / 16</a:t>
             </a:r>
@@ -9107,13 +8674,12 @@
             <a:avLst/>
           </a:prstGeom>
           <a:noFill/>
-          <a:ln/>
         </p:spPr>
         <p:txBody>
           <a:bodyPr wrap="square" rtlCol="0" anchor="ctr"/>
           <a:lstStyle/>
           <a:p>
-            <a:pPr algn="l" indent="0" marL="0">
+            <a:pPr marL="0" indent="0" algn="l">
               <a:buNone/>
             </a:pPr>
             <a:r>
@@ -9121,9 +8687,9 @@
                 <a:solidFill>
                   <a:srgbClr val="1F4E9C"/>
                 </a:solidFill>
-                <a:latin typeface="微软雅黑" pitchFamily="34" charset="0"/>
-                <a:ea typeface="微软雅黑" pitchFamily="34" charset="-122"/>
-                <a:cs typeface="微软雅黑" pitchFamily="34" charset="-120"/>
+                <a:latin typeface="微软雅黑" panose="020B0503020204020204" pitchFamily="34" charset="-122"/>
+                <a:ea typeface="微软雅黑" panose="020B0503020204020204" pitchFamily="34" charset="-122"/>
+                <a:cs typeface="微软雅黑" panose="020B0503020204020204" pitchFamily="34" charset="-120"/>
               </a:rPr>
               <a:t>KMP 思想</a:t>
             </a:r>
@@ -9146,13 +8712,12 @@
             <a:avLst/>
           </a:prstGeom>
           <a:noFill/>
-          <a:ln/>
         </p:spPr>
         <p:txBody>
           <a:bodyPr wrap="square" rtlCol="0" anchor="ctr"/>
           <a:lstStyle/>
           <a:p>
-            <a:pPr algn="l" indent="0" marL="0">
+            <a:pPr marL="0" indent="0" algn="l">
               <a:buNone/>
             </a:pPr>
             <a:r>
@@ -9160,9 +8725,9 @@
                 <a:solidFill>
                   <a:srgbClr val="1F2329"/>
                 </a:solidFill>
-                <a:latin typeface="微软雅黑" pitchFamily="34" charset="0"/>
-                <a:ea typeface="微软雅黑" pitchFamily="34" charset="-122"/>
-                <a:cs typeface="微软雅黑" pitchFamily="34" charset="-120"/>
+                <a:latin typeface="微软雅黑" panose="020B0503020204020204" pitchFamily="34" charset="-122"/>
+                <a:ea typeface="微软雅黑" panose="020B0503020204020204" pitchFamily="34" charset="-122"/>
+                <a:cs typeface="微软雅黑" panose="020B0503020204020204" pitchFamily="34" charset="-120"/>
               </a:rPr>
               <a:t>KMP：让主串指针永不回溯</a:t>
             </a:r>
@@ -9185,13 +8750,12 @@
             <a:avLst/>
           </a:prstGeom>
           <a:noFill/>
-          <a:ln/>
         </p:spPr>
         <p:txBody>
           <a:bodyPr wrap="square" rtlCol="0" anchor="t"/>
           <a:lstStyle/>
           <a:p>
-            <a:pPr algn="l" indent="0" marL="0">
+            <a:pPr marL="0" indent="0" algn="l">
               <a:lnSpc>
                 <a:spcPct val="115000"/>
               </a:lnSpc>
@@ -9202,25 +8766,68 @@
                 <a:solidFill>
                   <a:srgbClr val="1F4E9C"/>
                 </a:solidFill>
-                <a:latin typeface="微软雅黑" pitchFamily="34" charset="0"/>
-                <a:ea typeface="微软雅黑" pitchFamily="34" charset="-122"/>
-                <a:cs typeface="微软雅黑" pitchFamily="34" charset="-120"/>
+                <a:latin typeface="微软雅黑" panose="020B0503020204020204" pitchFamily="34" charset="-122"/>
+                <a:ea typeface="微软雅黑" panose="020B0503020204020204" pitchFamily="34" charset="-122"/>
+                <a:cs typeface="微软雅黑" panose="020B0503020204020204" pitchFamily="34" charset="-120"/>
               </a:rPr>
               <a:t>•  </a:t>
             </a:r>
-            <a:pPr algn="l" indent="0" marL="0">
+            <a:r>
+              <a:rPr lang="en-US" sz="1800" dirty="0">
+                <a:solidFill>
+                  <a:srgbClr val="000000"/>
+                </a:solidFill>
+              </a:rPr>
+              <a:t>BF 慢在主串指针 i 要回溯；KMP 的核心就是让 i 永不回溯，失配时只把模式串的 j 退到 next[j]</a:t>
+            </a:r>
+            <a:endParaRPr lang="en-US" sz="1800" dirty="0"/>
+          </a:p>
+        </p:txBody>
+      </p:sp>
+      <p:sp>
+        <p:nvSpPr>
+          <p:cNvPr id="6" name="Text 4"/>
+          <p:cNvSpPr/>
+          <p:nvPr/>
+        </p:nvSpPr>
+        <p:spPr>
+          <a:xfrm>
+            <a:off x="896112" y="3209544"/>
+            <a:ext cx="10454335" cy="740664"/>
+          </a:xfrm>
+          <a:prstGeom prst="rect">
+            <a:avLst/>
+          </a:prstGeom>
+          <a:noFill/>
+        </p:spPr>
+        <p:txBody>
+          <a:bodyPr wrap="square" rtlCol="0" anchor="t"/>
+          <a:lstStyle/>
+          <a:p>
+            <a:pPr marL="0" indent="0" algn="l">
               <a:lnSpc>
                 <a:spcPct val="115000"/>
               </a:lnSpc>
               <a:buNone/>
             </a:pPr>
             <a:r>
+              <a:rPr lang="en-US" sz="1800" b="1" dirty="0">
+                <a:solidFill>
+                  <a:srgbClr val="1F4E9C"/>
+                </a:solidFill>
+                <a:latin typeface="微软雅黑" panose="020B0503020204020204" pitchFamily="34" charset="-122"/>
+                <a:ea typeface="微软雅黑" panose="020B0503020204020204" pitchFamily="34" charset="-122"/>
+                <a:cs typeface="微软雅黑" panose="020B0503020204020204" pitchFamily="34" charset="-120"/>
+              </a:rPr>
+              <a:t>•  </a:t>
+            </a:r>
+            <a:r>
               <a:rPr lang="en-US" sz="1800" dirty="0">
                 <a:solidFill>
                   <a:srgbClr val="000000"/>
                 </a:solidFill>
               </a:rPr>
-              <a:t>BF 慢在主串指针 i 要回溯；KMP 的核心就是让 i 永不回溯，失配时只把模式串的 j 退到 next[j]</a:t>
+              <a:t>next[j] 的含义：模式串前 j-1 个字符里，最长的那段'相等前后缀'的长度加 1</a:t>
             </a:r>
             <a:endParaRPr lang="en-US" sz="1800" dirty="0"/>
           </a:p>
@@ -9228,26 +8835,25 @@
       </p:sp>
       <p:sp>
         <p:nvSpPr>
-          <p:cNvPr id="6" name="Text 4"/>
+          <p:cNvPr id="7" name="Text 5"/>
           <p:cNvSpPr/>
           <p:nvPr/>
         </p:nvSpPr>
         <p:spPr>
           <a:xfrm>
-            <a:off x="896112" y="3209544"/>
+            <a:off x="896112" y="4023360"/>
             <a:ext cx="10454335" cy="740664"/>
           </a:xfrm>
           <a:prstGeom prst="rect">
             <a:avLst/>
           </a:prstGeom>
           <a:noFill/>
-          <a:ln/>
         </p:spPr>
         <p:txBody>
           <a:bodyPr wrap="square" rtlCol="0" anchor="t"/>
           <a:lstStyle/>
           <a:p>
-            <a:pPr algn="l" indent="0" marL="0">
+            <a:pPr marL="0" indent="0" algn="l">
               <a:lnSpc>
                 <a:spcPct val="115000"/>
               </a:lnSpc>
@@ -9258,74 +8864,12 @@
                 <a:solidFill>
                   <a:srgbClr val="1F4E9C"/>
                 </a:solidFill>
-                <a:latin typeface="微软雅黑" pitchFamily="34" charset="0"/>
-                <a:ea typeface="微软雅黑" pitchFamily="34" charset="-122"/>
-                <a:cs typeface="微软雅黑" pitchFamily="34" charset="-120"/>
+                <a:latin typeface="微软雅黑" panose="020B0503020204020204" pitchFamily="34" charset="-122"/>
+                <a:ea typeface="微软雅黑" panose="020B0503020204020204" pitchFamily="34" charset="-122"/>
+                <a:cs typeface="微软雅黑" panose="020B0503020204020204" pitchFamily="34" charset="-120"/>
               </a:rPr>
               <a:t>•  </a:t>
             </a:r>
-            <a:pPr algn="l" indent="0" marL="0">
-              <a:lnSpc>
-                <a:spcPct val="115000"/>
-              </a:lnSpc>
-              <a:buNone/>
-            </a:pPr>
-            <a:r>
-              <a:rPr lang="en-US" sz="1800" dirty="0">
-                <a:solidFill>
-                  <a:srgbClr val="000000"/>
-                </a:solidFill>
-              </a:rPr>
-              <a:t>next[j] 的含义：模式串前 j-1 个字符里，最长的那段'相等前后缀'的长度加 1</a:t>
-            </a:r>
-            <a:endParaRPr lang="en-US" sz="1800" dirty="0"/>
-          </a:p>
-        </p:txBody>
-      </p:sp>
-      <p:sp>
-        <p:nvSpPr>
-          <p:cNvPr id="7" name="Text 5"/>
-          <p:cNvSpPr/>
-          <p:nvPr/>
-        </p:nvSpPr>
-        <p:spPr>
-          <a:xfrm>
-            <a:off x="896112" y="4023360"/>
-            <a:ext cx="10454335" cy="740664"/>
-          </a:xfrm>
-          <a:prstGeom prst="rect">
-            <a:avLst/>
-          </a:prstGeom>
-          <a:noFill/>
-          <a:ln/>
-        </p:spPr>
-        <p:txBody>
-          <a:bodyPr wrap="square" rtlCol="0" anchor="t"/>
-          <a:lstStyle/>
-          <a:p>
-            <a:pPr algn="l" indent="0" marL="0">
-              <a:lnSpc>
-                <a:spcPct val="115000"/>
-              </a:lnSpc>
-              <a:buNone/>
-            </a:pPr>
-            <a:r>
-              <a:rPr lang="en-US" sz="1800" b="1" dirty="0">
-                <a:solidFill>
-                  <a:srgbClr val="1F4E9C"/>
-                </a:solidFill>
-                <a:latin typeface="微软雅黑" pitchFamily="34" charset="0"/>
-                <a:ea typeface="微软雅黑" pitchFamily="34" charset="-122"/>
-                <a:cs typeface="微软雅黑" pitchFamily="34" charset="-120"/>
-              </a:rPr>
-              <a:t>•  </a:t>
-            </a:r>
-            <a:pPr algn="l" indent="0" marL="0">
-              <a:lnSpc>
-                <a:spcPct val="115000"/>
-              </a:lnSpc>
-              <a:buNone/>
-            </a:pPr>
             <a:r>
               <a:rPr lang="en-US" sz="1800" dirty="0">
                 <a:solidFill>
@@ -9353,13 +8897,12 @@
             <a:avLst/>
           </a:prstGeom>
           <a:noFill/>
-          <a:ln/>
         </p:spPr>
         <p:txBody>
           <a:bodyPr wrap="square" rtlCol="0" anchor="t"/>
           <a:lstStyle/>
           <a:p>
-            <a:pPr algn="l" indent="0" marL="0">
+            <a:pPr marL="0" indent="0" algn="l">
               <a:buNone/>
             </a:pPr>
             <a:r>
@@ -9367,9 +8910,9 @@
                 <a:solidFill>
                   <a:srgbClr val="8A9099"/>
                 </a:solidFill>
-                <a:latin typeface="微软雅黑" pitchFamily="34" charset="0"/>
-                <a:ea typeface="微软雅黑" pitchFamily="34" charset="-122"/>
-                <a:cs typeface="微软雅黑" pitchFamily="34" charset="-120"/>
+                <a:latin typeface="微软雅黑" panose="020B0503020204020204" pitchFamily="34" charset="-122"/>
+                <a:ea typeface="微软雅黑" panose="020B0503020204020204" pitchFamily="34" charset="-122"/>
+                <a:cs typeface="微软雅黑" panose="020B0503020204020204" pitchFamily="34" charset="-120"/>
               </a:rPr>
               <a:t>802 只考 next 和 nextval 的手算，不要求写 KMP 匹配代码，所以这一节把思想讲透、把手算练熟</a:t>
             </a:r>
@@ -9387,7 +8930,7 @@
 
 <file path=ppt/slides/slide9.xml><?xml version="1.0" encoding="utf-8"?>
 <p:sld xmlns:a="http://schemas.openxmlformats.org/drawingml/2006/main" xmlns:r="http://schemas.openxmlformats.org/officeDocument/2006/relationships" xmlns:p="http://schemas.openxmlformats.org/presentationml/2006/main">
-  <p:cSld name="Slide 9">
+  <p:cSld>
     <p:bg>
       <p:bgPr>
         <a:blipFill dpi="0" rotWithShape="1">
@@ -9431,13 +8974,12 @@
             <a:avLst/>
           </a:prstGeom>
           <a:noFill/>
-          <a:ln/>
         </p:spPr>
         <p:txBody>
           <a:bodyPr wrap="square" rtlCol="0" anchor="ctr"/>
           <a:lstStyle/>
           <a:p>
-            <a:pPr algn="r" indent="0" marL="0">
+            <a:pPr marL="0" indent="0" algn="r">
               <a:buNone/>
             </a:pPr>
             <a:r>
@@ -9445,9 +8987,9 @@
                 <a:solidFill>
                   <a:srgbClr val="8A9099"/>
                 </a:solidFill>
-                <a:latin typeface="微软雅黑" pitchFamily="34" charset="0"/>
-                <a:ea typeface="微软雅黑" pitchFamily="34" charset="-122"/>
-                <a:cs typeface="微软雅黑" pitchFamily="34" charset="-120"/>
+                <a:latin typeface="微软雅黑" panose="020B0503020204020204" pitchFamily="34" charset="-122"/>
+                <a:ea typeface="微软雅黑" panose="020B0503020204020204" pitchFamily="34" charset="-122"/>
+                <a:cs typeface="微软雅黑" panose="020B0503020204020204" pitchFamily="34" charset="-120"/>
               </a:rPr>
               <a:t>9 / 16</a:t>
             </a:r>
@@ -9470,13 +9012,12 @@
             <a:avLst/>
           </a:prstGeom>
           <a:noFill/>
-          <a:ln/>
         </p:spPr>
         <p:txBody>
           <a:bodyPr wrap="square" rtlCol="0" anchor="ctr"/>
           <a:lstStyle/>
           <a:p>
-            <a:pPr algn="l" indent="0" marL="0">
+            <a:pPr marL="0" indent="0" algn="l">
               <a:buNone/>
             </a:pPr>
             <a:r>
@@ -9484,9 +9025,9 @@
                 <a:solidFill>
                   <a:srgbClr val="1F4E9C"/>
                 </a:solidFill>
-                <a:latin typeface="微软雅黑" pitchFamily="34" charset="0"/>
-                <a:ea typeface="微软雅黑" pitchFamily="34" charset="-122"/>
-                <a:cs typeface="微软雅黑" pitchFamily="34" charset="-120"/>
+                <a:latin typeface="微软雅黑" panose="020B0503020204020204" pitchFamily="34" charset="-122"/>
+                <a:ea typeface="微软雅黑" panose="020B0503020204020204" pitchFamily="34" charset="-122"/>
+                <a:cs typeface="微软雅黑" panose="020B0503020204020204" pitchFamily="34" charset="-120"/>
               </a:rPr>
               <a:t>next 手算 · 检查页</a:t>
             </a:r>
@@ -9509,13 +9050,12 @@
             <a:avLst/>
           </a:prstGeom>
           <a:noFill/>
-          <a:ln/>
         </p:spPr>
         <p:txBody>
           <a:bodyPr wrap="square" rtlCol="0" anchor="ctr"/>
           <a:lstStyle/>
           <a:p>
-            <a:pPr algn="l" indent="0" marL="0">
+            <a:pPr marL="0" indent="0" algn="l">
               <a:buNone/>
             </a:pPr>
             <a:r>
@@ -9523,9 +9063,9 @@
                 <a:solidFill>
                   <a:srgbClr val="1F2329"/>
                 </a:solidFill>
-                <a:latin typeface="微软雅黑" pitchFamily="34" charset="0"/>
-                <a:ea typeface="微软雅黑" pitchFamily="34" charset="-122"/>
-                <a:cs typeface="微软雅黑" pitchFamily="34" charset="-120"/>
+                <a:latin typeface="微软雅黑" panose="020B0503020204020204" pitchFamily="34" charset="-122"/>
+                <a:ea typeface="微软雅黑" panose="020B0503020204020204" pitchFamily="34" charset="-122"/>
+                <a:cs typeface="微软雅黑" panose="020B0503020204020204" pitchFamily="34" charset="-120"/>
               </a:rPr>
               <a:t>模式串 abaabc 手算 next 与 nextval（先自己算）</a:t>
             </a:r>
@@ -9539,17 +9079,11 @@
           <p:cNvGraphicFramePr>
             <a:graphicFrameLocks noGrp="1"/>
           </p:cNvGraphicFramePr>
-          <p:nvPr>
-            <p:extLst>
-              <p:ext uri="{D42A27DB-BD31-4B8C-83A1-F6EECF244321}">
-                <p14:modId xmlns:p14="http://schemas.microsoft.com/office/powerpoint/2010/main" val="1579011935"/>
-              </p:ext>
-            </p:extLst>
-          </p:nvPr>
+          <p:nvPr/>
         </p:nvGraphicFramePr>
         <p:xfrm>
           <a:off x="822960" y="2395728"/>
-          <a:ext cx="10545775" cy="914400"/>
+          <a:ext cx="10545775" cy="1682496"/>
         </p:xfrm>
         <a:graphic>
           <a:graphicData uri="http://schemas.openxmlformats.org/drawingml/2006/table">
@@ -9570,7 +9104,7 @@
                     <a:bodyPr/>
                     <a:lstStyle/>
                     <a:p>
-                      <a:pPr algn="ctr" indent="0" marL="0">
+                      <a:pPr marL="0" indent="0" algn="ctr">
                         <a:buNone/>
                       </a:pPr>
                       <a:r>
@@ -9578,20 +9112,20 @@
                           <a:solidFill>
                             <a:srgbClr val="1F4E9C"/>
                           </a:solidFill>
-                          <a:latin typeface="微软雅黑" pitchFamily="34" charset="0"/>
-                          <a:ea typeface="微软雅黑" pitchFamily="34" charset="-122"/>
-                          <a:cs typeface="微软雅黑" pitchFamily="34" charset="-120"/>
+                          <a:latin typeface="微软雅黑" panose="020B0503020204020204" pitchFamily="34" charset="-122"/>
+                          <a:ea typeface="微软雅黑" panose="020B0503020204020204" pitchFamily="34" charset="-122"/>
+                          <a:cs typeface="微软雅黑" panose="020B0503020204020204" pitchFamily="34" charset="-120"/>
                         </a:rPr>
                         <a:t>j</a:t>
                       </a:r>
                       <a:endParaRPr lang="en-US" sz="1500" dirty="0">
-                        <a:latin typeface="微软雅黑" charset="0"/>
-                        <a:ea typeface="微软雅黑" charset="0"/>
-                        <a:cs typeface="微软雅黑" charset="0"/>
+                        <a:latin typeface="微软雅黑" panose="020B0503020204020204" pitchFamily="34" charset="-122"/>
+                        <a:ea typeface="微软雅黑" panose="020B0503020204020204" pitchFamily="34" charset="-122"/>
+                        <a:cs typeface="微软雅黑" panose="020B0503020204020204" pitchFamily="34" charset="-122"/>
                       </a:endParaRPr>
                     </a:p>
                   </a:txBody>
-                  <a:tcPr marL="91440" marR="91440" marT="45720" marB="45720" anchor="ctr">
+                  <a:tcPr anchor="ctr">
                     <a:lnL w="9525" cap="flat" cmpd="sng" algn="ctr">
                       <a:solidFill>
                         <a:srgbClr val="D8DBE0"/>
@@ -9638,7 +9172,7 @@
                     <a:bodyPr/>
                     <a:lstStyle/>
                     <a:p>
-                      <a:pPr algn="ctr" indent="0" marL="0">
+                      <a:pPr marL="0" indent="0" algn="ctr">
                         <a:buNone/>
                       </a:pPr>
                       <a:r>
@@ -9646,20 +9180,20 @@
                           <a:solidFill>
                             <a:srgbClr val="1F4E9C"/>
                           </a:solidFill>
-                          <a:latin typeface="微软雅黑" pitchFamily="34" charset="0"/>
-                          <a:ea typeface="微软雅黑" pitchFamily="34" charset="-122"/>
-                          <a:cs typeface="微软雅黑" pitchFamily="34" charset="-120"/>
+                          <a:latin typeface="微软雅黑" panose="020B0503020204020204" pitchFamily="34" charset="-122"/>
+                          <a:ea typeface="微软雅黑" panose="020B0503020204020204" pitchFamily="34" charset="-122"/>
+                          <a:cs typeface="微软雅黑" panose="020B0503020204020204" pitchFamily="34" charset="-120"/>
                         </a:rPr>
                         <a:t>1</a:t>
                       </a:r>
                       <a:endParaRPr lang="en-US" sz="1500" dirty="0">
-                        <a:latin typeface="微软雅黑" charset="0"/>
-                        <a:ea typeface="微软雅黑" charset="0"/>
-                        <a:cs typeface="微软雅黑" charset="0"/>
+                        <a:latin typeface="微软雅黑" panose="020B0503020204020204" pitchFamily="34" charset="-122"/>
+                        <a:ea typeface="微软雅黑" panose="020B0503020204020204" pitchFamily="34" charset="-122"/>
+                        <a:cs typeface="微软雅黑" panose="020B0503020204020204" pitchFamily="34" charset="-122"/>
                       </a:endParaRPr>
                     </a:p>
                   </a:txBody>
-                  <a:tcPr marL="91440" marR="91440" marT="45720" marB="45720" anchor="ctr">
+                  <a:tcPr anchor="ctr">
                     <a:lnL w="9525" cap="flat" cmpd="sng" algn="ctr">
                       <a:solidFill>
                         <a:srgbClr val="D8DBE0"/>
@@ -9706,7 +9240,7 @@
                     <a:bodyPr/>
                     <a:lstStyle/>
                     <a:p>
-                      <a:pPr algn="ctr" indent="0" marL="0">
+                      <a:pPr marL="0" indent="0" algn="ctr">
                         <a:buNone/>
                       </a:pPr>
                       <a:r>
@@ -9714,20 +9248,20 @@
                           <a:solidFill>
                             <a:srgbClr val="1F4E9C"/>
                           </a:solidFill>
-                          <a:latin typeface="微软雅黑" pitchFamily="34" charset="0"/>
-                          <a:ea typeface="微软雅黑" pitchFamily="34" charset="-122"/>
-                          <a:cs typeface="微软雅黑" pitchFamily="34" charset="-120"/>
+                          <a:latin typeface="微软雅黑" panose="020B0503020204020204" pitchFamily="34" charset="-122"/>
+                          <a:ea typeface="微软雅黑" panose="020B0503020204020204" pitchFamily="34" charset="-122"/>
+                          <a:cs typeface="微软雅黑" panose="020B0503020204020204" pitchFamily="34" charset="-120"/>
                         </a:rPr>
                         <a:t>2</a:t>
                       </a:r>
                       <a:endParaRPr lang="en-US" sz="1500" dirty="0">
-                        <a:latin typeface="微软雅黑" charset="0"/>
-                        <a:ea typeface="微软雅黑" charset="0"/>
-                        <a:cs typeface="微软雅黑" charset="0"/>
+                        <a:latin typeface="微软雅黑" panose="020B0503020204020204" pitchFamily="34" charset="-122"/>
+                        <a:ea typeface="微软雅黑" panose="020B0503020204020204" pitchFamily="34" charset="-122"/>
+                        <a:cs typeface="微软雅黑" panose="020B0503020204020204" pitchFamily="34" charset="-122"/>
                       </a:endParaRPr>
                     </a:p>
                   </a:txBody>
-                  <a:tcPr marL="91440" marR="91440" marT="45720" marB="45720" anchor="ctr">
+                  <a:tcPr anchor="ctr">
                     <a:lnL w="9525" cap="flat" cmpd="sng" algn="ctr">
                       <a:solidFill>
                         <a:srgbClr val="D8DBE0"/>
@@ -9774,7 +9308,7 @@
                     <a:bodyPr/>
                     <a:lstStyle/>
                     <a:p>
-                      <a:pPr algn="ctr" indent="0" marL="0">
+                      <a:pPr marL="0" indent="0" algn="ctr">
                         <a:buNone/>
                       </a:pPr>
                       <a:r>
@@ -9782,20 +9316,20 @@
                           <a:solidFill>
                             <a:srgbClr val="1F4E9C"/>
                           </a:solidFill>
-                          <a:latin typeface="微软雅黑" pitchFamily="34" charset="0"/>
-                          <a:ea typeface="微软雅黑" pitchFamily="34" charset="-122"/>
-                          <a:cs typeface="微软雅黑" pitchFamily="34" charset="-120"/>
+                          <a:latin typeface="微软雅黑" panose="020B0503020204020204" pitchFamily="34" charset="-122"/>
+                          <a:ea typeface="微软雅黑" panose="020B0503020204020204" pitchFamily="34" charset="-122"/>
+                          <a:cs typeface="微软雅黑" panose="020B0503020204020204" pitchFamily="34" charset="-120"/>
                         </a:rPr>
                         <a:t>3</a:t>
                       </a:r>
                       <a:endParaRPr lang="en-US" sz="1500" dirty="0">
-                        <a:latin typeface="微软雅黑" charset="0"/>
-                        <a:ea typeface="微软雅黑" charset="0"/>
-                        <a:cs typeface="微软雅黑" charset="0"/>
+                        <a:latin typeface="微软雅黑" panose="020B0503020204020204" pitchFamily="34" charset="-122"/>
+                        <a:ea typeface="微软雅黑" panose="020B0503020204020204" pitchFamily="34" charset="-122"/>
+                        <a:cs typeface="微软雅黑" panose="020B0503020204020204" pitchFamily="34" charset="-122"/>
                       </a:endParaRPr>
                     </a:p>
                   </a:txBody>
-                  <a:tcPr marL="91440" marR="91440" marT="45720" marB="45720" anchor="ctr">
+                  <a:tcPr anchor="ctr">
                     <a:lnL w="9525" cap="flat" cmpd="sng" algn="ctr">
                       <a:solidFill>
                         <a:srgbClr val="D8DBE0"/>
@@ -9842,7 +9376,7 @@
                     <a:bodyPr/>
                     <a:lstStyle/>
                     <a:p>
-                      <a:pPr algn="ctr" indent="0" marL="0">
+                      <a:pPr marL="0" indent="0" algn="ctr">
                         <a:buNone/>
                       </a:pPr>
                       <a:r>
@@ -9850,20 +9384,20 @@
                           <a:solidFill>
                             <a:srgbClr val="1F4E9C"/>
                           </a:solidFill>
-                          <a:latin typeface="微软雅黑" pitchFamily="34" charset="0"/>
-                          <a:ea typeface="微软雅黑" pitchFamily="34" charset="-122"/>
-                          <a:cs typeface="微软雅黑" pitchFamily="34" charset="-120"/>
+                          <a:latin typeface="微软雅黑" panose="020B0503020204020204" pitchFamily="34" charset="-122"/>
+                          <a:ea typeface="微软雅黑" panose="020B0503020204020204" pitchFamily="34" charset="-122"/>
+                          <a:cs typeface="微软雅黑" panose="020B0503020204020204" pitchFamily="34" charset="-120"/>
                         </a:rPr>
                         <a:t>4</a:t>
                       </a:r>
                       <a:endParaRPr lang="en-US" sz="1500" dirty="0">
-                        <a:latin typeface="微软雅黑" charset="0"/>
-                        <a:ea typeface="微软雅黑" charset="0"/>
-                        <a:cs typeface="微软雅黑" charset="0"/>
+                        <a:latin typeface="微软雅黑" panose="020B0503020204020204" pitchFamily="34" charset="-122"/>
+                        <a:ea typeface="微软雅黑" panose="020B0503020204020204" pitchFamily="34" charset="-122"/>
+                        <a:cs typeface="微软雅黑" panose="020B0503020204020204" pitchFamily="34" charset="-122"/>
                       </a:endParaRPr>
                     </a:p>
                   </a:txBody>
-                  <a:tcPr marL="91440" marR="91440" marT="45720" marB="45720" anchor="ctr">
+                  <a:tcPr anchor="ctr">
                     <a:lnL w="9525" cap="flat" cmpd="sng" algn="ctr">
                       <a:solidFill>
                         <a:srgbClr val="D8DBE0"/>
@@ -9910,7 +9444,7 @@
                     <a:bodyPr/>
                     <a:lstStyle/>
                     <a:p>
-                      <a:pPr algn="ctr" indent="0" marL="0">
+                      <a:pPr marL="0" indent="0" algn="ctr">
                         <a:buNone/>
                       </a:pPr>
                       <a:r>
@@ -9918,20 +9452,20 @@
                           <a:solidFill>
                             <a:srgbClr val="1F4E9C"/>
                           </a:solidFill>
-                          <a:latin typeface="微软雅黑" pitchFamily="34" charset="0"/>
-                          <a:ea typeface="微软雅黑" pitchFamily="34" charset="-122"/>
-                          <a:cs typeface="微软雅黑" pitchFamily="34" charset="-120"/>
+                          <a:latin typeface="微软雅黑" panose="020B0503020204020204" pitchFamily="34" charset="-122"/>
+                          <a:ea typeface="微软雅黑" panose="020B0503020204020204" pitchFamily="34" charset="-122"/>
+                          <a:cs typeface="微软雅黑" panose="020B0503020204020204" pitchFamily="34" charset="-120"/>
                         </a:rPr>
                         <a:t>5</a:t>
                       </a:r>
                       <a:endParaRPr lang="en-US" sz="1500" dirty="0">
-                        <a:latin typeface="微软雅黑" charset="0"/>
-                        <a:ea typeface="微软雅黑" charset="0"/>
-                        <a:cs typeface="微软雅黑" charset="0"/>
+                        <a:latin typeface="微软雅黑" panose="020B0503020204020204" pitchFamily="34" charset="-122"/>
+                        <a:ea typeface="微软雅黑" panose="020B0503020204020204" pitchFamily="34" charset="-122"/>
+                        <a:cs typeface="微软雅黑" panose="020B0503020204020204" pitchFamily="34" charset="-122"/>
                       </a:endParaRPr>
                     </a:p>
                   </a:txBody>
-                  <a:tcPr marL="91440" marR="91440" marT="45720" marB="45720" anchor="ctr">
+                  <a:tcPr anchor="ctr">
                     <a:lnL w="9525" cap="flat" cmpd="sng" algn="ctr">
                       <a:solidFill>
                         <a:srgbClr val="D8DBE0"/>
@@ -9978,7 +9512,7 @@
                     <a:bodyPr/>
                     <a:lstStyle/>
                     <a:p>
-                      <a:pPr algn="ctr" indent="0" marL="0">
+                      <a:pPr marL="0" indent="0" algn="ctr">
                         <a:buNone/>
                       </a:pPr>
                       <a:r>
@@ -9986,20 +9520,20 @@
                           <a:solidFill>
                             <a:srgbClr val="1F4E9C"/>
                           </a:solidFill>
-                          <a:latin typeface="微软雅黑" pitchFamily="34" charset="0"/>
-                          <a:ea typeface="微软雅黑" pitchFamily="34" charset="-122"/>
-                          <a:cs typeface="微软雅黑" pitchFamily="34" charset="-120"/>
+                          <a:latin typeface="微软雅黑" panose="020B0503020204020204" pitchFamily="34" charset="-122"/>
+                          <a:ea typeface="微软雅黑" panose="020B0503020204020204" pitchFamily="34" charset="-122"/>
+                          <a:cs typeface="微软雅黑" panose="020B0503020204020204" pitchFamily="34" charset="-120"/>
                         </a:rPr>
                         <a:t>6</a:t>
                       </a:r>
                       <a:endParaRPr lang="en-US" sz="1500" dirty="0">
-                        <a:latin typeface="微软雅黑" charset="0"/>
-                        <a:ea typeface="微软雅黑" charset="0"/>
-                        <a:cs typeface="微软雅黑" charset="0"/>
+                        <a:latin typeface="微软雅黑" panose="020B0503020204020204" pitchFamily="34" charset="-122"/>
+                        <a:ea typeface="微软雅黑" panose="020B0503020204020204" pitchFamily="34" charset="-122"/>
+                        <a:cs typeface="微软雅黑" panose="020B0503020204020204" pitchFamily="34" charset="-122"/>
                       </a:endParaRPr>
                     </a:p>
                   </a:txBody>
-                  <a:tcPr marL="91440" marR="91440" marT="45720" marB="45720" anchor="ctr">
+                  <a:tcPr anchor="ctr">
                     <a:lnL w="9525" cap="flat" cmpd="sng" algn="ctr">
                       <a:solidFill>
                         <a:srgbClr val="D8DBE0"/>
@@ -10048,7 +9582,7 @@
                     <a:bodyPr/>
                     <a:lstStyle/>
                     <a:p>
-                      <a:pPr algn="ctr" indent="0" marL="0">
+                      <a:pPr marL="0" indent="0" algn="ctr">
                         <a:buNone/>
                       </a:pPr>
                       <a:r>
@@ -10056,20 +9590,20 @@
                           <a:solidFill>
                             <a:srgbClr val="1F2329"/>
                           </a:solidFill>
-                          <a:latin typeface="微软雅黑" pitchFamily="34" charset="0"/>
-                          <a:ea typeface="微软雅黑" pitchFamily="34" charset="-122"/>
-                          <a:cs typeface="微软雅黑" pitchFamily="34" charset="-120"/>
+                          <a:latin typeface="微软雅黑" panose="020B0503020204020204" pitchFamily="34" charset="-122"/>
+                          <a:ea typeface="微软雅黑" panose="020B0503020204020204" pitchFamily="34" charset="-122"/>
+                          <a:cs typeface="微软雅黑" panose="020B0503020204020204" pitchFamily="34" charset="-120"/>
                         </a:rPr>
                         <a:t>字符</a:t>
                       </a:r>
                       <a:endParaRPr lang="en-US" sz="1500" dirty="0">
-                        <a:latin typeface="微软雅黑" charset="0"/>
-                        <a:ea typeface="微软雅黑" charset="0"/>
-                        <a:cs typeface="微软雅黑" charset="0"/>
+                        <a:latin typeface="微软雅黑" panose="020B0503020204020204" pitchFamily="34" charset="-122"/>
+                        <a:ea typeface="微软雅黑" panose="020B0503020204020204" pitchFamily="34" charset="-122"/>
+                        <a:cs typeface="微软雅黑" panose="020B0503020204020204" pitchFamily="34" charset="-122"/>
                       </a:endParaRPr>
                     </a:p>
                   </a:txBody>
-                  <a:tcPr marL="91440" marR="91440" marT="45720" marB="45720" anchor="ctr">
+                  <a:tcPr anchor="ctr">
                     <a:lnL w="9525" cap="flat" cmpd="sng" algn="ctr">
                       <a:solidFill>
                         <a:srgbClr val="D8DBE0"/>
@@ -10116,7 +9650,7 @@
                     <a:bodyPr/>
                     <a:lstStyle/>
                     <a:p>
-                      <a:pPr algn="ctr" indent="0" marL="0">
+                      <a:pPr marL="0" indent="0" algn="ctr">
                         <a:buNone/>
                       </a:pPr>
                       <a:r>
@@ -10124,20 +9658,20 @@
                           <a:solidFill>
                             <a:srgbClr val="1F2329"/>
                           </a:solidFill>
-                          <a:latin typeface="微软雅黑" pitchFamily="34" charset="0"/>
-                          <a:ea typeface="微软雅黑" pitchFamily="34" charset="-122"/>
-                          <a:cs typeface="微软雅黑" pitchFamily="34" charset="-120"/>
+                          <a:latin typeface="微软雅黑" panose="020B0503020204020204" pitchFamily="34" charset="-122"/>
+                          <a:ea typeface="微软雅黑" panose="020B0503020204020204" pitchFamily="34" charset="-122"/>
+                          <a:cs typeface="微软雅黑" panose="020B0503020204020204" pitchFamily="34" charset="-120"/>
                         </a:rPr>
                         <a:t>a</a:t>
                       </a:r>
                       <a:endParaRPr lang="en-US" sz="1500" dirty="0">
-                        <a:latin typeface="微软雅黑" charset="0"/>
-                        <a:ea typeface="微软雅黑" charset="0"/>
-                        <a:cs typeface="微软雅黑" charset="0"/>
+                        <a:latin typeface="微软雅黑" panose="020B0503020204020204" pitchFamily="34" charset="-122"/>
+                        <a:ea typeface="微软雅黑" panose="020B0503020204020204" pitchFamily="34" charset="-122"/>
+                        <a:cs typeface="微软雅黑" panose="020B0503020204020204" pitchFamily="34" charset="-122"/>
                       </a:endParaRPr>
                     </a:p>
                   </a:txBody>
-                  <a:tcPr marL="91440" marR="91440" marT="45720" marB="45720" anchor="ctr">
+                  <a:tcPr anchor="ctr">
                     <a:lnL w="9525" cap="flat" cmpd="sng" algn="ctr">
                       <a:solidFill>
                         <a:srgbClr val="D8DBE0"/>
@@ -10184,7 +9718,7 @@
                     <a:bodyPr/>
                     <a:lstStyle/>
                     <a:p>
-                      <a:pPr algn="ctr" indent="0" marL="0">
+                      <a:pPr marL="0" indent="0" algn="ctr">
                         <a:buNone/>
                       </a:pPr>
                       <a:r>
@@ -10192,20 +9726,20 @@
                           <a:solidFill>
                             <a:srgbClr val="1F2329"/>
                           </a:solidFill>
-                          <a:latin typeface="微软雅黑" pitchFamily="34" charset="0"/>
-                          <a:ea typeface="微软雅黑" pitchFamily="34" charset="-122"/>
-                          <a:cs typeface="微软雅黑" pitchFamily="34" charset="-120"/>
+                          <a:latin typeface="微软雅黑" panose="020B0503020204020204" pitchFamily="34" charset="-122"/>
+                          <a:ea typeface="微软雅黑" panose="020B0503020204020204" pitchFamily="34" charset="-122"/>
+                          <a:cs typeface="微软雅黑" panose="020B0503020204020204" pitchFamily="34" charset="-120"/>
                         </a:rPr>
                         <a:t>b</a:t>
                       </a:r>
                       <a:endParaRPr lang="en-US" sz="1500" dirty="0">
-                        <a:latin typeface="微软雅黑" charset="0"/>
-                        <a:ea typeface="微软雅黑" charset="0"/>
-                        <a:cs typeface="微软雅黑" charset="0"/>
+                        <a:latin typeface="微软雅黑" panose="020B0503020204020204" pitchFamily="34" charset="-122"/>
+                        <a:ea typeface="微软雅黑" panose="020B0503020204020204" pitchFamily="34" charset="-122"/>
+                        <a:cs typeface="微软雅黑" panose="020B0503020204020204" pitchFamily="34" charset="-122"/>
                       </a:endParaRPr>
                     </a:p>
                   </a:txBody>
-                  <a:tcPr marL="91440" marR="91440" marT="45720" marB="45720" anchor="ctr">
+                  <a:tcPr anchor="ctr">
                     <a:lnL w="9525" cap="flat" cmpd="sng" algn="ctr">
                       <a:solidFill>
                         <a:srgbClr val="D8DBE0"/>
@@ -10252,7 +9786,7 @@
                     <a:bodyPr/>
                     <a:lstStyle/>
                     <a:p>
-                      <a:pPr algn="ctr" indent="0" marL="0">
+                      <a:pPr marL="0" indent="0" algn="ctr">
                         <a:buNone/>
                       </a:pPr>
                       <a:r>
@@ -10260,20 +9794,20 @@
                           <a:solidFill>
                             <a:srgbClr val="1F2329"/>
                           </a:solidFill>
-                          <a:latin typeface="微软雅黑" pitchFamily="34" charset="0"/>
-                          <a:ea typeface="微软雅黑" pitchFamily="34" charset="-122"/>
-                          <a:cs typeface="微软雅黑" pitchFamily="34" charset="-120"/>
+                          <a:latin typeface="微软雅黑" panose="020B0503020204020204" pitchFamily="34" charset="-122"/>
+                          <a:ea typeface="微软雅黑" panose="020B0503020204020204" pitchFamily="34" charset="-122"/>
+                          <a:cs typeface="微软雅黑" panose="020B0503020204020204" pitchFamily="34" charset="-120"/>
                         </a:rPr>
                         <a:t>a</a:t>
                       </a:r>
                       <a:endParaRPr lang="en-US" sz="1500" dirty="0">
-                        <a:latin typeface="微软雅黑" charset="0"/>
-                        <a:ea typeface="微软雅黑" charset="0"/>
-                        <a:cs typeface="微软雅黑" charset="0"/>
+                        <a:latin typeface="微软雅黑" panose="020B0503020204020204" pitchFamily="34" charset="-122"/>
+                        <a:ea typeface="微软雅黑" panose="020B0503020204020204" pitchFamily="34" charset="-122"/>
+                        <a:cs typeface="微软雅黑" panose="020B0503020204020204" pitchFamily="34" charset="-122"/>
                       </a:endParaRPr>
                     </a:p>
                   </a:txBody>
-                  <a:tcPr marL="91440" marR="91440" marT="45720" marB="45720" anchor="ctr">
+                  <a:tcPr anchor="ctr">
                     <a:lnL w="9525" cap="flat" cmpd="sng" algn="ctr">
                       <a:solidFill>
                         <a:srgbClr val="D8DBE0"/>
@@ -10320,7 +9854,7 @@
                     <a:bodyPr/>
                     <a:lstStyle/>
                     <a:p>
-                      <a:pPr algn="ctr" indent="0" marL="0">
+                      <a:pPr marL="0" indent="0" algn="ctr">
                         <a:buNone/>
                       </a:pPr>
                       <a:r>
@@ -10328,20 +9862,20 @@
                           <a:solidFill>
                             <a:srgbClr val="1F2329"/>
                           </a:solidFill>
-                          <a:latin typeface="微软雅黑" pitchFamily="34" charset="0"/>
-                          <a:ea typeface="微软雅黑" pitchFamily="34" charset="-122"/>
-                          <a:cs typeface="微软雅黑" pitchFamily="34" charset="-120"/>
+                          <a:latin typeface="微软雅黑" panose="020B0503020204020204" pitchFamily="34" charset="-122"/>
+                          <a:ea typeface="微软雅黑" panose="020B0503020204020204" pitchFamily="34" charset="-122"/>
+                          <a:cs typeface="微软雅黑" panose="020B0503020204020204" pitchFamily="34" charset="-120"/>
                         </a:rPr>
                         <a:t>a</a:t>
                       </a:r>
                       <a:endParaRPr lang="en-US" sz="1500" dirty="0">
-                        <a:latin typeface="微软雅黑" charset="0"/>
-                        <a:ea typeface="微软雅黑" charset="0"/>
-                        <a:cs typeface="微软雅黑" charset="0"/>
+                        <a:latin typeface="微软雅黑" panose="020B0503020204020204" pitchFamily="34" charset="-122"/>
+                        <a:ea typeface="微软雅黑" panose="020B0503020204020204" pitchFamily="34" charset="-122"/>
+                        <a:cs typeface="微软雅黑" panose="020B0503020204020204" pitchFamily="34" charset="-122"/>
                       </a:endParaRPr>
                     </a:p>
                   </a:txBody>
-                  <a:tcPr marL="91440" marR="91440" marT="45720" marB="45720" anchor="ctr">
+                  <a:tcPr anchor="ctr">
                     <a:lnL w="9525" cap="flat" cmpd="sng" algn="ctr">
                       <a:solidFill>
                         <a:srgbClr val="D8DBE0"/>
@@ -10388,7 +9922,7 @@
                     <a:bodyPr/>
                     <a:lstStyle/>
                     <a:p>
-                      <a:pPr algn="ctr" indent="0" marL="0">
+                      <a:pPr marL="0" indent="0" algn="ctr">
                         <a:buNone/>
                       </a:pPr>
                       <a:r>
@@ -10396,20 +9930,20 @@
                           <a:solidFill>
                             <a:srgbClr val="1F2329"/>
                           </a:solidFill>
-                          <a:latin typeface="微软雅黑" pitchFamily="34" charset="0"/>
-                          <a:ea typeface="微软雅黑" pitchFamily="34" charset="-122"/>
-                          <a:cs typeface="微软雅黑" pitchFamily="34" charset="-120"/>
+                          <a:latin typeface="微软雅黑" panose="020B0503020204020204" pitchFamily="34" charset="-122"/>
+                          <a:ea typeface="微软雅黑" panose="020B0503020204020204" pitchFamily="34" charset="-122"/>
+                          <a:cs typeface="微软雅黑" panose="020B0503020204020204" pitchFamily="34" charset="-120"/>
                         </a:rPr>
                         <a:t>b</a:t>
                       </a:r>
                       <a:endParaRPr lang="en-US" sz="1500" dirty="0">
-                        <a:latin typeface="微软雅黑" charset="0"/>
-                        <a:ea typeface="微软雅黑" charset="0"/>
-                        <a:cs typeface="微软雅黑" charset="0"/>
+                        <a:latin typeface="微软雅黑" panose="020B0503020204020204" pitchFamily="34" charset="-122"/>
+                        <a:ea typeface="微软雅黑" panose="020B0503020204020204" pitchFamily="34" charset="-122"/>
+                        <a:cs typeface="微软雅黑" panose="020B0503020204020204" pitchFamily="34" charset="-122"/>
                       </a:endParaRPr>
                     </a:p>
                   </a:txBody>
-                  <a:tcPr marL="91440" marR="91440" marT="45720" marB="45720" anchor="ctr">
+                  <a:tcPr anchor="ctr">
                     <a:lnL w="9525" cap="flat" cmpd="sng" algn="ctr">
                       <a:solidFill>
                         <a:srgbClr val="D8DBE0"/>
@@ -10456,7 +9990,7 @@
                     <a:bodyPr/>
                     <a:lstStyle/>
                     <a:p>
-                      <a:pPr algn="ctr" indent="0" marL="0">
+                      <a:pPr marL="0" indent="0" algn="ctr">
                         <a:buNone/>
                       </a:pPr>
                       <a:r>
@@ -10464,20 +9998,20 @@
                           <a:solidFill>
                             <a:srgbClr val="1F2329"/>
                           </a:solidFill>
-                          <a:latin typeface="微软雅黑" pitchFamily="34" charset="0"/>
-                          <a:ea typeface="微软雅黑" pitchFamily="34" charset="-122"/>
-                          <a:cs typeface="微软雅黑" pitchFamily="34" charset="-120"/>
+                          <a:latin typeface="微软雅黑" panose="020B0503020204020204" pitchFamily="34" charset="-122"/>
+                          <a:ea typeface="微软雅黑" panose="020B0503020204020204" pitchFamily="34" charset="-122"/>
+                          <a:cs typeface="微软雅黑" panose="020B0503020204020204" pitchFamily="34" charset="-120"/>
                         </a:rPr>
                         <a:t>c</a:t>
                       </a:r>
                       <a:endParaRPr lang="en-US" sz="1500" dirty="0">
-                        <a:latin typeface="微软雅黑" charset="0"/>
-                        <a:ea typeface="微软雅黑" charset="0"/>
-                        <a:cs typeface="微软雅黑" charset="0"/>
+                        <a:latin typeface="微软雅黑" panose="020B0503020204020204" pitchFamily="34" charset="-122"/>
+                        <a:ea typeface="微软雅黑" panose="020B0503020204020204" pitchFamily="34" charset="-122"/>
+                        <a:cs typeface="微软雅黑" panose="020B0503020204020204" pitchFamily="34" charset="-122"/>
                       </a:endParaRPr>
                     </a:p>
                   </a:txBody>
-                  <a:tcPr marL="91440" marR="91440" marT="45720" marB="45720" anchor="ctr">
+                  <a:tcPr anchor="ctr">
                     <a:lnL w="9525" cap="flat" cmpd="sng" algn="ctr">
                       <a:solidFill>
                         <a:srgbClr val="D8DBE0"/>
@@ -10526,7 +10060,7 @@
                     <a:bodyPr/>
                     <a:lstStyle/>
                     <a:p>
-                      <a:pPr algn="ctr" indent="0" marL="0">
+                      <a:pPr marL="0" indent="0" algn="ctr">
                         <a:buNone/>
                       </a:pPr>
                       <a:r>
@@ -10534,20 +10068,20 @@
                           <a:solidFill>
                             <a:srgbClr val="1F2329"/>
                           </a:solidFill>
-                          <a:latin typeface="微软雅黑" pitchFamily="34" charset="0"/>
-                          <a:ea typeface="微软雅黑" pitchFamily="34" charset="-122"/>
-                          <a:cs typeface="微软雅黑" pitchFamily="34" charset="-120"/>
+                          <a:latin typeface="微软雅黑" panose="020B0503020204020204" pitchFamily="34" charset="-122"/>
+                          <a:ea typeface="微软雅黑" panose="020B0503020204020204" pitchFamily="34" charset="-122"/>
+                          <a:cs typeface="微软雅黑" panose="020B0503020204020204" pitchFamily="34" charset="-120"/>
                         </a:rPr>
                         <a:t>next</a:t>
                       </a:r>
                       <a:endParaRPr lang="en-US" sz="1500" dirty="0">
-                        <a:latin typeface="微软雅黑" charset="0"/>
-                        <a:ea typeface="微软雅黑" charset="0"/>
-                        <a:cs typeface="微软雅黑" charset="0"/>
+                        <a:latin typeface="微软雅黑" panose="020B0503020204020204" pitchFamily="34" charset="-122"/>
+                        <a:ea typeface="微软雅黑" panose="020B0503020204020204" pitchFamily="34" charset="-122"/>
+                        <a:cs typeface="微软雅黑" panose="020B0503020204020204" pitchFamily="34" charset="-122"/>
                       </a:endParaRPr>
                     </a:p>
                   </a:txBody>
-                  <a:tcPr marL="91440" marR="91440" marT="45720" marB="45720" anchor="ctr">
+                  <a:tcPr anchor="ctr">
                     <a:lnL w="9525" cap="flat" cmpd="sng" algn="ctr">
                       <a:solidFill>
                         <a:srgbClr val="D8DBE0"/>
@@ -10594,7 +10128,7 @@
                     <a:bodyPr/>
                     <a:lstStyle/>
                     <a:p>
-                      <a:pPr algn="ctr" indent="0" marL="0">
+                      <a:pPr marL="0" indent="0" algn="ctr">
                         <a:buNone/>
                       </a:pPr>
                       <a:r>
@@ -10602,20 +10136,20 @@
                           <a:solidFill>
                             <a:srgbClr val="1F2329"/>
                           </a:solidFill>
-                          <a:latin typeface="微软雅黑" pitchFamily="34" charset="0"/>
-                          <a:ea typeface="微软雅黑" pitchFamily="34" charset="-122"/>
-                          <a:cs typeface="微软雅黑" pitchFamily="34" charset="-120"/>
+                          <a:latin typeface="微软雅黑" panose="020B0503020204020204" pitchFamily="34" charset="-122"/>
+                          <a:ea typeface="微软雅黑" panose="020B0503020204020204" pitchFamily="34" charset="-122"/>
+                          <a:cs typeface="微软雅黑" panose="020B0503020204020204" pitchFamily="34" charset="-120"/>
                         </a:rPr>
                         <a:t>0</a:t>
                       </a:r>
                       <a:endParaRPr lang="en-US" sz="1500" dirty="0">
-                        <a:latin typeface="微软雅黑" charset="0"/>
-                        <a:ea typeface="微软雅黑" charset="0"/>
-                        <a:cs typeface="微软雅黑" charset="0"/>
+                        <a:latin typeface="微软雅黑" panose="020B0503020204020204" pitchFamily="34" charset="-122"/>
+                        <a:ea typeface="微软雅黑" panose="020B0503020204020204" pitchFamily="34" charset="-122"/>
+                        <a:cs typeface="微软雅黑" panose="020B0503020204020204" pitchFamily="34" charset="-122"/>
                       </a:endParaRPr>
                     </a:p>
                   </a:txBody>
-                  <a:tcPr marL="91440" marR="91440" marT="45720" marB="45720" anchor="ctr">
+                  <a:tcPr anchor="ctr">
                     <a:lnL w="9525" cap="flat" cmpd="sng" algn="ctr">
                       <a:solidFill>
                         <a:srgbClr val="D8DBE0"/>
@@ -10662,7 +10196,7 @@
                     <a:bodyPr/>
                     <a:lstStyle/>
                     <a:p>
-                      <a:pPr algn="ctr" indent="0" marL="0">
+                      <a:pPr marL="0" indent="0" algn="ctr">
                         <a:buNone/>
                       </a:pPr>
                       <a:r>
@@ -10670,20 +10204,20 @@
                           <a:solidFill>
                             <a:srgbClr val="1F2329"/>
                           </a:solidFill>
-                          <a:latin typeface="微软雅黑" pitchFamily="34" charset="0"/>
-                          <a:ea typeface="微软雅黑" pitchFamily="34" charset="-122"/>
-                          <a:cs typeface="微软雅黑" pitchFamily="34" charset="-120"/>
+                          <a:latin typeface="微软雅黑" panose="020B0503020204020204" pitchFamily="34" charset="-122"/>
+                          <a:ea typeface="微软雅黑" panose="020B0503020204020204" pitchFamily="34" charset="-122"/>
+                          <a:cs typeface="微软雅黑" panose="020B0503020204020204" pitchFamily="34" charset="-120"/>
                         </a:rPr>
                         <a:t>1</a:t>
                       </a:r>
                       <a:endParaRPr lang="en-US" sz="1500" dirty="0">
-                        <a:latin typeface="微软雅黑" charset="0"/>
-                        <a:ea typeface="微软雅黑" charset="0"/>
-                        <a:cs typeface="微软雅黑" charset="0"/>
+                        <a:latin typeface="微软雅黑" panose="020B0503020204020204" pitchFamily="34" charset="-122"/>
+                        <a:ea typeface="微软雅黑" panose="020B0503020204020204" pitchFamily="34" charset="-122"/>
+                        <a:cs typeface="微软雅黑" panose="020B0503020204020204" pitchFamily="34" charset="-122"/>
                       </a:endParaRPr>
                     </a:p>
                   </a:txBody>
-                  <a:tcPr marL="91440" marR="91440" marT="45720" marB="45720" anchor="ctr">
+                  <a:tcPr anchor="ctr">
                     <a:lnL w="9525" cap="flat" cmpd="sng" algn="ctr">
                       <a:solidFill>
                         <a:srgbClr val="D8DBE0"/>
@@ -10730,7 +10264,7 @@
                     <a:bodyPr/>
                     <a:lstStyle/>
                     <a:p>
-                      <a:pPr algn="ctr" indent="0" marL="0">
+                      <a:pPr marL="0" indent="0" algn="ctr">
                         <a:buNone/>
                       </a:pPr>
                       <a:r>
@@ -10738,20 +10272,20 @@
                           <a:solidFill>
                             <a:srgbClr val="1F2329"/>
                           </a:solidFill>
-                          <a:latin typeface="微软雅黑" pitchFamily="34" charset="0"/>
-                          <a:ea typeface="微软雅黑" pitchFamily="34" charset="-122"/>
-                          <a:cs typeface="微软雅黑" pitchFamily="34" charset="-120"/>
+                          <a:latin typeface="微软雅黑" panose="020B0503020204020204" pitchFamily="34" charset="-122"/>
+                          <a:ea typeface="微软雅黑" panose="020B0503020204020204" pitchFamily="34" charset="-122"/>
+                          <a:cs typeface="微软雅黑" panose="020B0503020204020204" pitchFamily="34" charset="-120"/>
                         </a:rPr>
                         <a:t>1</a:t>
                       </a:r>
                       <a:endParaRPr lang="en-US" sz="1500" dirty="0">
-                        <a:latin typeface="微软雅黑" charset="0"/>
-                        <a:ea typeface="微软雅黑" charset="0"/>
-                        <a:cs typeface="微软雅黑" charset="0"/>
+                        <a:latin typeface="微软雅黑" panose="020B0503020204020204" pitchFamily="34" charset="-122"/>
+                        <a:ea typeface="微软雅黑" panose="020B0503020204020204" pitchFamily="34" charset="-122"/>
+                        <a:cs typeface="微软雅黑" panose="020B0503020204020204" pitchFamily="34" charset="-122"/>
                       </a:endParaRPr>
                     </a:p>
                   </a:txBody>
-                  <a:tcPr marL="91440" marR="91440" marT="45720" marB="45720" anchor="ctr">
+                  <a:tcPr anchor="ctr">
                     <a:lnL w="9525" cap="flat" cmpd="sng" algn="ctr">
                       <a:solidFill>
                         <a:srgbClr val="D8DBE0"/>
@@ -10798,7 +10332,7 @@
                     <a:bodyPr/>
                     <a:lstStyle/>
                     <a:p>
-                      <a:pPr algn="ctr" indent="0" marL="0">
+                      <a:pPr marL="0" indent="0" algn="ctr">
                         <a:buNone/>
                       </a:pPr>
                       <a:r>
@@ -10806,20 +10340,20 @@
                           <a:solidFill>
                             <a:srgbClr val="1F2329"/>
                           </a:solidFill>
-                          <a:latin typeface="微软雅黑" pitchFamily="34" charset="0"/>
-                          <a:ea typeface="微软雅黑" pitchFamily="34" charset="-122"/>
-                          <a:cs typeface="微软雅黑" pitchFamily="34" charset="-120"/>
+                          <a:latin typeface="微软雅黑" panose="020B0503020204020204" pitchFamily="34" charset="-122"/>
+                          <a:ea typeface="微软雅黑" panose="020B0503020204020204" pitchFamily="34" charset="-122"/>
+                          <a:cs typeface="微软雅黑" panose="020B0503020204020204" pitchFamily="34" charset="-120"/>
                         </a:rPr>
                         <a:t>2</a:t>
                       </a:r>
                       <a:endParaRPr lang="en-US" sz="1500" dirty="0">
-                        <a:latin typeface="微软雅黑" charset="0"/>
-                        <a:ea typeface="微软雅黑" charset="0"/>
-                        <a:cs typeface="微软雅黑" charset="0"/>
+                        <a:latin typeface="微软雅黑" panose="020B0503020204020204" pitchFamily="34" charset="-122"/>
+                        <a:ea typeface="微软雅黑" panose="020B0503020204020204" pitchFamily="34" charset="-122"/>
+                        <a:cs typeface="微软雅黑" panose="020B0503020204020204" pitchFamily="34" charset="-122"/>
                       </a:endParaRPr>
                     </a:p>
                   </a:txBody>
-                  <a:tcPr marL="91440" marR="91440" marT="45720" marB="45720" anchor="ctr">
+                  <a:tcPr anchor="ctr">
                     <a:lnL w="9525" cap="flat" cmpd="sng" algn="ctr">
                       <a:solidFill>
                         <a:srgbClr val="D8DBE0"/>
@@ -10866,7 +10400,7 @@
                     <a:bodyPr/>
                     <a:lstStyle/>
                     <a:p>
-                      <a:pPr algn="ctr" indent="0" marL="0">
+                      <a:pPr marL="0" indent="0" algn="ctr">
                         <a:buNone/>
                       </a:pPr>
                       <a:r>
@@ -10874,20 +10408,20 @@
                           <a:solidFill>
                             <a:srgbClr val="1F2329"/>
                           </a:solidFill>
-                          <a:latin typeface="微软雅黑" pitchFamily="34" charset="0"/>
-                          <a:ea typeface="微软雅黑" pitchFamily="34" charset="-122"/>
-                          <a:cs typeface="微软雅黑" pitchFamily="34" charset="-120"/>
+                          <a:latin typeface="微软雅黑" panose="020B0503020204020204" pitchFamily="34" charset="-122"/>
+                          <a:ea typeface="微软雅黑" panose="020B0503020204020204" pitchFamily="34" charset="-122"/>
+                          <a:cs typeface="微软雅黑" panose="020B0503020204020204" pitchFamily="34" charset="-120"/>
                         </a:rPr>
                         <a:t>2</a:t>
                       </a:r>
                       <a:endParaRPr lang="en-US" sz="1500" dirty="0">
-                        <a:latin typeface="微软雅黑" charset="0"/>
-                        <a:ea typeface="微软雅黑" charset="0"/>
-                        <a:cs typeface="微软雅黑" charset="0"/>
+                        <a:latin typeface="微软雅黑" panose="020B0503020204020204" pitchFamily="34" charset="-122"/>
+                        <a:ea typeface="微软雅黑" panose="020B0503020204020204" pitchFamily="34" charset="-122"/>
+                        <a:cs typeface="微软雅黑" panose="020B0503020204020204" pitchFamily="34" charset="-122"/>
                       </a:endParaRPr>
                     </a:p>
                   </a:txBody>
-                  <a:tcPr marL="91440" marR="91440" marT="45720" marB="45720" anchor="ctr">
+                  <a:tcPr anchor="ctr">
                     <a:lnL w="9525" cap="flat" cmpd="sng" algn="ctr">
                       <a:solidFill>
                         <a:srgbClr val="D8DBE0"/>
@@ -10934,7 +10468,7 @@
                     <a:bodyPr/>
                     <a:lstStyle/>
                     <a:p>
-                      <a:pPr algn="ctr" indent="0" marL="0">
+                      <a:pPr marL="0" indent="0" algn="ctr">
                         <a:buNone/>
                       </a:pPr>
                       <a:r>
@@ -10942,20 +10476,20 @@
                           <a:solidFill>
                             <a:srgbClr val="1F2329"/>
                           </a:solidFill>
-                          <a:latin typeface="微软雅黑" pitchFamily="34" charset="0"/>
-                          <a:ea typeface="微软雅黑" pitchFamily="34" charset="-122"/>
-                          <a:cs typeface="微软雅黑" pitchFamily="34" charset="-120"/>
+                          <a:latin typeface="微软雅黑" panose="020B0503020204020204" pitchFamily="34" charset="-122"/>
+                          <a:ea typeface="微软雅黑" panose="020B0503020204020204" pitchFamily="34" charset="-122"/>
+                          <a:cs typeface="微软雅黑" panose="020B0503020204020204" pitchFamily="34" charset="-120"/>
                         </a:rPr>
                         <a:t>3</a:t>
                       </a:r>
                       <a:endParaRPr lang="en-US" sz="1500" dirty="0">
-                        <a:latin typeface="微软雅黑" charset="0"/>
-                        <a:ea typeface="微软雅黑" charset="0"/>
-                        <a:cs typeface="微软雅黑" charset="0"/>
+                        <a:latin typeface="微软雅黑" panose="020B0503020204020204" pitchFamily="34" charset="-122"/>
+                        <a:ea typeface="微软雅黑" panose="020B0503020204020204" pitchFamily="34" charset="-122"/>
+                        <a:cs typeface="微软雅黑" panose="020B0503020204020204" pitchFamily="34" charset="-122"/>
                       </a:endParaRPr>
                     </a:p>
                   </a:txBody>
-                  <a:tcPr marL="91440" marR="91440" marT="45720" marB="45720" anchor="ctr">
+                  <a:tcPr anchor="ctr">
                     <a:lnL w="9525" cap="flat" cmpd="sng" algn="ctr">
                       <a:solidFill>
                         <a:srgbClr val="D8DBE0"/>
@@ -11004,7 +10538,7 @@
                     <a:bodyPr/>
                     <a:lstStyle/>
                     <a:p>
-                      <a:pPr algn="ctr" indent="0" marL="0">
+                      <a:pPr marL="0" indent="0" algn="ctr">
                         <a:buNone/>
                       </a:pPr>
                       <a:r>
@@ -11012,20 +10546,20 @@
                           <a:solidFill>
                             <a:srgbClr val="1F2329"/>
                           </a:solidFill>
-                          <a:latin typeface="微软雅黑" pitchFamily="34" charset="0"/>
-                          <a:ea typeface="微软雅黑" pitchFamily="34" charset="-122"/>
-                          <a:cs typeface="微软雅黑" pitchFamily="34" charset="-120"/>
+                          <a:latin typeface="微软雅黑" panose="020B0503020204020204" pitchFamily="34" charset="-122"/>
+                          <a:ea typeface="微软雅黑" panose="020B0503020204020204" pitchFamily="34" charset="-122"/>
+                          <a:cs typeface="微软雅黑" panose="020B0503020204020204" pitchFamily="34" charset="-120"/>
                         </a:rPr>
                         <a:t>nextval</a:t>
                       </a:r>
                       <a:endParaRPr lang="en-US" sz="1500" dirty="0">
-                        <a:latin typeface="微软雅黑" charset="0"/>
-                        <a:ea typeface="微软雅黑" charset="0"/>
-                        <a:cs typeface="微软雅黑" charset="0"/>
+                        <a:latin typeface="微软雅黑" panose="020B0503020204020204" pitchFamily="34" charset="-122"/>
+                        <a:ea typeface="微软雅黑" panose="020B0503020204020204" pitchFamily="34" charset="-122"/>
+                        <a:cs typeface="微软雅黑" panose="020B0503020204020204" pitchFamily="34" charset="-122"/>
                       </a:endParaRPr>
                     </a:p>
                   </a:txBody>
-                  <a:tcPr marL="91440" marR="91440" marT="45720" marB="45720" anchor="ctr">
+                  <a:tcPr anchor="ctr">
                     <a:lnL w="9525" cap="flat" cmpd="sng" algn="ctr">
                       <a:solidFill>
                         <a:srgbClr val="D8DBE0"/>
@@ -11072,7 +10606,7 @@
                     <a:bodyPr/>
                     <a:lstStyle/>
                     <a:p>
-                      <a:pPr algn="ctr" indent="0" marL="0">
+                      <a:pPr marL="0" indent="0" algn="ctr">
                         <a:buNone/>
                       </a:pPr>
                       <a:r>
@@ -11080,20 +10614,20 @@
                           <a:solidFill>
                             <a:srgbClr val="1F2329"/>
                           </a:solidFill>
-                          <a:latin typeface="微软雅黑" pitchFamily="34" charset="0"/>
-                          <a:ea typeface="微软雅黑" pitchFamily="34" charset="-122"/>
-                          <a:cs typeface="微软雅黑" pitchFamily="34" charset="-120"/>
+                          <a:latin typeface="微软雅黑" panose="020B0503020204020204" pitchFamily="34" charset="-122"/>
+                          <a:ea typeface="微软雅黑" panose="020B0503020204020204" pitchFamily="34" charset="-122"/>
+                          <a:cs typeface="微软雅黑" panose="020B0503020204020204" pitchFamily="34" charset="-120"/>
                         </a:rPr>
                         <a:t>0</a:t>
                       </a:r>
                       <a:endParaRPr lang="en-US" sz="1500" dirty="0">
-                        <a:latin typeface="微软雅黑" charset="0"/>
-                        <a:ea typeface="微软雅黑" charset="0"/>
-                        <a:cs typeface="微软雅黑" charset="0"/>
+                        <a:latin typeface="微软雅黑" panose="020B0503020204020204" pitchFamily="34" charset="-122"/>
+                        <a:ea typeface="微软雅黑" panose="020B0503020204020204" pitchFamily="34" charset="-122"/>
+                        <a:cs typeface="微软雅黑" panose="020B0503020204020204" pitchFamily="34" charset="-122"/>
                       </a:endParaRPr>
                     </a:p>
                   </a:txBody>
-                  <a:tcPr marL="91440" marR="91440" marT="45720" marB="45720" anchor="ctr">
+                  <a:tcPr anchor="ctr">
                     <a:lnL w="9525" cap="flat" cmpd="sng" algn="ctr">
                       <a:solidFill>
                         <a:srgbClr val="D8DBE0"/>
@@ -11140,7 +10674,7 @@
                     <a:bodyPr/>
                     <a:lstStyle/>
                     <a:p>
-                      <a:pPr algn="ctr" indent="0" marL="0">
+                      <a:pPr marL="0" indent="0" algn="ctr">
                         <a:buNone/>
                       </a:pPr>
                       <a:r>
@@ -11148,20 +10682,20 @@
                           <a:solidFill>
                             <a:srgbClr val="1F2329"/>
                           </a:solidFill>
-                          <a:latin typeface="微软雅黑" pitchFamily="34" charset="0"/>
-                          <a:ea typeface="微软雅黑" pitchFamily="34" charset="-122"/>
-                          <a:cs typeface="微软雅黑" pitchFamily="34" charset="-120"/>
+                          <a:latin typeface="微软雅黑" panose="020B0503020204020204" pitchFamily="34" charset="-122"/>
+                          <a:ea typeface="微软雅黑" panose="020B0503020204020204" pitchFamily="34" charset="-122"/>
+                          <a:cs typeface="微软雅黑" panose="020B0503020204020204" pitchFamily="34" charset="-120"/>
                         </a:rPr>
                         <a:t>1</a:t>
                       </a:r>
                       <a:endParaRPr lang="en-US" sz="1500" dirty="0">
-                        <a:latin typeface="微软雅黑" charset="0"/>
-                        <a:ea typeface="微软雅黑" charset="0"/>
-                        <a:cs typeface="微软雅黑" charset="0"/>
+                        <a:latin typeface="微软雅黑" panose="020B0503020204020204" pitchFamily="34" charset="-122"/>
+                        <a:ea typeface="微软雅黑" panose="020B0503020204020204" pitchFamily="34" charset="-122"/>
+                        <a:cs typeface="微软雅黑" panose="020B0503020204020204" pitchFamily="34" charset="-122"/>
                       </a:endParaRPr>
                     </a:p>
                   </a:txBody>
-                  <a:tcPr marL="91440" marR="91440" marT="45720" marB="45720" anchor="ctr">
+                  <a:tcPr anchor="ctr">
                     <a:lnL w="9525" cap="flat" cmpd="sng" algn="ctr">
                       <a:solidFill>
                         <a:srgbClr val="D8DBE0"/>
@@ -11208,7 +10742,7 @@
                     <a:bodyPr/>
                     <a:lstStyle/>
                     <a:p>
-                      <a:pPr algn="ctr" indent="0" marL="0">
+                      <a:pPr marL="0" indent="0" algn="ctr">
                         <a:buNone/>
                       </a:pPr>
                       <a:r>
@@ -11216,20 +10750,20 @@
                           <a:solidFill>
                             <a:srgbClr val="1F2329"/>
                           </a:solidFill>
-                          <a:latin typeface="微软雅黑" pitchFamily="34" charset="0"/>
-                          <a:ea typeface="微软雅黑" pitchFamily="34" charset="-122"/>
-                          <a:cs typeface="微软雅黑" pitchFamily="34" charset="-120"/>
+                          <a:latin typeface="微软雅黑" panose="020B0503020204020204" pitchFamily="34" charset="-122"/>
+                          <a:ea typeface="微软雅黑" panose="020B0503020204020204" pitchFamily="34" charset="-122"/>
+                          <a:cs typeface="微软雅黑" panose="020B0503020204020204" pitchFamily="34" charset="-120"/>
                         </a:rPr>
                         <a:t>0</a:t>
                       </a:r>
                       <a:endParaRPr lang="en-US" sz="1500" dirty="0">
-                        <a:latin typeface="微软雅黑" charset="0"/>
-                        <a:ea typeface="微软雅黑" charset="0"/>
-                        <a:cs typeface="微软雅黑" charset="0"/>
+                        <a:latin typeface="微软雅黑" panose="020B0503020204020204" pitchFamily="34" charset="-122"/>
+                        <a:ea typeface="微软雅黑" panose="020B0503020204020204" pitchFamily="34" charset="-122"/>
+                        <a:cs typeface="微软雅黑" panose="020B0503020204020204" pitchFamily="34" charset="-122"/>
                       </a:endParaRPr>
                     </a:p>
                   </a:txBody>
-                  <a:tcPr marL="91440" marR="91440" marT="45720" marB="45720" anchor="ctr">
+                  <a:tcPr anchor="ctr">
                     <a:lnL w="9525" cap="flat" cmpd="sng" algn="ctr">
                       <a:solidFill>
                         <a:srgbClr val="D8DBE0"/>
@@ -11276,7 +10810,7 @@
                     <a:bodyPr/>
                     <a:lstStyle/>
                     <a:p>
-                      <a:pPr algn="ctr" indent="0" marL="0">
+                      <a:pPr marL="0" indent="0" algn="ctr">
                         <a:buNone/>
                       </a:pPr>
                       <a:r>
@@ -11284,20 +10818,20 @@
                           <a:solidFill>
                             <a:srgbClr val="1F2329"/>
                           </a:solidFill>
-                          <a:latin typeface="微软雅黑" pitchFamily="34" charset="0"/>
-                          <a:ea typeface="微软雅黑" pitchFamily="34" charset="-122"/>
-                          <a:cs typeface="微软雅黑" pitchFamily="34" charset="-120"/>
+                          <a:latin typeface="微软雅黑" panose="020B0503020204020204" pitchFamily="34" charset="-122"/>
+                          <a:ea typeface="微软雅黑" panose="020B0503020204020204" pitchFamily="34" charset="-122"/>
+                          <a:cs typeface="微软雅黑" panose="020B0503020204020204" pitchFamily="34" charset="-120"/>
                         </a:rPr>
                         <a:t>2</a:t>
                       </a:r>
                       <a:endParaRPr lang="en-US" sz="1500" dirty="0">
-                        <a:latin typeface="微软雅黑" charset="0"/>
-                        <a:ea typeface="微软雅黑" charset="0"/>
-                        <a:cs typeface="微软雅黑" charset="0"/>
+                        <a:latin typeface="微软雅黑" panose="020B0503020204020204" pitchFamily="34" charset="-122"/>
+                        <a:ea typeface="微软雅黑" panose="020B0503020204020204" pitchFamily="34" charset="-122"/>
+                        <a:cs typeface="微软雅黑" panose="020B0503020204020204" pitchFamily="34" charset="-122"/>
                       </a:endParaRPr>
                     </a:p>
                   </a:txBody>
-                  <a:tcPr marL="91440" marR="91440" marT="45720" marB="45720" anchor="ctr">
+                  <a:tcPr anchor="ctr">
                     <a:lnL w="9525" cap="flat" cmpd="sng" algn="ctr">
                       <a:solidFill>
                         <a:srgbClr val="D8DBE0"/>
@@ -11344,7 +10878,7 @@
                     <a:bodyPr/>
                     <a:lstStyle/>
                     <a:p>
-                      <a:pPr algn="ctr" indent="0" marL="0">
+                      <a:pPr marL="0" indent="0" algn="ctr">
                         <a:buNone/>
                       </a:pPr>
                       <a:r>
@@ -11352,20 +10886,20 @@
                           <a:solidFill>
                             <a:srgbClr val="1F2329"/>
                           </a:solidFill>
-                          <a:latin typeface="微软雅黑" pitchFamily="34" charset="0"/>
-                          <a:ea typeface="微软雅黑" pitchFamily="34" charset="-122"/>
-                          <a:cs typeface="微软雅黑" pitchFamily="34" charset="-120"/>
+                          <a:latin typeface="微软雅黑" panose="020B0503020204020204" pitchFamily="34" charset="-122"/>
+                          <a:ea typeface="微软雅黑" panose="020B0503020204020204" pitchFamily="34" charset="-122"/>
+                          <a:cs typeface="微软雅黑" panose="020B0503020204020204" pitchFamily="34" charset="-120"/>
                         </a:rPr>
                         <a:t>1</a:t>
                       </a:r>
                       <a:endParaRPr lang="en-US" sz="1500" dirty="0">
-                        <a:latin typeface="微软雅黑" charset="0"/>
-                        <a:ea typeface="微软雅黑" charset="0"/>
-                        <a:cs typeface="微软雅黑" charset="0"/>
+                        <a:latin typeface="微软雅黑" panose="020B0503020204020204" pitchFamily="34" charset="-122"/>
+                        <a:ea typeface="微软雅黑" panose="020B0503020204020204" pitchFamily="34" charset="-122"/>
+                        <a:cs typeface="微软雅黑" panose="020B0503020204020204" pitchFamily="34" charset="-122"/>
                       </a:endParaRPr>
                     </a:p>
                   </a:txBody>
-                  <a:tcPr marL="91440" marR="91440" marT="45720" marB="45720" anchor="ctr">
+                  <a:tcPr anchor="ctr">
                     <a:lnL w="9525" cap="flat" cmpd="sng" algn="ctr">
                       <a:solidFill>
                         <a:srgbClr val="D8DBE0"/>
@@ -11412,7 +10946,7 @@
                     <a:bodyPr/>
                     <a:lstStyle/>
                     <a:p>
-                      <a:pPr algn="ctr" indent="0" marL="0">
+                      <a:pPr marL="0" indent="0" algn="ctr">
                         <a:buNone/>
                       </a:pPr>
                       <a:r>
@@ -11420,20 +10954,20 @@
                           <a:solidFill>
                             <a:srgbClr val="1F2329"/>
                           </a:solidFill>
-                          <a:latin typeface="微软雅黑" pitchFamily="34" charset="0"/>
-                          <a:ea typeface="微软雅黑" pitchFamily="34" charset="-122"/>
-                          <a:cs typeface="微软雅黑" pitchFamily="34" charset="-120"/>
+                          <a:latin typeface="微软雅黑" panose="020B0503020204020204" pitchFamily="34" charset="-122"/>
+                          <a:ea typeface="微软雅黑" panose="020B0503020204020204" pitchFamily="34" charset="-122"/>
+                          <a:cs typeface="微软雅黑" panose="020B0503020204020204" pitchFamily="34" charset="-120"/>
                         </a:rPr>
                         <a:t>3</a:t>
                       </a:r>
                       <a:endParaRPr lang="en-US" sz="1500" dirty="0">
-                        <a:latin typeface="微软雅黑" charset="0"/>
-                        <a:ea typeface="微软雅黑" charset="0"/>
-                        <a:cs typeface="微软雅黑" charset="0"/>
+                        <a:latin typeface="微软雅黑" panose="020B0503020204020204" pitchFamily="34" charset="-122"/>
+                        <a:ea typeface="微软雅黑" panose="020B0503020204020204" pitchFamily="34" charset="-122"/>
+                        <a:cs typeface="微软雅黑" panose="020B0503020204020204" pitchFamily="34" charset="-122"/>
                       </a:endParaRPr>
                     </a:p>
                   </a:txBody>
-                  <a:tcPr marL="91440" marR="91440" marT="45720" marB="45720" anchor="ctr">
+                  <a:tcPr anchor="ctr">
                     <a:lnL w="9525" cap="flat" cmpd="sng" algn="ctr">
                       <a:solidFill>
                         <a:srgbClr val="D8DBE0"/>
@@ -11495,13 +11029,12 @@
             <a:avLst/>
           </a:prstGeom>
           <a:noFill/>
-          <a:ln/>
         </p:spPr>
         <p:txBody>
           <a:bodyPr wrap="square" rtlCol="0" anchor="t"/>
           <a:lstStyle/>
           <a:p>
-            <a:pPr algn="l" indent="0" marL="0">
+            <a:pPr marL="0" indent="0" algn="l">
               <a:buNone/>
             </a:pPr>
             <a:r>
@@ -11509,9 +11042,9 @@
                 <a:solidFill>
                   <a:srgbClr val="8A9099"/>
                 </a:solidFill>
-                <a:latin typeface="微软雅黑" pitchFamily="34" charset="0"/>
-                <a:ea typeface="微软雅黑" pitchFamily="34" charset="-122"/>
-                <a:cs typeface="微软雅黑" pitchFamily="34" charset="-120"/>
+                <a:latin typeface="微软雅黑" panose="020B0503020204020204" pitchFamily="34" charset="-122"/>
+                <a:ea typeface="微软雅黑" panose="020B0503020204020204" pitchFamily="34" charset="-122"/>
+                <a:cs typeface="微软雅黑" panose="020B0503020204020204" pitchFamily="34" charset="-120"/>
               </a:rPr>
               <a:t>先盖住后两行自己算：next[1]=0、next[2]=1 是规定；其余看前 j-1 个字符的最长相等前后缀长度+1。nextval：字符等于 next 指向的字符就取 nextval[next[j]]，如 j=3 的 a 等于 next[3]=1 位的 a，故 nextval[3]=nextval[1]=0</a:t>
             </a:r>
@@ -11570,7 +11103,7 @@
     </a:clrScheme>
     <a:fontScheme name="Office">
       <a:majorFont>
-        <a:latin typeface="Calibri Light" panose="020F0302020204030204"/>
+        <a:latin typeface="Calibri Light"/>
         <a:ea typeface=""/>
         <a:cs typeface=""/>
         <a:font script="Jpan" typeface="游ゴシック Light"/>
@@ -11603,26 +11136,9 @@
         <a:font script="Viet" typeface="Times New Roman"/>
         <a:font script="Uigh" typeface="Microsoft Uighur"/>
         <a:font script="Geor" typeface="Sylfaen"/>
-        <a:font script="Armn" typeface="Arial"/>
-        <a:font script="Bugi" typeface="Leelawadee UI"/>
-        <a:font script="Bopo" typeface="Microsoft JhengHei"/>
-        <a:font script="Java" typeface="Javanese Text"/>
-        <a:font script="Lisu" typeface="Segoe UI"/>
-        <a:font script="Mymr" typeface="Myanmar Text"/>
-        <a:font script="Nkoo" typeface="Ebrima"/>
-        <a:font script="Olck" typeface="Nirmala UI"/>
-        <a:font script="Osma" typeface="Ebrima"/>
-        <a:font script="Phag" typeface="Phagspa"/>
-        <a:font script="Syrn" typeface="Estrangelo Edessa"/>
-        <a:font script="Syrj" typeface="Estrangelo Edessa"/>
-        <a:font script="Syre" typeface="Estrangelo Edessa"/>
-        <a:font script="Sora" typeface="Nirmala UI"/>
-        <a:font script="Tale" typeface="Microsoft Tai Le"/>
-        <a:font script="Talu" typeface="Microsoft New Tai Lue"/>
-        <a:font script="Tfng" typeface="Ebrima"/>
       </a:majorFont>
       <a:minorFont>
-        <a:latin typeface="Calibri" panose="020F0502020204030204"/>
+        <a:latin typeface="Calibri"/>
         <a:ea typeface=""/>
         <a:cs typeface=""/>
         <a:font script="Jpan" typeface="游ゴシック"/>
@@ -11655,23 +11171,6 @@
         <a:font script="Viet" typeface="Arial"/>
         <a:font script="Uigh" typeface="Microsoft Uighur"/>
         <a:font script="Geor" typeface="Sylfaen"/>
-        <a:font script="Armn" typeface="Arial"/>
-        <a:font script="Bugi" typeface="Leelawadee UI"/>
-        <a:font script="Bopo" typeface="Microsoft JhengHei"/>
-        <a:font script="Java" typeface="Javanese Text"/>
-        <a:font script="Lisu" typeface="Segoe UI"/>
-        <a:font script="Mymr" typeface="Myanmar Text"/>
-        <a:font script="Nkoo" typeface="Ebrima"/>
-        <a:font script="Olck" typeface="Nirmala UI"/>
-        <a:font script="Osma" typeface="Ebrima"/>
-        <a:font script="Phag" typeface="Phagspa"/>
-        <a:font script="Syrn" typeface="Estrangelo Edessa"/>
-        <a:font script="Syrj" typeface="Estrangelo Edessa"/>
-        <a:font script="Syre" typeface="Estrangelo Edessa"/>
-        <a:font script="Sora" typeface="Nirmala UI"/>
-        <a:font script="Tale" typeface="Microsoft Tai Le"/>
-        <a:font script="Talu" typeface="Microsoft New Tai Lue"/>
-        <a:font script="Tfng" typeface="Ebrima"/>
       </a:minorFont>
     </a:fontScheme>
     <a:fmtScheme name="Office">
@@ -11812,8 +11311,265 @@
       </a:bgFillStyleLst>
     </a:fmtScheme>
   </a:themeElements>
-  <a:objectDefaults/>
-  <a:extraClrSchemeLst/>
+  <a:extLst>
+    <a:ext uri="{05A4C25C-085E-4340-85A3-A5531E510DB2}">
+      <thm15:themeFamily xmlns:thm15="http://schemas.microsoft.com/office/thememl/2012/main" name="Office Theme" id="{62F939B6-93AF-4DB8-9C6B-D6C7DFDC589F}" vid="{4A3C46E8-61CC-4603-A589-7422A47A8E4A}"/>
+    </a:ext>
+  </a:extLst>
+</a:theme>
+</file>
+
+<file path=ppt/theme/theme2.xml><?xml version="1.0" encoding="utf-8"?>
+<a:theme xmlns:a="http://schemas.openxmlformats.org/drawingml/2006/main" name="Office Theme">
+  <a:themeElements>
+    <a:clrScheme name="Office">
+      <a:dk1>
+        <a:sysClr val="windowText" lastClr="000000"/>
+      </a:dk1>
+      <a:lt1>
+        <a:sysClr val="window" lastClr="FFFFFF"/>
+      </a:lt1>
+      <a:dk2>
+        <a:srgbClr val="44546A"/>
+      </a:dk2>
+      <a:lt2>
+        <a:srgbClr val="E7E6E6"/>
+      </a:lt2>
+      <a:accent1>
+        <a:srgbClr val="4472C4"/>
+      </a:accent1>
+      <a:accent2>
+        <a:srgbClr val="ED7D31"/>
+      </a:accent2>
+      <a:accent3>
+        <a:srgbClr val="A5A5A5"/>
+      </a:accent3>
+      <a:accent4>
+        <a:srgbClr val="FFC000"/>
+      </a:accent4>
+      <a:accent5>
+        <a:srgbClr val="5B9BD5"/>
+      </a:accent5>
+      <a:accent6>
+        <a:srgbClr val="70AD47"/>
+      </a:accent6>
+      <a:hlink>
+        <a:srgbClr val="0563C1"/>
+      </a:hlink>
+      <a:folHlink>
+        <a:srgbClr val="954F72"/>
+      </a:folHlink>
+    </a:clrScheme>
+    <a:fontScheme name="Office">
+      <a:majorFont>
+        <a:latin typeface="Calibri Light"/>
+        <a:ea typeface=""/>
+        <a:cs typeface=""/>
+        <a:font script="Jpan" typeface="游ゴシック Light"/>
+        <a:font script="Hang" typeface="맑은 고딕"/>
+        <a:font script="Hans" typeface="等线 Light"/>
+        <a:font script="Hant" typeface="新細明體"/>
+        <a:font script="Arab" typeface="Times New Roman"/>
+        <a:font script="Hebr" typeface="Times New Roman"/>
+        <a:font script="Thai" typeface="Angsana New"/>
+        <a:font script="Ethi" typeface="Nyala"/>
+        <a:font script="Beng" typeface="Vrinda"/>
+        <a:font script="Gujr" typeface="Shruti"/>
+        <a:font script="Khmr" typeface="MoolBoran"/>
+        <a:font script="Knda" typeface="Tunga"/>
+        <a:font script="Guru" typeface="Raavi"/>
+        <a:font script="Cans" typeface="Euphemia"/>
+        <a:font script="Cher" typeface="Plantagenet Cherokee"/>
+        <a:font script="Yiii" typeface="Microsoft Yi Baiti"/>
+        <a:font script="Tibt" typeface="Microsoft Himalaya"/>
+        <a:font script="Thaa" typeface="MV Boli"/>
+        <a:font script="Deva" typeface="Mangal"/>
+        <a:font script="Telu" typeface="Gautami"/>
+        <a:font script="Taml" typeface="Latha"/>
+        <a:font script="Syrc" typeface="Estrangelo Edessa"/>
+        <a:font script="Orya" typeface="Kalinga"/>
+        <a:font script="Mlym" typeface="Kartika"/>
+        <a:font script="Laoo" typeface="DokChampa"/>
+        <a:font script="Sinh" typeface="Iskoola Pota"/>
+        <a:font script="Mong" typeface="Mongolian Baiti"/>
+        <a:font script="Viet" typeface="Times New Roman"/>
+        <a:font script="Uigh" typeface="Microsoft Uighur"/>
+        <a:font script="Geor" typeface="Sylfaen"/>
+      </a:majorFont>
+      <a:minorFont>
+        <a:latin typeface="Calibri"/>
+        <a:ea typeface=""/>
+        <a:cs typeface=""/>
+        <a:font script="Jpan" typeface="游ゴシック"/>
+        <a:font script="Hang" typeface="맑은 고딕"/>
+        <a:font script="Hans" typeface="等线"/>
+        <a:font script="Hant" typeface="新細明體"/>
+        <a:font script="Arab" typeface="Arial"/>
+        <a:font script="Hebr" typeface="Arial"/>
+        <a:font script="Thai" typeface="Cordia New"/>
+        <a:font script="Ethi" typeface="Nyala"/>
+        <a:font script="Beng" typeface="Vrinda"/>
+        <a:font script="Gujr" typeface="Shruti"/>
+        <a:font script="Khmr" typeface="DaunPenh"/>
+        <a:font script="Knda" typeface="Tunga"/>
+        <a:font script="Guru" typeface="Raavi"/>
+        <a:font script="Cans" typeface="Euphemia"/>
+        <a:font script="Cher" typeface="Plantagenet Cherokee"/>
+        <a:font script="Yiii" typeface="Microsoft Yi Baiti"/>
+        <a:font script="Tibt" typeface="Microsoft Himalaya"/>
+        <a:font script="Thaa" typeface="MV Boli"/>
+        <a:font script="Deva" typeface="Mangal"/>
+        <a:font script="Telu" typeface="Gautami"/>
+        <a:font script="Taml" typeface="Latha"/>
+        <a:font script="Syrc" typeface="Estrangelo Edessa"/>
+        <a:font script="Orya" typeface="Kalinga"/>
+        <a:font script="Mlym" typeface="Kartika"/>
+        <a:font script="Laoo" typeface="DokChampa"/>
+        <a:font script="Sinh" typeface="Iskoola Pota"/>
+        <a:font script="Mong" typeface="Mongolian Baiti"/>
+        <a:font script="Viet" typeface="Arial"/>
+        <a:font script="Uigh" typeface="Microsoft Uighur"/>
+        <a:font script="Geor" typeface="Sylfaen"/>
+      </a:minorFont>
+    </a:fontScheme>
+    <a:fmtScheme name="Office">
+      <a:fillStyleLst>
+        <a:solidFill>
+          <a:schemeClr val="phClr"/>
+        </a:solidFill>
+        <a:gradFill rotWithShape="1">
+          <a:gsLst>
+            <a:gs pos="0">
+              <a:schemeClr val="phClr">
+                <a:lumMod val="110000"/>
+                <a:satMod val="105000"/>
+                <a:tint val="67000"/>
+              </a:schemeClr>
+            </a:gs>
+            <a:gs pos="50000">
+              <a:schemeClr val="phClr">
+                <a:lumMod val="105000"/>
+                <a:satMod val="103000"/>
+                <a:tint val="73000"/>
+              </a:schemeClr>
+            </a:gs>
+            <a:gs pos="100000">
+              <a:schemeClr val="phClr">
+                <a:lumMod val="105000"/>
+                <a:satMod val="109000"/>
+                <a:tint val="81000"/>
+              </a:schemeClr>
+            </a:gs>
+          </a:gsLst>
+          <a:lin ang="5400000" scaled="0"/>
+        </a:gradFill>
+        <a:gradFill rotWithShape="1">
+          <a:gsLst>
+            <a:gs pos="0">
+              <a:schemeClr val="phClr">
+                <a:satMod val="103000"/>
+                <a:lumMod val="102000"/>
+                <a:tint val="94000"/>
+              </a:schemeClr>
+            </a:gs>
+            <a:gs pos="50000">
+              <a:schemeClr val="phClr">
+                <a:satMod val="110000"/>
+                <a:lumMod val="100000"/>
+                <a:shade val="100000"/>
+              </a:schemeClr>
+            </a:gs>
+            <a:gs pos="100000">
+              <a:schemeClr val="phClr">
+                <a:lumMod val="99000"/>
+                <a:satMod val="120000"/>
+                <a:shade val="78000"/>
+              </a:schemeClr>
+            </a:gs>
+          </a:gsLst>
+          <a:lin ang="5400000" scaled="0"/>
+        </a:gradFill>
+      </a:fillStyleLst>
+      <a:lnStyleLst>
+        <a:ln w="6350" cap="flat" cmpd="sng" algn="ctr">
+          <a:solidFill>
+            <a:schemeClr val="phClr"/>
+          </a:solidFill>
+          <a:prstDash val="solid"/>
+          <a:miter lim="800000"/>
+        </a:ln>
+        <a:ln w="12700" cap="flat" cmpd="sng" algn="ctr">
+          <a:solidFill>
+            <a:schemeClr val="phClr"/>
+          </a:solidFill>
+          <a:prstDash val="solid"/>
+          <a:miter lim="800000"/>
+        </a:ln>
+        <a:ln w="19050" cap="flat" cmpd="sng" algn="ctr">
+          <a:solidFill>
+            <a:schemeClr val="phClr"/>
+          </a:solidFill>
+          <a:prstDash val="solid"/>
+          <a:miter lim="800000"/>
+        </a:ln>
+      </a:lnStyleLst>
+      <a:effectStyleLst>
+        <a:effectStyle>
+          <a:effectLst/>
+        </a:effectStyle>
+        <a:effectStyle>
+          <a:effectLst/>
+        </a:effectStyle>
+        <a:effectStyle>
+          <a:effectLst>
+            <a:outerShdw blurRad="57150" dist="19050" dir="5400000" algn="ctr" rotWithShape="0">
+              <a:srgbClr val="000000">
+                <a:alpha val="63000"/>
+              </a:srgbClr>
+            </a:outerShdw>
+          </a:effectLst>
+        </a:effectStyle>
+      </a:effectStyleLst>
+      <a:bgFillStyleLst>
+        <a:solidFill>
+          <a:schemeClr val="phClr"/>
+        </a:solidFill>
+        <a:solidFill>
+          <a:schemeClr val="phClr">
+            <a:tint val="95000"/>
+            <a:satMod val="170000"/>
+          </a:schemeClr>
+        </a:solidFill>
+        <a:gradFill rotWithShape="1">
+          <a:gsLst>
+            <a:gs pos="0">
+              <a:schemeClr val="phClr">
+                <a:tint val="93000"/>
+                <a:satMod val="150000"/>
+                <a:shade val="98000"/>
+                <a:lumMod val="102000"/>
+              </a:schemeClr>
+            </a:gs>
+            <a:gs pos="50000">
+              <a:schemeClr val="phClr">
+                <a:tint val="98000"/>
+                <a:satMod val="130000"/>
+                <a:shade val="90000"/>
+                <a:lumMod val="103000"/>
+              </a:schemeClr>
+            </a:gs>
+            <a:gs pos="100000">
+              <a:schemeClr val="phClr">
+                <a:shade val="63000"/>
+                <a:satMod val="120000"/>
+              </a:schemeClr>
+            </a:gs>
+          </a:gsLst>
+          <a:lin ang="5400000" scaled="0"/>
+        </a:gradFill>
+      </a:bgFillStyleLst>
+    </a:fmtScheme>
+  </a:themeElements>
   <a:extLst>
     <a:ext uri="{05A4C25C-085E-4340-85A3-A5531E510DB2}">
       <thm15:themeFamily xmlns:thm15="http://schemas.microsoft.com/office/thememl/2012/main" name="Office Theme" id="{62F939B6-93AF-4DB8-9C6B-D6C7DFDC589F}" vid="{4A3C46E8-61CC-4603-A589-7422A47A8E4A}"/>
